--- a/docs/pitch.pptx
+++ b/docs/pitch.pptx
@@ -508,7 +508,7 @@
           <a:p>
             <a:r>
               <a:rPr lang="en-US" dirty="0"/>
-              <a:t/>
+              <a:t>Около сорока секунд. Работодатель ищет человека по подтверждённому результату, а не по резюме. Грейд даёт только тест. История ФСП — вторая ось: если истории нет, штрафа нет. Имя и почта открываются, когда кандидат принял приглашение. Дальше — как устроены тест и место в списке, и цифры, которые повторяются командой.</a:t>
             </a:r>
             <a:endParaRPr lang="en-US" dirty="0"/>
           </a:p>
@@ -596,7 +596,7 @@
           <a:p>
             <a:r>
               <a:rPr lang="en-US" dirty="0"/>
-              <a:t/>
+              <a:t>Около пятидесяти секунд. Опрос задаёт специализацию. Тест подтверждает грейд. Работодатель описывает потребность и получает порядок, где у каждой строки есть объяснение. Прошлую версию потребности можно вернуть, отобранные из-за этого не пропадают. В приглашении — вилка до вычета НДФЛ. Контакты открываются только после согласия кандидата.</a:t>
             </a:r>
             <a:endParaRPr lang="en-US" dirty="0"/>
           </a:p>
@@ -684,7 +684,7 @@
           <a:p>
             <a:r>
               <a:rPr lang="en-US" dirty="0"/>
-              <a:t/>
+              <a:t>Около пятидесяти секунд. Ключ от другого экземпляра того же семейства не проходит: сдают 0 %. Ключ от того же экземпляра, как в заранее опубликованном банке, даёт 100 %. Поэтому каждый кандидат получает новые экземпляры. Если ключ всё же утёк, карантин забирает 18 из 37 таких ключей. На чистых данных ложных тревог 5 из 68. Команда на слайде: две тысячи кандидатов, зерно 7.</a:t>
             </a:r>
             <a:endParaRPr lang="en-US" dirty="0"/>
           </a:p>
@@ -772,7 +772,7 @@
           <a:p>
             <a:r>
               <a:rPr lang="en-US" dirty="0"/>
-              <a:t/>
+              <a:t>Около сорока секунд. Место складывается из навыков, грейда, специализации, текста и сферы. У строки объяснения есть код причины и, где источник ясен, метка: тест, ФСП, заявлено, вилка или очередь. Против поиска по словам nDCG@10 выше на 0,046 при зерне 2026 и на 0,087 при зерне 7.</a:t>
             </a:r>
             <a:endParaRPr lang="en-US" dirty="0"/>
           </a:p>
@@ -860,7 +860,7 @@
           <a:p>
             <a:r>
               <a:rPr lang="en-US" dirty="0"/>
-              <a:t/>
+              <a:t>Около сорока секунд. Соревнования не поднимают грейд. Ось ФСП учитывает место, давность и командный зачёт. Статус соревнования на балл не влияет. Участие весит ноль, в сумму входят пять сильнейших событий. Кандидат без истории не теряет баллы: nDCG@10 равен 0,661 и с осью, и без неё на зерне 2026, и 0,713 в обоих случаях на зерне 7.</a:t>
             </a:r>
             <a:endParaRPr lang="en-US" dirty="0"/>
           </a:p>
@@ -948,7 +948,7 @@
           <a:p>
             <a:r>
               <a:rPr lang="en-US" dirty="0"/>
-              <a:t/>
+              <a:t>Около пятидесяти секунд. Это те же команды, что в документации, прогон на 2000 кандидатов, зерно 7. Точность вдали от границы грейда — 91,5 %. Повторная сдача, каппа Коэна — 0,51. Завышение грейда — 2,2 %. Случайное угадывание — 0 %. Подбор против ключевых слов — те же +0,046 и +0,087. Регион в оценку не входит. На этом же прогоне четыре скрытые метки дают максимальную долю одного ключа 33 %, 35 %, 33 % и 37 %, отношение меньшей к большей — 0,88.</a:t>
             </a:r>
             <a:endParaRPr lang="en-US" dirty="0"/>
           </a:p>
@@ -1036,7 +1036,7 @@
           <a:p>
             <a:r>
               <a:rPr lang="en-US" dirty="0"/>
-              <a:t/>
+              <a:t>Около сорока секунд, всего около пяти минут. Настоящий ФСП ID и реестр подключаются по уже описанному контракту. Порог по слабой теме не включён: точность падает с 78,5 % до 55,4 %, ложные сдачи — с 7,7 % до 3,0 %. Оценку различимости заданий в банк не пишем: ошибка растёт с 0,146 до 0,283. Веса подбора перекалибруем, когда появятся реальные исходы найма. Запасная запись — docs/pitch-backup.mp4: те же слайды и этот текст, без камеры.</a:t>
             </a:r>
             <a:endParaRPr lang="en-US" dirty="0"/>
           </a:p>
@@ -2515,7 +2515,7 @@
                 <a:ea typeface="Arial" pitchFamily="34" charset="-122"/>
                 <a:cs typeface="Arial" pitchFamily="34" charset="-120"/>
               </a:rPr>
-              <a:t>16 из 42</a:t>
+              <a:t>18 из 37</a:t>
             </a:r>
             <a:endParaRPr lang="en-US" sz="3200" dirty="0"/>
           </a:p>
@@ -2554,7 +2554,7 @@
                 <a:ea typeface="Arial" pitchFamily="34" charset="-122"/>
                 <a:cs typeface="Arial" pitchFamily="34" charset="-120"/>
               </a:rPr>
-              <a:t>утёкших ключей уходит в карантин, на чистых данных 3 из 83</a:t>
+              <a:t>утёкших ключей уходит в карантин, на чистых данных 5 из 68</a:t>
             </a:r>
             <a:endParaRPr lang="en-US" sz="1600" dirty="0"/>
           </a:p>
@@ -2823,7 +2823,7 @@
                 <a:ea typeface="Arial" pitchFamily="34" charset="-122"/>
                 <a:cs typeface="Arial" pitchFamily="34" charset="-120"/>
               </a:rPr>
-              <a:t>+0,045</a:t>
+              <a:t>+0,046</a:t>
             </a:r>
             <a:endParaRPr lang="en-US" sz="3600" dirty="0"/>
           </a:p>
@@ -2923,7 +2923,7 @@
                 <a:ea typeface="Arial" pitchFamily="34" charset="-122"/>
                 <a:cs typeface="Arial" pitchFamily="34" charset="-120"/>
               </a:rPr>
-              <a:t>+0,089</a:t>
+              <a:t>+0,087</a:t>
             </a:r>
             <a:endParaRPr lang="en-US" sz="3600" dirty="0"/>
           </a:p>
@@ -3231,7 +3231,7 @@
                 <a:ea typeface="Arial" pitchFamily="34" charset="-122"/>
                 <a:cs typeface="Arial" pitchFamily="34" charset="-120"/>
               </a:rPr>
-              <a:t>0,660 и 0,661</a:t>
+              <a:t>0,661 и 0,661</a:t>
             </a:r>
             <a:endParaRPr lang="en-US" sz="2600" dirty="0"/>
           </a:p>
@@ -3331,7 +3331,7 @@
                 <a:ea typeface="Arial" pitchFamily="34" charset="-122"/>
                 <a:cs typeface="Arial" pitchFamily="34" charset="-120"/>
               </a:rPr>
-              <a:t>0,715 и 0,715</a:t>
+              <a:t>0,713 и 0,713</a:t>
             </a:r>
             <a:endParaRPr lang="en-US" sz="2600" dirty="0"/>
           </a:p>
@@ -3598,7 +3598,7 @@
                 <a:ea typeface="Arial" pitchFamily="34" charset="-122"/>
                 <a:cs typeface="Arial" pitchFamily="34" charset="-120"/>
               </a:rPr>
-              <a:t>90,9 %</a:t>
+              <a:t>91,5 %</a:t>
             </a:r>
             <a:endParaRPr lang="en-US" sz="1800" dirty="0"/>
           </a:p>
@@ -3735,7 +3735,7 @@
                 <a:ea typeface="Arial" pitchFamily="34" charset="-122"/>
                 <a:cs typeface="Arial" pitchFamily="34" charset="-120"/>
               </a:rPr>
-              <a:t>0,50</a:t>
+              <a:t>0,51</a:t>
             </a:r>
             <a:endParaRPr lang="en-US" sz="1800" dirty="0"/>
           </a:p>
@@ -3872,7 +3872,7 @@
                 <a:ea typeface="Arial" pitchFamily="34" charset="-122"/>
                 <a:cs typeface="Arial" pitchFamily="34" charset="-120"/>
               </a:rPr>
-              <a:t>3,4 %</a:t>
+              <a:t>2,2 %</a:t>
             </a:r>
             <a:endParaRPr lang="en-US" sz="1800" dirty="0"/>
           </a:p>
@@ -4146,7 +4146,7 @@
                 <a:ea typeface="Arial" pitchFamily="34" charset="-122"/>
                 <a:cs typeface="Arial" pitchFamily="34" charset="-120"/>
               </a:rPr>
-              <a:t>+0,045 и +0,089</a:t>
+              <a:t>+0,046 и +0,087</a:t>
             </a:r>
             <a:endParaRPr lang="en-US" sz="1800" dirty="0"/>
           </a:p>
@@ -4413,7 +4413,7 @@
                 <a:ea typeface="Arial" pitchFamily="34" charset="-122"/>
                 <a:cs typeface="Arial" pitchFamily="34" charset="-120"/>
               </a:rPr>
-              <a:t>Порог по слабой теме не включён: точность падает с 77,8 % до 59,5 %, ложные сдачи — с 8,6 % до 5,8 %.</a:t>
+              <a:t>Порог по слабой теме не включён: точность падает с 78,5 % до 55,4 %, ложные сдачи — с 7,7 % до 3,0 %.</a:t>
             </a:r>
             <a:endParaRPr lang="en-US" sz="1800" dirty="0"/>
           </a:p>
@@ -4452,7 +4452,7 @@
                 <a:ea typeface="Arial" pitchFamily="34" charset="-122"/>
                 <a:cs typeface="Arial" pitchFamily="34" charset="-120"/>
               </a:rPr>
-              <a:t>Оценку различимости заданий в банк не пишем: ошибка растёт с 0,139 до 0,262.</a:t>
+              <a:t>Оценку различимости заданий в банк не пишем: ошибка растёт с 0,146 до 0,283.</a:t>
             </a:r>
             <a:endParaRPr lang="en-US" sz="1800" dirty="0"/>
           </a:p>

--- a/docs/pitch.pptx
+++ b/docs/pitch.pptx
@@ -12,9 +12,12 @@
     <p:sldId id="260" r:id="rId6"/>
     <p:sldId id="261" r:id="rId7"/>
     <p:sldId id="262" r:id="rId8"/>
+    <p:sldId id="263" r:id="rId9"/>
+    <p:sldId id="264" r:id="rId10"/>
+    <p:sldId id="265" r:id="rId11"/>
   </p:sldIdLst>
   <p:notesMasterIdLst>
-    <p:notesMasterId r:id="rId9"/>
+    <p:notesMasterId r:id="rId12"/>
   </p:notesMasterIdLst>
   <p:sldSz cx="12191695" cy="6858000"/>
   <p:notesSz cx="6858000" cy="12191695"/>
@@ -508,7 +511,7 @@
           <a:p>
             <a:r>
               <a:rPr lang="en-US" dirty="0"/>
-              <a:t>Около сорока секунд. Работодатель ищет человека по подтверждённому результату, а не по резюме. Грейд даёт только тест. История ФСП — вторая ось: если истории нет, штрафа нет. Имя и почта открываются, когда кандидат принял приглашение. Дальше — как устроены тест и место в списке, и цифры, которые повторяются командой.</a:t>
+              <a:t/>
             </a:r>
             <a:endParaRPr lang="en-US" dirty="0"/>
           </a:p>
@@ -532,6 +535,94 @@
             <a:fld id="{F7021451-1387-4CA6-816F-3879F97B5CBC}" type="slidenum">
               <a:rPr lang="en-US"/>
               <a:t>1</a:t>
+            </a:fld>
+            <a:endParaRPr lang="en-US"/>
+          </a:p>
+        </p:txBody>
+      </p:sp>
+    </p:spTree>
+    <p:extLst>
+      <p:ext uri="{BB962C8B-B14F-4D97-AF65-F5344CB8AC3E}">
+        <p14:creationId xmlns:p14="http://schemas.microsoft.com/office/powerpoint/2010/main" val="1024086991"/>
+      </p:ext>
+    </p:extLst>
+  </p:cSld>
+  <p:clrMapOvr>
+    <a:masterClrMapping/>
+  </p:clrMapOvr>
+</p:notes>
+</file>
+
+<file path=ppt/notesSlides/notesSlide10.xml><?xml version="1.0" encoding="utf-8"?>
+<p:notes xmlns:a="http://schemas.openxmlformats.org/drawingml/2006/main" xmlns:r="http://schemas.openxmlformats.org/officeDocument/2006/relationships" xmlns:p="http://schemas.openxmlformats.org/presentationml/2006/main">
+  <p:cSld>
+    <p:spTree>
+      <p:nvGrpSpPr>
+        <p:cNvPr id="1" name=""/>
+        <p:cNvGrpSpPr/>
+        <p:nvPr/>
+      </p:nvGrpSpPr>
+      <p:grpSpPr>
+        <a:xfrm>
+          <a:off x="0" y="0"/>
+          <a:ext cx="0" cy="0"/>
+          <a:chOff x="0" y="0"/>
+          <a:chExt cx="0" cy="0"/>
+        </a:xfrm>
+      </p:grpSpPr>
+      <p:sp>
+        <p:nvSpPr>
+          <p:cNvPr id="2" name="Slide Image Placeholder 1"/>
+          <p:cNvSpPr>
+            <a:spLocks noGrp="1" noRot="1" noChangeAspect="1"/>
+          </p:cNvSpPr>
+          <p:nvPr>
+            <p:ph type="sldImg"/>
+          </p:nvPr>
+        </p:nvSpPr>
+        <p:spPr/>
+      </p:sp>
+      <p:sp>
+        <p:nvSpPr>
+          <p:cNvPr id="3" name="Notes Placeholder 2"/>
+          <p:cNvSpPr>
+            <a:spLocks noGrp="1"/>
+          </p:cNvSpPr>
+          <p:nvPr>
+            <p:ph type="body" idx="1"/>
+          </p:nvPr>
+        </p:nvSpPr>
+        <p:spPr/>
+        <p:txBody>
+          <a:bodyPr/>
+          <a:lstStyle/>
+          <a:p>
+            <a:r>
+              <a:rPr lang="en-US" dirty="0"/>
+              <a:t/>
+            </a:r>
+            <a:endParaRPr lang="en-US" dirty="0"/>
+          </a:p>
+        </p:txBody>
+      </p:sp>
+      <p:sp>
+        <p:nvSpPr>
+          <p:cNvPr id="4" name="Slide Number Placeholder 3"/>
+          <p:cNvSpPr>
+            <a:spLocks noGrp="1"/>
+          </p:cNvSpPr>
+          <p:nvPr>
+            <p:ph type="sldNum" sz="quarter" idx="10"/>
+          </p:nvPr>
+        </p:nvSpPr>
+        <p:spPr/>
+        <p:txBody>
+          <a:bodyPr/>
+          <a:lstStyle/>
+          <a:p>
+            <a:fld id="{F7021451-1387-4CA6-816F-3879F97B5CBC}" type="slidenum">
+              <a:rPr lang="en-US"/>
+              <a:t>10</a:t>
             </a:fld>
             <a:endParaRPr lang="en-US"/>
           </a:p>
@@ -596,7 +687,7 @@
           <a:p>
             <a:r>
               <a:rPr lang="en-US" dirty="0"/>
-              <a:t>Около пятидесяти секунд. Опрос задаёт специализацию. Тест подтверждает грейд. Работодатель описывает потребность и получает порядок, где у каждой строки есть объяснение. Прошлую версию потребности можно вернуть, отобранные из-за этого не пропадают. В приглашении — вилка до вычета НДФЛ. Контакты открываются только после согласия кандидата.</a:t>
+              <a:t/>
             </a:r>
             <a:endParaRPr lang="en-US" dirty="0"/>
           </a:p>
@@ -684,7 +775,7 @@
           <a:p>
             <a:r>
               <a:rPr lang="en-US" dirty="0"/>
-              <a:t>Около пятидесяти секунд. Ключ от другого экземпляра того же семейства не проходит: сдают 0 %. Ключ от того же экземпляра, как в заранее опубликованном банке, даёт 100 %. Поэтому каждый кандидат получает новые экземпляры. Если ключ всё же утёк, карантин забирает 18 из 37 таких ключей. На чистых данных ложных тревог 5 из 68. Команда на слайде: две тысячи кандидатов, зерно 7.</a:t>
+              <a:t/>
             </a:r>
             <a:endParaRPr lang="en-US" dirty="0"/>
           </a:p>
@@ -772,7 +863,7 @@
           <a:p>
             <a:r>
               <a:rPr lang="en-US" dirty="0"/>
-              <a:t>Около сорока секунд. Место складывается из навыков, грейда, специализации, текста и сферы. У строки объяснения есть код причины и, где источник ясен, метка: тест, ФСП, заявлено, вилка или очередь. Против поиска по словам nDCG@10 выше на 0,046 при зерне 2026 и на 0,087 при зерне 7.</a:t>
+              <a:t/>
             </a:r>
             <a:endParaRPr lang="en-US" dirty="0"/>
           </a:p>
@@ -860,7 +951,7 @@
           <a:p>
             <a:r>
               <a:rPr lang="en-US" dirty="0"/>
-              <a:t>Около сорока секунд. Соревнования не поднимают грейд. Ось ФСП учитывает место, давность и командный зачёт. Статус соревнования на балл не влияет. Участие весит ноль, в сумму входят пять сильнейших событий. Кандидат без истории не теряет баллы: nDCG@10 равен 0,661 и с осью, и без неё на зерне 2026, и 0,713 в обоих случаях на зерне 7.</a:t>
+              <a:t/>
             </a:r>
             <a:endParaRPr lang="en-US" dirty="0"/>
           </a:p>
@@ -948,7 +1039,7 @@
           <a:p>
             <a:r>
               <a:rPr lang="en-US" dirty="0"/>
-              <a:t>Около пятидесяти секунд. Это те же команды, что в документации, прогон на 2000 кандидатов, зерно 7. Точность вдали от границы грейда — 91,5 %. Повторная сдача, каппа Коэна — 0,51. Завышение грейда — 2,2 %. Случайное угадывание — 0 %. Подбор против ключевых слов — те же +0,046 и +0,087. Регион в оценку не входит. На этом же прогоне четыре скрытые метки дают максимальную долю одного ключа 33 %, 35 %, 33 % и 37 %, отношение меньшей к большей — 0,88.</a:t>
+              <a:t/>
             </a:r>
             <a:endParaRPr lang="en-US" dirty="0"/>
           </a:p>
@@ -1036,7 +1127,7 @@
           <a:p>
             <a:r>
               <a:rPr lang="en-US" dirty="0"/>
-              <a:t>Около сорока секунд, всего около пяти минут. Настоящий ФСП ID и реестр подключаются по уже описанному контракту. Порог по слабой теме не включён: точность падает с 78,5 % до 55,4 %, ложные сдачи — с 7,7 % до 3,0 %. Оценку различимости заданий в банк не пишем: ошибка растёт с 0,146 до 0,283. Веса подбора перекалибруем, когда появятся реальные исходы найма. Запасная запись — docs/pitch-backup.mp4: те же слайды и этот текст, без камеры.</a:t>
+              <a:t/>
             </a:r>
             <a:endParaRPr lang="en-US" dirty="0"/>
           </a:p>
@@ -1060,6 +1151,182 @@
             <a:fld id="{F7021451-1387-4CA6-816F-3879F97B5CBC}" type="slidenum">
               <a:rPr lang="en-US"/>
               <a:t>7</a:t>
+            </a:fld>
+            <a:endParaRPr lang="en-US"/>
+          </a:p>
+        </p:txBody>
+      </p:sp>
+    </p:spTree>
+    <p:extLst>
+      <p:ext uri="{BB962C8B-B14F-4D97-AF65-F5344CB8AC3E}">
+        <p14:creationId xmlns:p14="http://schemas.microsoft.com/office/powerpoint/2010/main" val="1024086991"/>
+      </p:ext>
+    </p:extLst>
+  </p:cSld>
+  <p:clrMapOvr>
+    <a:masterClrMapping/>
+  </p:clrMapOvr>
+</p:notes>
+</file>
+
+<file path=ppt/notesSlides/notesSlide8.xml><?xml version="1.0" encoding="utf-8"?>
+<p:notes xmlns:a="http://schemas.openxmlformats.org/drawingml/2006/main" xmlns:r="http://schemas.openxmlformats.org/officeDocument/2006/relationships" xmlns:p="http://schemas.openxmlformats.org/presentationml/2006/main">
+  <p:cSld>
+    <p:spTree>
+      <p:nvGrpSpPr>
+        <p:cNvPr id="1" name=""/>
+        <p:cNvGrpSpPr/>
+        <p:nvPr/>
+      </p:nvGrpSpPr>
+      <p:grpSpPr>
+        <a:xfrm>
+          <a:off x="0" y="0"/>
+          <a:ext cx="0" cy="0"/>
+          <a:chOff x="0" y="0"/>
+          <a:chExt cx="0" cy="0"/>
+        </a:xfrm>
+      </p:grpSpPr>
+      <p:sp>
+        <p:nvSpPr>
+          <p:cNvPr id="2" name="Slide Image Placeholder 1"/>
+          <p:cNvSpPr>
+            <a:spLocks noGrp="1" noRot="1" noChangeAspect="1"/>
+          </p:cNvSpPr>
+          <p:nvPr>
+            <p:ph type="sldImg"/>
+          </p:nvPr>
+        </p:nvSpPr>
+        <p:spPr/>
+      </p:sp>
+      <p:sp>
+        <p:nvSpPr>
+          <p:cNvPr id="3" name="Notes Placeholder 2"/>
+          <p:cNvSpPr>
+            <a:spLocks noGrp="1"/>
+          </p:cNvSpPr>
+          <p:nvPr>
+            <p:ph type="body" idx="1"/>
+          </p:nvPr>
+        </p:nvSpPr>
+        <p:spPr/>
+        <p:txBody>
+          <a:bodyPr/>
+          <a:lstStyle/>
+          <a:p>
+            <a:r>
+              <a:rPr lang="en-US" dirty="0"/>
+              <a:t/>
+            </a:r>
+            <a:endParaRPr lang="en-US" dirty="0"/>
+          </a:p>
+        </p:txBody>
+      </p:sp>
+      <p:sp>
+        <p:nvSpPr>
+          <p:cNvPr id="4" name="Slide Number Placeholder 3"/>
+          <p:cNvSpPr>
+            <a:spLocks noGrp="1"/>
+          </p:cNvSpPr>
+          <p:nvPr>
+            <p:ph type="sldNum" sz="quarter" idx="10"/>
+          </p:nvPr>
+        </p:nvSpPr>
+        <p:spPr/>
+        <p:txBody>
+          <a:bodyPr/>
+          <a:lstStyle/>
+          <a:p>
+            <a:fld id="{F7021451-1387-4CA6-816F-3879F97B5CBC}" type="slidenum">
+              <a:rPr lang="en-US"/>
+              <a:t>8</a:t>
+            </a:fld>
+            <a:endParaRPr lang="en-US"/>
+          </a:p>
+        </p:txBody>
+      </p:sp>
+    </p:spTree>
+    <p:extLst>
+      <p:ext uri="{BB962C8B-B14F-4D97-AF65-F5344CB8AC3E}">
+        <p14:creationId xmlns:p14="http://schemas.microsoft.com/office/powerpoint/2010/main" val="1024086991"/>
+      </p:ext>
+    </p:extLst>
+  </p:cSld>
+  <p:clrMapOvr>
+    <a:masterClrMapping/>
+  </p:clrMapOvr>
+</p:notes>
+</file>
+
+<file path=ppt/notesSlides/notesSlide9.xml><?xml version="1.0" encoding="utf-8"?>
+<p:notes xmlns:a="http://schemas.openxmlformats.org/drawingml/2006/main" xmlns:r="http://schemas.openxmlformats.org/officeDocument/2006/relationships" xmlns:p="http://schemas.openxmlformats.org/presentationml/2006/main">
+  <p:cSld>
+    <p:spTree>
+      <p:nvGrpSpPr>
+        <p:cNvPr id="1" name=""/>
+        <p:cNvGrpSpPr/>
+        <p:nvPr/>
+      </p:nvGrpSpPr>
+      <p:grpSpPr>
+        <a:xfrm>
+          <a:off x="0" y="0"/>
+          <a:ext cx="0" cy="0"/>
+          <a:chOff x="0" y="0"/>
+          <a:chExt cx="0" cy="0"/>
+        </a:xfrm>
+      </p:grpSpPr>
+      <p:sp>
+        <p:nvSpPr>
+          <p:cNvPr id="2" name="Slide Image Placeholder 1"/>
+          <p:cNvSpPr>
+            <a:spLocks noGrp="1" noRot="1" noChangeAspect="1"/>
+          </p:cNvSpPr>
+          <p:nvPr>
+            <p:ph type="sldImg"/>
+          </p:nvPr>
+        </p:nvSpPr>
+        <p:spPr/>
+      </p:sp>
+      <p:sp>
+        <p:nvSpPr>
+          <p:cNvPr id="3" name="Notes Placeholder 2"/>
+          <p:cNvSpPr>
+            <a:spLocks noGrp="1"/>
+          </p:cNvSpPr>
+          <p:nvPr>
+            <p:ph type="body" idx="1"/>
+          </p:nvPr>
+        </p:nvSpPr>
+        <p:spPr/>
+        <p:txBody>
+          <a:bodyPr/>
+          <a:lstStyle/>
+          <a:p>
+            <a:r>
+              <a:rPr lang="en-US" dirty="0"/>
+              <a:t/>
+            </a:r>
+            <a:endParaRPr lang="en-US" dirty="0"/>
+          </a:p>
+        </p:txBody>
+      </p:sp>
+      <p:sp>
+        <p:nvSpPr>
+          <p:cNvPr id="4" name="Slide Number Placeholder 3"/>
+          <p:cNvSpPr>
+            <a:spLocks noGrp="1"/>
+          </p:cNvSpPr>
+          <p:nvPr>
+            <p:ph type="sldNum" sz="quarter" idx="10"/>
+          </p:nvPr>
+        </p:nvSpPr>
+        <p:spPr/>
+        <p:txBody>
+          <a:bodyPr/>
+          <a:lstStyle/>
+          <a:p>
+            <a:fld id="{F7021451-1387-4CA6-816F-3879F97B5CBC}" type="slidenum">
+              <a:rPr lang="en-US"/>
+              <a:t>9</a:t>
             </a:fld>
             <a:endParaRPr lang="en-US"/>
           </a:p>
@@ -1474,7 +1741,7 @@
               <a:buNone/>
             </a:pPr>
             <a:r>
-              <a:rPr lang="en-US" sz="1300" dirty="0">
+              <a:rPr lang="en-US" sz="1200" spc="200" kern="0" dirty="0">
                 <a:solidFill>
                   <a:srgbClr val="C8C9CA"/>
                 </a:solidFill>
@@ -1482,9 +1749,9 @@
                 <a:ea typeface="Arial" pitchFamily="34" charset="-122"/>
                 <a:cs typeface="Arial" pitchFamily="34" charset="-120"/>
               </a:rPr>
-              <a:t>ЛЦТ 2026  ·  ФЕДЕРАЦИЯ СПОРТИВНОГО ПРОГРАММИРОВАНИЯ</a:t>
-            </a:r>
-            <a:endParaRPr lang="en-US" sz="1300" dirty="0"/>
+              <a:t>ЛЦТ 2026 · ФЕДЕРАЦИЯ СПОРТИВНОГО ПРОГРАММИРОВАНИЯ</a:t>
+            </a:r>
+            <a:endParaRPr lang="en-US" sz="1200" dirty="0"/>
           </a:p>
         </p:txBody>
       </p:sp>
@@ -1496,8 +1763,8 @@
         </p:nvSpPr>
         <p:spPr>
           <a:xfrm>
-            <a:off x="502920" y="1965960"/>
-            <a:ext cx="11155680" cy="1051560"/>
+            <a:off x="502920" y="1874520"/>
+            <a:ext cx="11155680" cy="914400"/>
           </a:xfrm>
           <a:prstGeom prst="rect">
             <a:avLst/>
@@ -1513,7 +1780,7 @@
               <a:buNone/>
             </a:pPr>
             <a:r>
-              <a:rPr lang="en-US" sz="3600" b="1" dirty="0">
+              <a:rPr lang="en-US" sz="3000" b="1" dirty="0">
                 <a:solidFill>
                   <a:srgbClr val="FFFFFF"/>
                 </a:solidFill>
@@ -1521,16 +1788,227 @@
                 <a:ea typeface="Arial" pitchFamily="34" charset="-122"/>
                 <a:cs typeface="Arial" pitchFamily="34" charset="-120"/>
               </a:rPr>
-              <a:t>Работодатель находит человека.</a:t>
-            </a:r>
-            <a:endParaRPr lang="en-US" sz="3600" dirty="0"/>
-          </a:p>
+              <a:t>ФСП Талант: работодатель находит человека, а не наоборот</a:t>
+            </a:r>
+            <a:endParaRPr lang="en-US" sz="3000" dirty="0"/>
+          </a:p>
+        </p:txBody>
+      </p:sp>
+      <p:sp>
+        <p:nvSpPr>
+          <p:cNvPr id="6" name="Text 4"/>
+          <p:cNvSpPr/>
+          <p:nvPr/>
+        </p:nvSpPr>
+        <p:spPr>
+          <a:xfrm>
+            <a:off x="502920" y="3017520"/>
+            <a:ext cx="10058400" cy="914400"/>
+          </a:xfrm>
+          <a:prstGeom prst="rect">
+            <a:avLst/>
+          </a:prstGeom>
+          <a:noFill/>
+          <a:ln/>
+        </p:spPr>
+        <p:txBody>
+          <a:bodyPr wrap="square" lIns="0" tIns="0" rIns="0" bIns="0" rtlCol="0" anchor="ctr"/>
+          <a:lstStyle/>
           <a:p>
             <a:pPr indent="0" marL="0">
               <a:buNone/>
             </a:pPr>
             <a:r>
-              <a:rPr lang="en-US" sz="3600" b="1" dirty="0">
+              <a:rPr lang="en-US" sz="2000" dirty="0">
+                <a:solidFill>
+                  <a:srgbClr val="EDEDED"/>
+                </a:solidFill>
+                <a:latin typeface="Arial" pitchFamily="34" charset="0"/>
+                <a:ea typeface="Arial" pitchFamily="34" charset="-122"/>
+                <a:cs typeface="Arial" pitchFamily="34" charset="-120"/>
+              </a:rPr>
+              <a:t>Подтверждённый тестом грейд, объяснимая подборка и контакты только после согласия кандидата.</a:t>
+            </a:r>
+            <a:endParaRPr lang="en-US" sz="2000" dirty="0"/>
+          </a:p>
+        </p:txBody>
+      </p:sp>
+      <p:sp>
+        <p:nvSpPr>
+          <p:cNvPr id="7" name="Text 5"/>
+          <p:cNvSpPr/>
+          <p:nvPr/>
+        </p:nvSpPr>
+        <p:spPr>
+          <a:xfrm>
+            <a:off x="10881360" y="6309360"/>
+            <a:ext cx="914400" cy="274320"/>
+          </a:xfrm>
+          <a:prstGeom prst="rect">
+            <a:avLst/>
+          </a:prstGeom>
+          <a:noFill/>
+          <a:ln/>
+        </p:spPr>
+        <p:txBody>
+          <a:bodyPr wrap="square" lIns="0" tIns="0" rIns="0" bIns="0" rtlCol="0" anchor="ctr"/>
+          <a:lstStyle/>
+          <a:p>
+            <a:pPr algn="r" indent="0" marL="0">
+              <a:buNone/>
+            </a:pPr>
+            <a:r>
+              <a:rPr lang="en-US" sz="1100" dirty="0">
+                <a:solidFill>
+                  <a:srgbClr val="5C5E66"/>
+                </a:solidFill>
+                <a:latin typeface="Arial" pitchFamily="34" charset="0"/>
+                <a:ea typeface="Arial" pitchFamily="34" charset="-122"/>
+                <a:cs typeface="Arial" pitchFamily="34" charset="-120"/>
+              </a:rPr>
+              <a:t>1 / 10</a:t>
+            </a:r>
+            <a:endParaRPr lang="en-US" sz="1100" dirty="0"/>
+          </a:p>
+        </p:txBody>
+      </p:sp>
+    </p:spTree>
+  </p:cSld>
+  <p:clrMapOvr>
+    <a:masterClrMapping/>
+  </p:clrMapOvr>
+</p:sld>
+</file>
+
+<file path=ppt/slides/slide10.xml><?xml version="1.0" encoding="utf-8"?>
+<p:sld xmlns:a="http://schemas.openxmlformats.org/drawingml/2006/main" xmlns:r="http://schemas.openxmlformats.org/officeDocument/2006/relationships" xmlns:p="http://schemas.openxmlformats.org/presentationml/2006/main">
+  <p:cSld name="Slide 10">
+    <p:bg>
+      <p:bgPr>
+        <a:solidFill>
+          <a:srgbClr val="1B1C21"/>
+        </a:solidFill>
+      </p:bgPr>
+    </p:bg>
+    <p:spTree>
+      <p:nvGrpSpPr>
+        <p:cNvPr id="1" name=""/>
+        <p:cNvGrpSpPr/>
+        <p:nvPr/>
+      </p:nvGrpSpPr>
+      <p:grpSpPr>
+        <a:xfrm>
+          <a:off x="0" y="0"/>
+          <a:ext cx="0" cy="0"/>
+          <a:chOff x="0" y="0"/>
+          <a:chExt cx="0" cy="0"/>
+        </a:xfrm>
+      </p:grpSpPr>
+      <p:sp>
+        <p:nvSpPr>
+          <p:cNvPr id="2" name="Shape 0"/>
+          <p:cNvSpPr/>
+          <p:nvPr/>
+        </p:nvSpPr>
+        <p:spPr>
+          <a:xfrm>
+            <a:off x="0" y="0"/>
+            <a:ext cx="109728" cy="6858000"/>
+          </a:xfrm>
+          <a:prstGeom prst="rect">
+            <a:avLst/>
+          </a:prstGeom>
+          <a:solidFill>
+            <a:srgbClr val="402FFF"/>
+          </a:solidFill>
+          <a:ln/>
+        </p:spPr>
+      </p:sp>
+      <p:sp>
+        <p:nvSpPr>
+          <p:cNvPr id="3" name="Shape 1"/>
+          <p:cNvSpPr/>
+          <p:nvPr/>
+        </p:nvSpPr>
+        <p:spPr>
+          <a:xfrm>
+            <a:off x="109728" y="0"/>
+            <a:ext cx="54864" cy="6858000"/>
+          </a:xfrm>
+          <a:prstGeom prst="rect">
+            <a:avLst/>
+          </a:prstGeom>
+          <a:solidFill>
+            <a:srgbClr val="EC1D35"/>
+          </a:solidFill>
+          <a:ln/>
+        </p:spPr>
+      </p:sp>
+      <p:sp>
+        <p:nvSpPr>
+          <p:cNvPr id="4" name="Text 2"/>
+          <p:cNvSpPr/>
+          <p:nvPr/>
+        </p:nvSpPr>
+        <p:spPr>
+          <a:xfrm>
+            <a:off x="502920" y="457200"/>
+            <a:ext cx="10972800" cy="274320"/>
+          </a:xfrm>
+          <a:prstGeom prst="rect">
+            <a:avLst/>
+          </a:prstGeom>
+          <a:noFill/>
+          <a:ln/>
+        </p:spPr>
+        <p:txBody>
+          <a:bodyPr wrap="square" lIns="0" tIns="0" rIns="0" bIns="0" rtlCol="0" anchor="ctr"/>
+          <a:lstStyle/>
+          <a:p>
+            <a:pPr indent="0" marL="0">
+              <a:buNone/>
+            </a:pPr>
+            <a:r>
+              <a:rPr lang="en-US" sz="1200" spc="200" kern="0" dirty="0">
+                <a:solidFill>
+                  <a:srgbClr val="C8C9CA"/>
+                </a:solidFill>
+                <a:latin typeface="Arial" pitchFamily="34" charset="0"/>
+                <a:ea typeface="Arial" pitchFamily="34" charset="-122"/>
+                <a:cs typeface="Arial" pitchFamily="34" charset="-120"/>
+              </a:rPr>
+              <a:t>ЧТО ДАЛЬШЕ</a:t>
+            </a:r>
+            <a:endParaRPr lang="en-US" sz="1200" dirty="0"/>
+          </a:p>
+        </p:txBody>
+      </p:sp>
+      <p:sp>
+        <p:nvSpPr>
+          <p:cNvPr id="5" name="Text 3"/>
+          <p:cNvSpPr/>
+          <p:nvPr/>
+        </p:nvSpPr>
+        <p:spPr>
+          <a:xfrm>
+            <a:off x="502920" y="777240"/>
+            <a:ext cx="11155680" cy="914400"/>
+          </a:xfrm>
+          <a:prstGeom prst="rect">
+            <a:avLst/>
+          </a:prstGeom>
+          <a:noFill/>
+          <a:ln/>
+        </p:spPr>
+        <p:txBody>
+          <a:bodyPr wrap="square" lIns="0" tIns="0" rIns="0" bIns="0" rtlCol="0" anchor="ctr"/>
+          <a:lstStyle/>
+          <a:p>
+            <a:pPr indent="0" marL="0">
+              <a:buNone/>
+            </a:pPr>
+            <a:r>
+              <a:rPr lang="en-US" sz="3000" b="1" dirty="0">
                 <a:solidFill>
                   <a:srgbClr val="FFFFFF"/>
                 </a:solidFill>
@@ -1538,9 +2016,9 @@
                 <a:ea typeface="Arial" pitchFamily="34" charset="-122"/>
                 <a:cs typeface="Arial" pitchFamily="34" charset="-120"/>
               </a:rPr>
-              <a:t>Не наоборот.</a:t>
-            </a:r>
-            <a:endParaRPr lang="en-US" sz="3600" dirty="0"/>
+              <a:t>Пилот с Федерацией</a:t>
+            </a:r>
+            <a:endParaRPr lang="en-US" sz="3000" dirty="0"/>
           </a:p>
         </p:txBody>
       </p:sp>
@@ -1552,8 +2030,8 @@
         </p:nvSpPr>
         <p:spPr>
           <a:xfrm>
-            <a:off x="502920" y="4297680"/>
-            <a:ext cx="9601200" cy="640080"/>
+            <a:off x="502920" y="1828800"/>
+            <a:ext cx="10972800" cy="3200400"/>
           </a:xfrm>
           <a:prstGeom prst="rect">
             <a:avLst/>
@@ -1565,21 +2043,106 @@
           <a:bodyPr wrap="square" lIns="0" tIns="0" rIns="0" bIns="0" rtlCol="0" anchor="ctr"/>
           <a:lstStyle/>
           <a:p>
-            <a:pPr indent="0" marL="0">
-              <a:buNone/>
-            </a:pPr>
-            <a:r>
-              <a:rPr lang="en-US" sz="1800" dirty="0">
-                <a:solidFill>
-                  <a:srgbClr val="EDEDED"/>
-                </a:solidFill>
-                <a:latin typeface="Arial" pitchFamily="34" charset="0"/>
-                <a:ea typeface="Arial" pitchFamily="34" charset="-122"/>
-                <a:cs typeface="Arial" pitchFamily="34" charset="-120"/>
-              </a:rPr>
-              <a:t>Подтверждённый профиль, объяснимая подборка и контакты только после согласия кандидата.</a:t>
-            </a:r>
-            <a:endParaRPr lang="en-US" sz="1800" dirty="0"/>
+            <a:pPr marL="342900" indent="-342900">
+              <a:spcAft>
+                <a:spcPts val="1200"/>
+              </a:spcAft>
+              <a:buSzPct val="100000"/>
+              <a:buChar char="•"/>
+            </a:pPr>
+            <a:r>
+              <a:rPr lang="en-US" sz="2000" dirty="0">
+                <a:solidFill>
+                  <a:srgbClr val="FFFFFF"/>
+                </a:solidFill>
+                <a:latin typeface="Arial" pitchFamily="34" charset="0"/>
+                <a:ea typeface="Arial" pitchFamily="34" charset="-122"/>
+                <a:cs typeface="Arial" pitchFamily="34" charset="-120"/>
+              </a:rPr>
+              <a:t>Подключить ФСП ID и реестр протоколов по готовому контракту OIDC.</a:t>
+            </a:r>
+            <a:endParaRPr lang="en-US" sz="2000" dirty="0"/>
+          </a:p>
+          <a:p>
+            <a:pPr marL="342900" indent="-342900">
+              <a:spcAft>
+                <a:spcPts val="1200"/>
+              </a:spcAft>
+              <a:buSzPct val="100000"/>
+              <a:buChar char="•"/>
+            </a:pPr>
+            <a:r>
+              <a:rPr lang="en-US" sz="2000" dirty="0">
+                <a:solidFill>
+                  <a:srgbClr val="FFFFFF"/>
+                </a:solidFill>
+                <a:latin typeface="Arial" pitchFamily="34" charset="0"/>
+                <a:ea typeface="Arial" pitchFamily="34" charset="-122"/>
+                <a:cs typeface="Arial" pitchFamily="34" charset="-120"/>
+              </a:rPr>
+              <a:t>Откалибровать веса подбора на исходах приглашений и найма.</a:t>
+            </a:r>
+            <a:endParaRPr lang="en-US" sz="2000" dirty="0"/>
+          </a:p>
+          <a:p>
+            <a:pPr marL="342900" indent="-342900">
+              <a:spcAft>
+                <a:spcPts val="1200"/>
+              </a:spcAft>
+              <a:buSzPct val="100000"/>
+              <a:buChar char="•"/>
+            </a:pPr>
+            <a:r>
+              <a:rPr lang="en-US" sz="2000" dirty="0">
+                <a:solidFill>
+                  <a:srgbClr val="FFFFFF"/>
+                </a:solidFill>
+                <a:latin typeface="Arial" pitchFamily="34" charset="0"/>
+                <a:ea typeface="Arial" pitchFamily="34" charset="-122"/>
+                <a:cs typeface="Arial" pitchFamily="34" charset="-120"/>
+              </a:rPr>
+              <a:t>Открыть стенд для команд-участников ФСП и работодателей-партнёров.</a:t>
+            </a:r>
+            <a:endParaRPr lang="en-US" sz="2000" dirty="0"/>
+          </a:p>
+        </p:txBody>
+      </p:sp>
+      <p:sp>
+        <p:nvSpPr>
+          <p:cNvPr id="7" name="Text 5"/>
+          <p:cNvSpPr/>
+          <p:nvPr/>
+        </p:nvSpPr>
+        <p:spPr>
+          <a:xfrm>
+            <a:off x="10881360" y="6309360"/>
+            <a:ext cx="914400" cy="274320"/>
+          </a:xfrm>
+          <a:prstGeom prst="rect">
+            <a:avLst/>
+          </a:prstGeom>
+          <a:noFill/>
+          <a:ln/>
+        </p:spPr>
+        <p:txBody>
+          <a:bodyPr wrap="square" lIns="0" tIns="0" rIns="0" bIns="0" rtlCol="0" anchor="ctr"/>
+          <a:lstStyle/>
+          <a:p>
+            <a:pPr algn="r" indent="0" marL="0">
+              <a:buNone/>
+            </a:pPr>
+            <a:r>
+              <a:rPr lang="en-US" sz="1100" dirty="0">
+                <a:solidFill>
+                  <a:srgbClr val="5C5E66"/>
+                </a:solidFill>
+                <a:latin typeface="Arial" pitchFamily="34" charset="0"/>
+                <a:ea typeface="Arial" pitchFamily="34" charset="-122"/>
+                <a:cs typeface="Arial" pitchFamily="34" charset="-120"/>
+              </a:rPr>
+              <a:t>10 / 10</a:t>
+            </a:r>
+            <a:endParaRPr lang="en-US" sz="1100" dirty="0"/>
           </a:p>
         </p:txBody>
       </p:sp>
@@ -1637,14 +2200,34 @@
       </p:sp>
       <p:sp>
         <p:nvSpPr>
-          <p:cNvPr id="3" name="Text 1"/>
-          <p:cNvSpPr/>
-          <p:nvPr/>
-        </p:nvSpPr>
-        <p:spPr>
-          <a:xfrm>
-            <a:off x="502920" y="292608"/>
-            <a:ext cx="10972800" cy="292608"/>
+          <p:cNvPr id="3" name="Shape 1"/>
+          <p:cNvSpPr/>
+          <p:nvPr/>
+        </p:nvSpPr>
+        <p:spPr>
+          <a:xfrm>
+            <a:off x="109728" y="0"/>
+            <a:ext cx="54864" cy="6858000"/>
+          </a:xfrm>
+          <a:prstGeom prst="rect">
+            <a:avLst/>
+          </a:prstGeom>
+          <a:solidFill>
+            <a:srgbClr val="EC1D35"/>
+          </a:solidFill>
+          <a:ln/>
+        </p:spPr>
+      </p:sp>
+      <p:sp>
+        <p:nvSpPr>
+          <p:cNvPr id="4" name="Text 2"/>
+          <p:cNvSpPr/>
+          <p:nvPr/>
+        </p:nvSpPr>
+        <p:spPr>
+          <a:xfrm>
+            <a:off x="502920" y="457200"/>
+            <a:ext cx="10972800" cy="274320"/>
           </a:xfrm>
           <a:prstGeom prst="rect">
             <a:avLst/>
@@ -1660,7 +2243,7 @@
               <a:buNone/>
             </a:pPr>
             <a:r>
-              <a:rPr lang="en-US" sz="1200" spc="120" kern="0" dirty="0">
+              <a:rPr lang="en-US" sz="1200" spc="200" kern="0" dirty="0">
                 <a:solidFill>
                   <a:srgbClr val="402FFF"/>
                 </a:solidFill>
@@ -1668,7 +2251,7 @@
                 <a:ea typeface="Arial" pitchFamily="34" charset="-122"/>
                 <a:cs typeface="Arial" pitchFamily="34" charset="-120"/>
               </a:rPr>
-              <a:t>КАК УСТРОЕН НАЙМ</a:t>
+              <a:t>ПРОБЛЕМА И ОТВЕТ</a:t>
             </a:r>
             <a:endParaRPr lang="en-US" sz="1200" dirty="0"/>
           </a:p>
@@ -1676,14 +2259,14 @@
       </p:sp>
       <p:sp>
         <p:nvSpPr>
-          <p:cNvPr id="4" name="Text 2"/>
-          <p:cNvSpPr/>
-          <p:nvPr/>
-        </p:nvSpPr>
-        <p:spPr>
-          <a:xfrm>
-            <a:off x="502920" y="640080"/>
-            <a:ext cx="11155680" cy="1051560"/>
+          <p:cNvPr id="5" name="Text 3"/>
+          <p:cNvSpPr/>
+          <p:nvPr/>
+        </p:nvSpPr>
+        <p:spPr>
+          <a:xfrm>
+            <a:off x="502920" y="777240"/>
+            <a:ext cx="11155680" cy="914400"/>
           </a:xfrm>
           <a:prstGeom prst="rect">
             <a:avLst/>
@@ -1699,7 +2282,7 @@
               <a:buNone/>
             </a:pPr>
             <a:r>
-              <a:rPr lang="en-US" sz="3600" b="1" dirty="0">
+              <a:rPr lang="en-US" sz="3000" b="1" dirty="0">
                 <a:solidFill>
                   <a:srgbClr val="1B1C21"/>
                 </a:solidFill>
@@ -1707,44 +2290,49 @@
                 <a:ea typeface="Arial" pitchFamily="34" charset="-122"/>
                 <a:cs typeface="Arial" pitchFamily="34" charset="-120"/>
               </a:rPr>
-              <a:t>Потребность, подборка, приглашение</a:t>
-            </a:r>
-            <a:endParaRPr lang="en-US" sz="3600" dirty="0"/>
-          </a:p>
-        </p:txBody>
-      </p:sp>
-      <p:sp>
-        <p:nvSpPr>
-          <p:cNvPr id="5" name="Shape 3"/>
-          <p:cNvSpPr/>
-          <p:nvPr/>
-        </p:nvSpPr>
-        <p:spPr>
-          <a:xfrm>
-            <a:off x="502920" y="1965960"/>
-            <a:ext cx="11155680" cy="1280160"/>
+              <a:t>Резюме обещает, тест подтверждает</a:t>
+            </a:r>
+            <a:endParaRPr lang="en-US" sz="3000" dirty="0"/>
+          </a:p>
+        </p:txBody>
+      </p:sp>
+      <p:sp>
+        <p:nvSpPr>
+          <p:cNvPr id="6" name="Shape 4"/>
+          <p:cNvSpPr/>
+          <p:nvPr/>
+        </p:nvSpPr>
+        <p:spPr>
+          <a:xfrm>
+            <a:off x="502920" y="1737360"/>
+            <a:ext cx="11155680" cy="1234440"/>
           </a:xfrm>
           <a:prstGeom prst="roundRect">
             <a:avLst>
-              <a:gd name="adj" fmla="val 5714"/>
+              <a:gd name="adj" fmla="val 5926"/>
             </a:avLst>
           </a:prstGeom>
           <a:solidFill>
             <a:srgbClr val="FFFFFF"/>
           </a:solidFill>
-          <a:ln/>
-        </p:spPr>
-      </p:sp>
-      <p:sp>
-        <p:nvSpPr>
-          <p:cNvPr id="6" name="Text 4"/>
-          <p:cNvSpPr/>
-          <p:nvPr/>
-        </p:nvSpPr>
-        <p:spPr>
-          <a:xfrm>
-            <a:off x="731520" y="2286000"/>
-            <a:ext cx="1005840" cy="548640"/>
+          <a:ln w="12700">
+            <a:solidFill>
+              <a:srgbClr val="FFFFFF"/>
+            </a:solidFill>
+            <a:prstDash val="solid"/>
+          </a:ln>
+        </p:spPr>
+      </p:sp>
+      <p:sp>
+        <p:nvSpPr>
+          <p:cNvPr id="7" name="Text 5"/>
+          <p:cNvSpPr/>
+          <p:nvPr/>
+        </p:nvSpPr>
+        <p:spPr>
+          <a:xfrm>
+            <a:off x="731520" y="1874520"/>
+            <a:ext cx="10698480" cy="960120"/>
           </a:xfrm>
           <a:prstGeom prst="rect">
             <a:avLst/>
@@ -1760,46 +2348,21 @@
               <a:buNone/>
             </a:pPr>
             <a:r>
-              <a:rPr lang="en-US" sz="2200" b="1" dirty="0">
-                <a:solidFill>
-                  <a:srgbClr val="402FFF"/>
-                </a:solidFill>
-                <a:latin typeface="Arial" pitchFamily="34" charset="0"/>
-                <a:ea typeface="Arial" pitchFamily="34" charset="-122"/>
-                <a:cs typeface="Arial" pitchFamily="34" charset="-120"/>
-              </a:rPr>
-              <a:t>01</a:t>
-            </a:r>
-            <a:endParaRPr lang="en-US" sz="2200" dirty="0"/>
-          </a:p>
-        </p:txBody>
-      </p:sp>
-      <p:sp>
-        <p:nvSpPr>
-          <p:cNvPr id="7" name="Text 5"/>
-          <p:cNvSpPr/>
-          <p:nvPr/>
-        </p:nvSpPr>
-        <p:spPr>
-          <a:xfrm>
-            <a:off x="1920240" y="2167128"/>
-            <a:ext cx="9144000" cy="365760"/>
-          </a:xfrm>
-          <a:prstGeom prst="rect">
-            <a:avLst/>
-          </a:prstGeom>
-          <a:noFill/>
-          <a:ln/>
-        </p:spPr>
-        <p:txBody>
-          <a:bodyPr wrap="square" lIns="0" tIns="0" rIns="0" bIns="0" rtlCol="0" anchor="ctr"/>
-          <a:lstStyle/>
-          <a:p>
+              <a:rPr lang="en-US" sz="1700" b="1" dirty="0">
+                <a:solidFill>
+                  <a:srgbClr val="1B1C21"/>
+                </a:solidFill>
+                <a:latin typeface="Arial" pitchFamily="34" charset="0"/>
+                <a:ea typeface="Arial" pitchFamily="34" charset="-122"/>
+                <a:cs typeface="Arial" pitchFamily="34" charset="-120"/>
+              </a:rPr>
+              <a:t>Проблема. </a:t>
+            </a:r>
             <a:pPr indent="0" marL="0">
               <a:buNone/>
             </a:pPr>
             <a:r>
-              <a:rPr lang="en-US" sz="1800" b="1" dirty="0">
+              <a:rPr lang="en-US" sz="1700" dirty="0">
                 <a:solidFill>
                   <a:srgbClr val="1B1C21"/>
                 </a:solidFill>
@@ -1807,83 +2370,49 @@
                 <a:ea typeface="Arial" pitchFamily="34" charset="-122"/>
                 <a:cs typeface="Arial" pitchFamily="34" charset="-120"/>
               </a:rPr>
-              <a:t>Кандидат</a:t>
-            </a:r>
-            <a:endParaRPr lang="en-US" sz="1800" dirty="0"/>
-          </a:p>
-        </p:txBody>
-      </p:sp>
-      <p:sp>
-        <p:nvSpPr>
-          <p:cNvPr id="8" name="Text 6"/>
-          <p:cNvSpPr/>
-          <p:nvPr/>
-        </p:nvSpPr>
-        <p:spPr>
-          <a:xfrm>
-            <a:off x="1920240" y="2587752"/>
-            <a:ext cx="9326880" cy="457200"/>
-          </a:xfrm>
-          <a:prstGeom prst="rect">
-            <a:avLst/>
-          </a:prstGeom>
-          <a:noFill/>
-          <a:ln/>
-        </p:spPr>
-        <p:txBody>
-          <a:bodyPr wrap="square" lIns="0" tIns="0" rIns="0" bIns="0" rtlCol="0" anchor="ctr"/>
-          <a:lstStyle/>
-          <a:p>
-            <a:pPr indent="0" marL="0">
-              <a:buNone/>
-            </a:pPr>
-            <a:r>
-              <a:rPr lang="en-US" sz="1500" dirty="0">
-                <a:solidFill>
-                  <a:srgbClr val="5C5E66"/>
-                </a:solidFill>
-                <a:latin typeface="Arial" pitchFamily="34" charset="0"/>
-                <a:ea typeface="Arial" pitchFamily="34" charset="-122"/>
-                <a:cs typeface="Arial" pitchFamily="34" charset="-120"/>
-              </a:rPr>
-              <a:t>Опрос задаёт специализацию. Тест подтверждает грейд. История ФСП — отдельная ось, без неё человек не теряет место.</a:t>
-            </a:r>
-            <a:endParaRPr lang="en-US" sz="1500" dirty="0"/>
-          </a:p>
-        </p:txBody>
-      </p:sp>
-      <p:sp>
-        <p:nvSpPr>
-          <p:cNvPr id="9" name="Shape 7"/>
-          <p:cNvSpPr/>
-          <p:nvPr/>
-        </p:nvSpPr>
-        <p:spPr>
-          <a:xfrm>
-            <a:off x="502920" y="3383280"/>
-            <a:ext cx="11155680" cy="1280160"/>
+              <a:t>Работодатель видит заявленный грейд и список технологий. Сортировка по резюме ставит в первую десятку 28 % людей с завышенным грейдом.</a:t>
+            </a:r>
+            <a:endParaRPr lang="en-US" sz="1700" dirty="0"/>
+          </a:p>
+        </p:txBody>
+      </p:sp>
+      <p:sp>
+        <p:nvSpPr>
+          <p:cNvPr id="8" name="Shape 6"/>
+          <p:cNvSpPr/>
+          <p:nvPr/>
+        </p:nvSpPr>
+        <p:spPr>
+          <a:xfrm>
+            <a:off x="502920" y="3200400"/>
+            <a:ext cx="11155680" cy="1234440"/>
           </a:xfrm>
           <a:prstGeom prst="roundRect">
             <a:avLst>
-              <a:gd name="adj" fmla="val 5714"/>
+              <a:gd name="adj" fmla="val 5926"/>
             </a:avLst>
           </a:prstGeom>
           <a:solidFill>
             <a:srgbClr val="FFFFFF"/>
           </a:solidFill>
-          <a:ln/>
-        </p:spPr>
-      </p:sp>
-      <p:sp>
-        <p:nvSpPr>
-          <p:cNvPr id="10" name="Text 8"/>
-          <p:cNvSpPr/>
-          <p:nvPr/>
-        </p:nvSpPr>
-        <p:spPr>
-          <a:xfrm>
-            <a:off x="731520" y="3703320"/>
-            <a:ext cx="1005840" cy="548640"/>
+          <a:ln w="12700">
+            <a:solidFill>
+              <a:srgbClr val="FFFFFF"/>
+            </a:solidFill>
+            <a:prstDash val="solid"/>
+          </a:ln>
+        </p:spPr>
+      </p:sp>
+      <p:sp>
+        <p:nvSpPr>
+          <p:cNvPr id="9" name="Text 7"/>
+          <p:cNvSpPr/>
+          <p:nvPr/>
+        </p:nvSpPr>
+        <p:spPr>
+          <a:xfrm>
+            <a:off x="731520" y="3337560"/>
+            <a:ext cx="10698480" cy="960120"/>
           </a:xfrm>
           <a:prstGeom prst="rect">
             <a:avLst/>
@@ -1899,46 +2428,21 @@
               <a:buNone/>
             </a:pPr>
             <a:r>
-              <a:rPr lang="en-US" sz="2200" b="1" dirty="0">
-                <a:solidFill>
-                  <a:srgbClr val="402FFF"/>
-                </a:solidFill>
-                <a:latin typeface="Arial" pitchFamily="34" charset="0"/>
-                <a:ea typeface="Arial" pitchFamily="34" charset="-122"/>
-                <a:cs typeface="Arial" pitchFamily="34" charset="-120"/>
-              </a:rPr>
-              <a:t>02</a:t>
-            </a:r>
-            <a:endParaRPr lang="en-US" sz="2200" dirty="0"/>
-          </a:p>
-        </p:txBody>
-      </p:sp>
-      <p:sp>
-        <p:nvSpPr>
-          <p:cNvPr id="11" name="Text 9"/>
-          <p:cNvSpPr/>
-          <p:nvPr/>
-        </p:nvSpPr>
-        <p:spPr>
-          <a:xfrm>
-            <a:off x="1920240" y="3584448"/>
-            <a:ext cx="9144000" cy="365760"/>
-          </a:xfrm>
-          <a:prstGeom prst="rect">
-            <a:avLst/>
-          </a:prstGeom>
-          <a:noFill/>
-          <a:ln/>
-        </p:spPr>
-        <p:txBody>
-          <a:bodyPr wrap="square" lIns="0" tIns="0" rIns="0" bIns="0" rtlCol="0" anchor="ctr"/>
-          <a:lstStyle/>
-          <a:p>
+              <a:rPr lang="en-US" sz="1700" b="1" dirty="0">
+                <a:solidFill>
+                  <a:srgbClr val="1B1C21"/>
+                </a:solidFill>
+                <a:latin typeface="Arial" pitchFamily="34" charset="0"/>
+                <a:ea typeface="Arial" pitchFamily="34" charset="-122"/>
+                <a:cs typeface="Arial" pitchFamily="34" charset="-120"/>
+              </a:rPr>
+              <a:t>Ответ. </a:t>
+            </a:r>
             <a:pPr indent="0" marL="0">
               <a:buNone/>
             </a:pPr>
             <a:r>
-              <a:rPr lang="en-US" sz="1800" b="1" dirty="0">
+              <a:rPr lang="en-US" sz="1700" dirty="0">
                 <a:solidFill>
                   <a:srgbClr val="1B1C21"/>
                 </a:solidFill>
@@ -1946,83 +2450,49 @@
                 <a:ea typeface="Arial" pitchFamily="34" charset="-122"/>
                 <a:cs typeface="Arial" pitchFamily="34" charset="-120"/>
               </a:rPr>
-              <a:t>Работодатель</a:t>
-            </a:r>
-            <a:endParaRPr lang="en-US" sz="1800" dirty="0"/>
-          </a:p>
-        </p:txBody>
-      </p:sp>
-      <p:sp>
-        <p:nvSpPr>
-          <p:cNvPr id="12" name="Text 10"/>
-          <p:cNvSpPr/>
-          <p:nvPr/>
-        </p:nvSpPr>
-        <p:spPr>
-          <a:xfrm>
-            <a:off x="1920240" y="4005072"/>
-            <a:ext cx="9326880" cy="457200"/>
-          </a:xfrm>
-          <a:prstGeom prst="rect">
-            <a:avLst/>
-          </a:prstGeom>
-          <a:noFill/>
-          <a:ln/>
-        </p:spPr>
-        <p:txBody>
-          <a:bodyPr wrap="square" lIns="0" tIns="0" rIns="0" bIns="0" rtlCol="0" anchor="ctr"/>
-          <a:lstStyle/>
-          <a:p>
-            <a:pPr indent="0" marL="0">
-              <a:buNone/>
-            </a:pPr>
-            <a:r>
-              <a:rPr lang="en-US" sz="1500" dirty="0">
-                <a:solidFill>
-                  <a:srgbClr val="5C5E66"/>
-                </a:solidFill>
-                <a:latin typeface="Arial" pitchFamily="34" charset="0"/>
-                <a:ea typeface="Arial" pitchFamily="34" charset="-122"/>
-                <a:cs typeface="Arial" pitchFamily="34" charset="-120"/>
-              </a:rPr>
-              <a:t>Описывает, кого ищет. Получает порядок с объяснением каждой строки и может вернуть прошлую версию потребности.</a:t>
-            </a:r>
-            <a:endParaRPr lang="en-US" sz="1500" dirty="0"/>
-          </a:p>
-        </p:txBody>
-      </p:sp>
-      <p:sp>
-        <p:nvSpPr>
-          <p:cNvPr id="13" name="Shape 11"/>
-          <p:cNvSpPr/>
-          <p:nvPr/>
-        </p:nvSpPr>
-        <p:spPr>
-          <a:xfrm>
-            <a:off x="502920" y="4800600"/>
-            <a:ext cx="11155680" cy="1280160"/>
+              <a:t>Грейд даёт только адаптивный тест специализации. Результаты ФСП — отдельная подтверждённая ось, без неё человек не теряет место.</a:t>
+            </a:r>
+            <a:endParaRPr lang="en-US" sz="1700" dirty="0"/>
+          </a:p>
+        </p:txBody>
+      </p:sp>
+      <p:sp>
+        <p:nvSpPr>
+          <p:cNvPr id="10" name="Shape 8"/>
+          <p:cNvSpPr/>
+          <p:nvPr/>
+        </p:nvSpPr>
+        <p:spPr>
+          <a:xfrm>
+            <a:off x="502920" y="4663440"/>
+            <a:ext cx="11155680" cy="1234440"/>
           </a:xfrm>
           <a:prstGeom prst="roundRect">
             <a:avLst>
-              <a:gd name="adj" fmla="val 5714"/>
+              <a:gd name="adj" fmla="val 5926"/>
             </a:avLst>
           </a:prstGeom>
           <a:solidFill>
             <a:srgbClr val="FFFFFF"/>
           </a:solidFill>
-          <a:ln/>
-        </p:spPr>
-      </p:sp>
-      <p:sp>
-        <p:nvSpPr>
-          <p:cNvPr id="14" name="Text 12"/>
-          <p:cNvSpPr/>
-          <p:nvPr/>
-        </p:nvSpPr>
-        <p:spPr>
-          <a:xfrm>
-            <a:off x="731520" y="5120640"/>
-            <a:ext cx="1005840" cy="548640"/>
+          <a:ln w="12700">
+            <a:solidFill>
+              <a:srgbClr val="FFFFFF"/>
+            </a:solidFill>
+            <a:prstDash val="solid"/>
+          </a:ln>
+        </p:spPr>
+      </p:sp>
+      <p:sp>
+        <p:nvSpPr>
+          <p:cNvPr id="11" name="Text 9"/>
+          <p:cNvSpPr/>
+          <p:nvPr/>
+        </p:nvSpPr>
+        <p:spPr>
+          <a:xfrm>
+            <a:off x="731520" y="4800600"/>
+            <a:ext cx="10698480" cy="960120"/>
           </a:xfrm>
           <a:prstGeom prst="rect">
             <a:avLst/>
@@ -2038,30 +2508,44 @@
               <a:buNone/>
             </a:pPr>
             <a:r>
-              <a:rPr lang="en-US" sz="2200" b="1" dirty="0">
-                <a:solidFill>
-                  <a:srgbClr val="402FFF"/>
-                </a:solidFill>
-                <a:latin typeface="Arial" pitchFamily="34" charset="0"/>
-                <a:ea typeface="Arial" pitchFamily="34" charset="-122"/>
-                <a:cs typeface="Arial" pitchFamily="34" charset="-120"/>
-              </a:rPr>
-              <a:t>03</a:t>
-            </a:r>
-            <a:endParaRPr lang="en-US" sz="2200" dirty="0"/>
-          </a:p>
-        </p:txBody>
-      </p:sp>
-      <p:sp>
-        <p:nvSpPr>
-          <p:cNvPr id="15" name="Text 13"/>
-          <p:cNvSpPr/>
-          <p:nvPr/>
-        </p:nvSpPr>
-        <p:spPr>
-          <a:xfrm>
-            <a:off x="1920240" y="5001768"/>
-            <a:ext cx="9144000" cy="365760"/>
+              <a:rPr lang="en-US" sz="1700" b="1" dirty="0">
+                <a:solidFill>
+                  <a:srgbClr val="1B1C21"/>
+                </a:solidFill>
+                <a:latin typeface="Arial" pitchFamily="34" charset="0"/>
+                <a:ea typeface="Arial" pitchFamily="34" charset="-122"/>
+                <a:cs typeface="Arial" pitchFamily="34" charset="-120"/>
+              </a:rPr>
+              <a:t>Механика. </a:t>
+            </a:r>
+            <a:pPr indent="0" marL="0">
+              <a:buNone/>
+            </a:pPr>
+            <a:r>
+              <a:rPr lang="en-US" sz="1700" dirty="0">
+                <a:solidFill>
+                  <a:srgbClr val="1B1C21"/>
+                </a:solidFill>
+                <a:latin typeface="Arial" pitchFamily="34" charset="0"/>
+                <a:ea typeface="Arial" pitchFamily="34" charset="-122"/>
+                <a:cs typeface="Arial" pitchFamily="34" charset="-120"/>
+              </a:rPr>
+              <a:t>Работодатель описывает потребность, получает подборку с разбором каждого места и приглашает первым, сразу с вилкой.</a:t>
+            </a:r>
+            <a:endParaRPr lang="en-US" sz="1700" dirty="0"/>
+          </a:p>
+        </p:txBody>
+      </p:sp>
+      <p:sp>
+        <p:nvSpPr>
+          <p:cNvPr id="12" name="Text 10"/>
+          <p:cNvSpPr/>
+          <p:nvPr/>
+        </p:nvSpPr>
+        <p:spPr>
+          <a:xfrm>
+            <a:off x="502920" y="6263640"/>
+            <a:ext cx="10058400" cy="274320"/>
           </a:xfrm>
           <a:prstGeom prst="rect">
             <a:avLst/>
@@ -2077,30 +2561,30 @@
               <a:buNone/>
             </a:pPr>
             <a:r>
-              <a:rPr lang="en-US" sz="1800" b="1" dirty="0">
-                <a:solidFill>
-                  <a:srgbClr val="1B1C21"/>
-                </a:solidFill>
-                <a:latin typeface="Arial" pitchFamily="34" charset="0"/>
-                <a:ea typeface="Arial" pitchFamily="34" charset="-122"/>
-                <a:cs typeface="Arial" pitchFamily="34" charset="-120"/>
-              </a:rPr>
-              <a:t>Контакты</a:t>
-            </a:r>
-            <a:endParaRPr lang="en-US" sz="1800" dirty="0"/>
-          </a:p>
-        </p:txBody>
-      </p:sp>
-      <p:sp>
-        <p:nvSpPr>
-          <p:cNvPr id="16" name="Text 14"/>
-          <p:cNvSpPr/>
-          <p:nvPr/>
-        </p:nvSpPr>
-        <p:spPr>
-          <a:xfrm>
-            <a:off x="1920240" y="5422392"/>
-            <a:ext cx="9326880" cy="457200"/>
+              <a:rPr lang="en-US" sz="1100" dirty="0">
+                <a:solidFill>
+                  <a:srgbClr val="5C5E66"/>
+                </a:solidFill>
+                <a:latin typeface="Courier New" pitchFamily="34" charset="0"/>
+                <a:ea typeface="Courier New" pitchFamily="34" charset="-122"/>
+                <a:cs typeface="Courier New" pitchFamily="34" charset="-120"/>
+              </a:rPr>
+              <a:t>cd backend &amp;&amp; python -m app.validation.matching</a:t>
+            </a:r>
+            <a:endParaRPr lang="en-US" sz="1100" dirty="0"/>
+          </a:p>
+        </p:txBody>
+      </p:sp>
+      <p:sp>
+        <p:nvSpPr>
+          <p:cNvPr id="13" name="Text 11"/>
+          <p:cNvSpPr/>
+          <p:nvPr/>
+        </p:nvSpPr>
+        <p:spPr>
+          <a:xfrm>
+            <a:off x="10881360" y="6309360"/>
+            <a:ext cx="914400" cy="274320"/>
           </a:xfrm>
           <a:prstGeom prst="rect">
             <a:avLst/>
@@ -2112,11 +2596,11 @@
           <a:bodyPr wrap="square" lIns="0" tIns="0" rIns="0" bIns="0" rtlCol="0" anchor="ctr"/>
           <a:lstStyle/>
           <a:p>
-            <a:pPr indent="0" marL="0">
-              <a:buNone/>
-            </a:pPr>
-            <a:r>
-              <a:rPr lang="en-US" sz="1500" dirty="0">
+            <a:pPr algn="r" indent="0" marL="0">
+              <a:buNone/>
+            </a:pPr>
+            <a:r>
+              <a:rPr lang="en-US" sz="1100" dirty="0">
                 <a:solidFill>
                   <a:srgbClr val="5C5E66"/>
                 </a:solidFill>
@@ -2124,9 +2608,9 @@
                 <a:ea typeface="Arial" pitchFamily="34" charset="-122"/>
                 <a:cs typeface="Arial" pitchFamily="34" charset="-120"/>
               </a:rPr>
-              <a:t>Приглашение с вилкой. Имя и почта открываются, только когда кандидат принял приглашение.</a:t>
-            </a:r>
-            <a:endParaRPr lang="en-US" sz="1500" dirty="0"/>
+              <a:t>2 / 10</a:t>
+            </a:r>
+            <a:endParaRPr lang="en-US" sz="1100" dirty="0"/>
           </a:p>
         </p:txBody>
       </p:sp>
@@ -2184,14 +2668,34 @@
       </p:sp>
       <p:sp>
         <p:nvSpPr>
-          <p:cNvPr id="3" name="Text 1"/>
-          <p:cNvSpPr/>
-          <p:nvPr/>
-        </p:nvSpPr>
-        <p:spPr>
-          <a:xfrm>
-            <a:off x="502920" y="292608"/>
-            <a:ext cx="10972800" cy="292608"/>
+          <p:cNvPr id="3" name="Shape 1"/>
+          <p:cNvSpPr/>
+          <p:nvPr/>
+        </p:nvSpPr>
+        <p:spPr>
+          <a:xfrm>
+            <a:off x="109728" y="0"/>
+            <a:ext cx="54864" cy="6858000"/>
+          </a:xfrm>
+          <a:prstGeom prst="rect">
+            <a:avLst/>
+          </a:prstGeom>
+          <a:solidFill>
+            <a:srgbClr val="EC1D35"/>
+          </a:solidFill>
+          <a:ln/>
+        </p:spPr>
+      </p:sp>
+      <p:sp>
+        <p:nvSpPr>
+          <p:cNvPr id="4" name="Text 2"/>
+          <p:cNvSpPr/>
+          <p:nvPr/>
+        </p:nvSpPr>
+        <p:spPr>
+          <a:xfrm>
+            <a:off x="502920" y="457200"/>
+            <a:ext cx="10972800" cy="274320"/>
           </a:xfrm>
           <a:prstGeom prst="rect">
             <a:avLst/>
@@ -2207,7 +2711,7 @@
               <a:buNone/>
             </a:pPr>
             <a:r>
-              <a:rPr lang="en-US" sz="1200" spc="120" kern="0" dirty="0">
+              <a:rPr lang="en-US" sz="1200" spc="200" kern="0" dirty="0">
                 <a:solidFill>
                   <a:srgbClr val="402FFF"/>
                 </a:solidFill>
@@ -2215,7 +2719,7 @@
                 <a:ea typeface="Arial" pitchFamily="34" charset="-122"/>
                 <a:cs typeface="Arial" pitchFamily="34" charset="-120"/>
               </a:rPr>
-              <a:t>ТЕСТ</a:t>
+              <a:t>ПУТЬ ЗА ТРИ МИНУТЫ</a:t>
             </a:r>
             <a:endParaRPr lang="en-US" sz="1200" dirty="0"/>
           </a:p>
@@ -2223,14 +2727,14 @@
       </p:sp>
       <p:sp>
         <p:nvSpPr>
-          <p:cNvPr id="4" name="Text 2"/>
-          <p:cNvSpPr/>
-          <p:nvPr/>
-        </p:nvSpPr>
-        <p:spPr>
-          <a:xfrm>
-            <a:off x="502920" y="640080"/>
-            <a:ext cx="11155680" cy="1051560"/>
+          <p:cNvPr id="5" name="Text 3"/>
+          <p:cNvSpPr/>
+          <p:nvPr/>
+        </p:nvSpPr>
+        <p:spPr>
+          <a:xfrm>
+            <a:off x="502920" y="777240"/>
+            <a:ext cx="11155680" cy="914400"/>
           </a:xfrm>
           <a:prstGeom prst="rect">
             <a:avLst/>
@@ -2246,7 +2750,7 @@
               <a:buNone/>
             </a:pPr>
             <a:r>
-              <a:rPr lang="en-US" sz="3600" b="1" dirty="0">
+              <a:rPr lang="en-US" sz="3000" b="1" dirty="0">
                 <a:solidFill>
                   <a:srgbClr val="1B1C21"/>
                 </a:solidFill>
@@ -2254,44 +2758,131 @@
                 <a:ea typeface="Arial" pitchFamily="34" charset="-122"/>
                 <a:cs typeface="Arial" pitchFamily="34" charset="-120"/>
               </a:rPr>
-              <a:t>Выученный ответ не подходит</a:t>
-            </a:r>
-            <a:endParaRPr lang="en-US" sz="3600" dirty="0"/>
-          </a:p>
-        </p:txBody>
-      </p:sp>
-      <p:sp>
-        <p:nvSpPr>
-          <p:cNvPr id="5" name="Shape 3"/>
-          <p:cNvSpPr/>
-          <p:nvPr/>
-        </p:nvSpPr>
-        <p:spPr>
-          <a:xfrm>
-            <a:off x="502920" y="2011680"/>
-            <a:ext cx="3611880" cy="3017520"/>
-          </a:xfrm>
-          <a:prstGeom prst="roundRect">
-            <a:avLst>
-              <a:gd name="adj" fmla="val 2424"/>
-            </a:avLst>
-          </a:prstGeom>
-          <a:solidFill>
-            <a:srgbClr val="FFFFFF"/>
-          </a:solidFill>
-          <a:ln/>
-        </p:spPr>
-      </p:sp>
-      <p:sp>
-        <p:nvSpPr>
-          <p:cNvPr id="6" name="Text 4"/>
-          <p:cNvSpPr/>
-          <p:nvPr/>
-        </p:nvSpPr>
-        <p:spPr>
-          <a:xfrm>
-            <a:off x="731520" y="2286000"/>
-            <a:ext cx="3154680" cy="1005840"/>
+              <a:t>Опрос, пробный тест, категория</a:t>
+            </a:r>
+            <a:endParaRPr lang="en-US" sz="3000" dirty="0"/>
+          </a:p>
+        </p:txBody>
+      </p:sp>
+      <p:pic>
+        <p:nvPicPr>
+          <p:cNvPr id="6" name="Image 0" descr="/home/claude/fsp-talent/docs/assets/pitch-trial.png">    </p:cNvPr>
+          <p:cNvPicPr>
+            <a:picLocks noChangeAspect="1"/>
+          </p:cNvPicPr>
+          <p:nvPr/>
+        </p:nvPicPr>
+        <p:blipFill>
+          <a:blip r:embed="rId1"/>
+          <a:stretch>
+            <a:fillRect/>
+          </a:stretch>
+        </p:blipFill>
+        <p:spPr>
+          <a:xfrm>
+            <a:off x="502920" y="1600200"/>
+            <a:ext cx="6949440" cy="4343400"/>
+          </a:xfrm>
+          <a:prstGeom prst="rect">
+            <a:avLst/>
+          </a:prstGeom>
+        </p:spPr>
+      </p:pic>
+      <p:sp>
+        <p:nvSpPr>
+          <p:cNvPr id="7" name="Text 4"/>
+          <p:cNvSpPr/>
+          <p:nvPr/>
+        </p:nvSpPr>
+        <p:spPr>
+          <a:xfrm>
+            <a:off x="7726680" y="1600200"/>
+            <a:ext cx="4023360" cy="4343400"/>
+          </a:xfrm>
+          <a:prstGeom prst="rect">
+            <a:avLst/>
+          </a:prstGeom>
+          <a:noFill/>
+          <a:ln/>
+        </p:spPr>
+        <p:txBody>
+          <a:bodyPr wrap="square" lIns="0" tIns="0" rIns="0" bIns="0" rtlCol="0" anchor="t"/>
+          <a:lstStyle/>
+          <a:p>
+            <a:pPr marL="342900" indent="-342900">
+              <a:spcAft>
+                <a:spcPts val="1000"/>
+              </a:spcAft>
+              <a:buSzPct val="100000"/>
+              <a:buChar char="•"/>
+            </a:pPr>
+            <a:r>
+              <a:rPr lang="en-US" sz="1600" dirty="0">
+                <a:solidFill>
+                  <a:srgbClr val="1B1C21"/>
+                </a:solidFill>
+                <a:latin typeface="Arial" pitchFamily="34" charset="0"/>
+                <a:ea typeface="Arial" pitchFamily="34" charset="-122"/>
+                <a:cs typeface="Arial" pitchFamily="34" charset="-120"/>
+              </a:rPr>
+              <a:t>Кандидат выбирает специализацию и грейд, стаж только подсказывает.</a:t>
+            </a:r>
+            <a:endParaRPr lang="en-US" sz="1600" dirty="0"/>
+          </a:p>
+          <a:p>
+            <a:pPr marL="342900" indent="-342900">
+              <a:spcAft>
+                <a:spcPts val="1000"/>
+              </a:spcAft>
+              <a:buSzPct val="100000"/>
+              <a:buChar char="•"/>
+            </a:pPr>
+            <a:r>
+              <a:rPr lang="en-US" sz="1600" dirty="0">
+                <a:solidFill>
+                  <a:srgbClr val="1B1C21"/>
+                </a:solidFill>
+                <a:latin typeface="Arial" pitchFamily="34" charset="0"/>
+                <a:ea typeface="Arial" pitchFamily="34" charset="-122"/>
+                <a:cs typeface="Arial" pitchFamily="34" charset="-120"/>
+              </a:rPr>
+              <a:t>Пробный тест: 15 заданий за 5 минут и нейтральный итог с вероятностью уровня.</a:t>
+            </a:r>
+            <a:endParaRPr lang="en-US" sz="1600" dirty="0"/>
+          </a:p>
+          <a:p>
+            <a:pPr marL="342900" indent="-342900">
+              <a:spcAft>
+                <a:spcPts val="1000"/>
+              </a:spcAft>
+              <a:buSzPct val="100000"/>
+              <a:buChar char="•"/>
+            </a:pPr>
+            <a:r>
+              <a:rPr lang="en-US" sz="1600" dirty="0">
+                <a:solidFill>
+                  <a:srgbClr val="1B1C21"/>
+                </a:solidFill>
+                <a:latin typeface="Arial" pitchFamily="34" charset="0"/>
+                <a:ea typeface="Arial" pitchFamily="34" charset="-122"/>
+                <a:cs typeface="Arial" pitchFamily="34" charset="-120"/>
+              </a:rPr>
+              <a:t>Аккаунты jury1…jury10 проходят полный тест без пауз.</a:t>
+            </a:r>
+            <a:endParaRPr lang="en-US" sz="1600" dirty="0"/>
+          </a:p>
+        </p:txBody>
+      </p:sp>
+      <p:sp>
+        <p:nvSpPr>
+          <p:cNvPr id="8" name="Text 5"/>
+          <p:cNvSpPr/>
+          <p:nvPr/>
+        </p:nvSpPr>
+        <p:spPr>
+          <a:xfrm>
+            <a:off x="10881360" y="6309360"/>
+            <a:ext cx="914400" cy="274320"/>
           </a:xfrm>
           <a:prstGeom prst="rect">
             <a:avLst/>
@@ -2303,289 +2894,11 @@
           <a:bodyPr wrap="square" lIns="0" tIns="0" rIns="0" bIns="0" rtlCol="0" anchor="ctr"/>
           <a:lstStyle/>
           <a:p>
-            <a:pPr indent="0" marL="0">
-              <a:buNone/>
-            </a:pPr>
-            <a:r>
-              <a:rPr lang="en-US" sz="3200" b="1" dirty="0">
-                <a:solidFill>
-                  <a:srgbClr val="402FFF"/>
-                </a:solidFill>
-                <a:latin typeface="Arial" pitchFamily="34" charset="0"/>
-                <a:ea typeface="Arial" pitchFamily="34" charset="-122"/>
-                <a:cs typeface="Arial" pitchFamily="34" charset="-120"/>
-              </a:rPr>
-              <a:t>0 %</a:t>
-            </a:r>
-            <a:endParaRPr lang="en-US" sz="3200" dirty="0"/>
-          </a:p>
-        </p:txBody>
-      </p:sp>
-      <p:sp>
-        <p:nvSpPr>
-          <p:cNvPr id="7" name="Text 5"/>
-          <p:cNvSpPr/>
-          <p:nvPr/>
-        </p:nvSpPr>
-        <p:spPr>
-          <a:xfrm>
-            <a:off x="731520" y="3474720"/>
-            <a:ext cx="3154680" cy="1188720"/>
-          </a:xfrm>
-          <a:prstGeom prst="rect">
-            <a:avLst/>
-          </a:prstGeom>
-          <a:noFill/>
-          <a:ln/>
-        </p:spPr>
-        <p:txBody>
-          <a:bodyPr wrap="square" lIns="0" tIns="0" rIns="0" bIns="0" rtlCol="0" anchor="ctr"/>
-          <a:lstStyle/>
-          <a:p>
-            <a:pPr indent="0" marL="0">
-              <a:buNone/>
-            </a:pPr>
-            <a:r>
-              <a:rPr lang="en-US" sz="1600" dirty="0">
-                <a:solidFill>
-                  <a:srgbClr val="1B1C21"/>
-                </a:solidFill>
-                <a:latin typeface="Arial" pitchFamily="34" charset="0"/>
-                <a:ea typeface="Arial" pitchFamily="34" charset="-122"/>
-                <a:cs typeface="Arial" pitchFamily="34" charset="-120"/>
-              </a:rPr>
-              <a:t>сдают с ключом от другого экземпляра того же семейства</a:t>
-            </a:r>
-            <a:endParaRPr lang="en-US" sz="1600" dirty="0"/>
-          </a:p>
-        </p:txBody>
-      </p:sp>
-      <p:sp>
-        <p:nvSpPr>
-          <p:cNvPr id="8" name="Shape 6"/>
-          <p:cNvSpPr/>
-          <p:nvPr/>
-        </p:nvSpPr>
-        <p:spPr>
-          <a:xfrm>
-            <a:off x="4297680" y="2011680"/>
-            <a:ext cx="3611880" cy="3017520"/>
-          </a:xfrm>
-          <a:prstGeom prst="roundRect">
-            <a:avLst>
-              <a:gd name="adj" fmla="val 2424"/>
-            </a:avLst>
-          </a:prstGeom>
-          <a:solidFill>
-            <a:srgbClr val="FFFFFF"/>
-          </a:solidFill>
-          <a:ln/>
-        </p:spPr>
-      </p:sp>
-      <p:sp>
-        <p:nvSpPr>
-          <p:cNvPr id="9" name="Text 7"/>
-          <p:cNvSpPr/>
-          <p:nvPr/>
-        </p:nvSpPr>
-        <p:spPr>
-          <a:xfrm>
-            <a:off x="4526280" y="2286000"/>
-            <a:ext cx="3154680" cy="1005840"/>
-          </a:xfrm>
-          <a:prstGeom prst="rect">
-            <a:avLst/>
-          </a:prstGeom>
-          <a:noFill/>
-          <a:ln/>
-        </p:spPr>
-        <p:txBody>
-          <a:bodyPr wrap="square" lIns="0" tIns="0" rIns="0" bIns="0" rtlCol="0" anchor="ctr"/>
-          <a:lstStyle/>
-          <a:p>
-            <a:pPr indent="0" marL="0">
-              <a:buNone/>
-            </a:pPr>
-            <a:r>
-              <a:rPr lang="en-US" sz="3200" b="1" dirty="0">
-                <a:solidFill>
-                  <a:srgbClr val="402FFF"/>
-                </a:solidFill>
-                <a:latin typeface="Arial" pitchFamily="34" charset="0"/>
-                <a:ea typeface="Arial" pitchFamily="34" charset="-122"/>
-                <a:cs typeface="Arial" pitchFamily="34" charset="-120"/>
-              </a:rPr>
-              <a:t>100 %</a:t>
-            </a:r>
-            <a:endParaRPr lang="en-US" sz="3200" dirty="0"/>
-          </a:p>
-        </p:txBody>
-      </p:sp>
-      <p:sp>
-        <p:nvSpPr>
-          <p:cNvPr id="10" name="Text 8"/>
-          <p:cNvSpPr/>
-          <p:nvPr/>
-        </p:nvSpPr>
-        <p:spPr>
-          <a:xfrm>
-            <a:off x="4526280" y="3474720"/>
-            <a:ext cx="3154680" cy="1188720"/>
-          </a:xfrm>
-          <a:prstGeom prst="rect">
-            <a:avLst/>
-          </a:prstGeom>
-          <a:noFill/>
-          <a:ln/>
-        </p:spPr>
-        <p:txBody>
-          <a:bodyPr wrap="square" lIns="0" tIns="0" rIns="0" bIns="0" rtlCol="0" anchor="ctr"/>
-          <a:lstStyle/>
-          <a:p>
-            <a:pPr indent="0" marL="0">
-              <a:buNone/>
-            </a:pPr>
-            <a:r>
-              <a:rPr lang="en-US" sz="1600" dirty="0">
-                <a:solidFill>
-                  <a:srgbClr val="1B1C21"/>
-                </a:solidFill>
-                <a:latin typeface="Arial" pitchFamily="34" charset="0"/>
-                <a:ea typeface="Arial" pitchFamily="34" charset="-122"/>
-                <a:cs typeface="Arial" pitchFamily="34" charset="-120"/>
-              </a:rPr>
-              <a:t>сдают, если ключ от того же экземпляра, как в фиксированном банке</a:t>
-            </a:r>
-            <a:endParaRPr lang="en-US" sz="1600" dirty="0"/>
-          </a:p>
-        </p:txBody>
-      </p:sp>
-      <p:sp>
-        <p:nvSpPr>
-          <p:cNvPr id="11" name="Shape 9"/>
-          <p:cNvSpPr/>
-          <p:nvPr/>
-        </p:nvSpPr>
-        <p:spPr>
-          <a:xfrm>
-            <a:off x="8092440" y="2011680"/>
-            <a:ext cx="3611880" cy="3017520"/>
-          </a:xfrm>
-          <a:prstGeom prst="roundRect">
-            <a:avLst>
-              <a:gd name="adj" fmla="val 2424"/>
-            </a:avLst>
-          </a:prstGeom>
-          <a:solidFill>
-            <a:srgbClr val="FFFFFF"/>
-          </a:solidFill>
-          <a:ln/>
-        </p:spPr>
-      </p:sp>
-      <p:sp>
-        <p:nvSpPr>
-          <p:cNvPr id="12" name="Text 10"/>
-          <p:cNvSpPr/>
-          <p:nvPr/>
-        </p:nvSpPr>
-        <p:spPr>
-          <a:xfrm>
-            <a:off x="8321040" y="2286000"/>
-            <a:ext cx="3154680" cy="1005840"/>
-          </a:xfrm>
-          <a:prstGeom prst="rect">
-            <a:avLst/>
-          </a:prstGeom>
-          <a:noFill/>
-          <a:ln/>
-        </p:spPr>
-        <p:txBody>
-          <a:bodyPr wrap="square" lIns="0" tIns="0" rIns="0" bIns="0" rtlCol="0" anchor="ctr"/>
-          <a:lstStyle/>
-          <a:p>
-            <a:pPr indent="0" marL="0">
-              <a:buNone/>
-            </a:pPr>
-            <a:r>
-              <a:rPr lang="en-US" sz="3200" b="1" dirty="0">
-                <a:solidFill>
-                  <a:srgbClr val="402FFF"/>
-                </a:solidFill>
-                <a:latin typeface="Arial" pitchFamily="34" charset="0"/>
-                <a:ea typeface="Arial" pitchFamily="34" charset="-122"/>
-                <a:cs typeface="Arial" pitchFamily="34" charset="-120"/>
-              </a:rPr>
-              <a:t>18 из 37</a:t>
-            </a:r>
-            <a:endParaRPr lang="en-US" sz="3200" dirty="0"/>
-          </a:p>
-        </p:txBody>
-      </p:sp>
-      <p:sp>
-        <p:nvSpPr>
-          <p:cNvPr id="13" name="Text 11"/>
-          <p:cNvSpPr/>
-          <p:nvPr/>
-        </p:nvSpPr>
-        <p:spPr>
-          <a:xfrm>
-            <a:off x="8321040" y="3474720"/>
-            <a:ext cx="3154680" cy="1188720"/>
-          </a:xfrm>
-          <a:prstGeom prst="rect">
-            <a:avLst/>
-          </a:prstGeom>
-          <a:noFill/>
-          <a:ln/>
-        </p:spPr>
-        <p:txBody>
-          <a:bodyPr wrap="square" lIns="0" tIns="0" rIns="0" bIns="0" rtlCol="0" anchor="ctr"/>
-          <a:lstStyle/>
-          <a:p>
-            <a:pPr indent="0" marL="0">
-              <a:buNone/>
-            </a:pPr>
-            <a:r>
-              <a:rPr lang="en-US" sz="1600" dirty="0">
-                <a:solidFill>
-                  <a:srgbClr val="1B1C21"/>
-                </a:solidFill>
-                <a:latin typeface="Arial" pitchFamily="34" charset="0"/>
-                <a:ea typeface="Arial" pitchFamily="34" charset="-122"/>
-                <a:cs typeface="Arial" pitchFamily="34" charset="-120"/>
-              </a:rPr>
-              <a:t>утёкших ключей уходит в карантин, на чистых данных 5 из 68</a:t>
-            </a:r>
-            <a:endParaRPr lang="en-US" sz="1600" dirty="0"/>
-          </a:p>
-        </p:txBody>
-      </p:sp>
-      <p:sp>
-        <p:nvSpPr>
-          <p:cNvPr id="14" name="Text 12"/>
-          <p:cNvSpPr/>
-          <p:nvPr/>
-        </p:nvSpPr>
-        <p:spPr>
-          <a:xfrm>
-            <a:off x="502920" y="6172200"/>
-            <a:ext cx="10972800" cy="274320"/>
-          </a:xfrm>
-          <a:prstGeom prst="rect">
-            <a:avLst/>
-          </a:prstGeom>
-          <a:noFill/>
-          <a:ln/>
-        </p:spPr>
-        <p:txBody>
-          <a:bodyPr wrap="square" lIns="0" tIns="0" rIns="0" bIns="0" rtlCol="0" anchor="ctr"/>
-          <a:lstStyle/>
-          <a:p>
-            <a:pPr indent="0" marL="0">
-              <a:buNone/>
-            </a:pPr>
-            <a:r>
-              <a:rPr lang="en-US" sz="1200" dirty="0">
+            <a:pPr algn="r" indent="0" marL="0">
+              <a:buNone/>
+            </a:pPr>
+            <a:r>
+              <a:rPr lang="en-US" sz="1100" dirty="0">
                 <a:solidFill>
                   <a:srgbClr val="5C5E66"/>
                 </a:solidFill>
@@ -2593,9 +2906,9 @@
                 <a:ea typeface="Arial" pitchFamily="34" charset="-122"/>
                 <a:cs typeface="Arial" pitchFamily="34" charset="-120"/>
               </a:rPr>
-              <a:t>python -m app.validation.assessment --n 2000 --seed 7</a:t>
-            </a:r>
-            <a:endParaRPr lang="en-US" sz="1200" dirty="0"/>
+              <a:t>3 / 10</a:t>
+            </a:r>
+            <a:endParaRPr lang="en-US" sz="1100" dirty="0"/>
           </a:p>
         </p:txBody>
       </p:sp>
@@ -2653,14 +2966,34 @@
       </p:sp>
       <p:sp>
         <p:nvSpPr>
-          <p:cNvPr id="3" name="Text 1"/>
-          <p:cNvSpPr/>
-          <p:nvPr/>
-        </p:nvSpPr>
-        <p:spPr>
-          <a:xfrm>
-            <a:off x="502920" y="292608"/>
-            <a:ext cx="10972800" cy="292608"/>
+          <p:cNvPr id="3" name="Shape 1"/>
+          <p:cNvSpPr/>
+          <p:nvPr/>
+        </p:nvSpPr>
+        <p:spPr>
+          <a:xfrm>
+            <a:off x="109728" y="0"/>
+            <a:ext cx="54864" cy="6858000"/>
+          </a:xfrm>
+          <a:prstGeom prst="rect">
+            <a:avLst/>
+          </a:prstGeom>
+          <a:solidFill>
+            <a:srgbClr val="EC1D35"/>
+          </a:solidFill>
+          <a:ln/>
+        </p:spPr>
+      </p:sp>
+      <p:sp>
+        <p:nvSpPr>
+          <p:cNvPr id="4" name="Text 2"/>
+          <p:cNvSpPr/>
+          <p:nvPr/>
+        </p:nvSpPr>
+        <p:spPr>
+          <a:xfrm>
+            <a:off x="502920" y="457200"/>
+            <a:ext cx="10972800" cy="274320"/>
           </a:xfrm>
           <a:prstGeom prst="rect">
             <a:avLst/>
@@ -2676,7 +3009,7 @@
               <a:buNone/>
             </a:pPr>
             <a:r>
-              <a:rPr lang="en-US" sz="1200" spc="120" kern="0" dirty="0">
+              <a:rPr lang="en-US" sz="1200" spc="200" kern="0" dirty="0">
                 <a:solidFill>
                   <a:srgbClr val="402FFF"/>
                 </a:solidFill>
@@ -2684,7 +3017,7 @@
                 <a:ea typeface="Arial" pitchFamily="34" charset="-122"/>
                 <a:cs typeface="Arial" pitchFamily="34" charset="-120"/>
               </a:rPr>
-              <a:t>ПОДБОР</a:t>
+              <a:t>МЕХАНИКА КОНТАКТА</a:t>
             </a:r>
             <a:endParaRPr lang="en-US" sz="1200" dirty="0"/>
           </a:p>
@@ -2692,14 +3025,14 @@
       </p:sp>
       <p:sp>
         <p:nvSpPr>
-          <p:cNvPr id="4" name="Text 2"/>
-          <p:cNvSpPr/>
-          <p:nvPr/>
-        </p:nvSpPr>
-        <p:spPr>
-          <a:xfrm>
-            <a:off x="502920" y="640080"/>
-            <a:ext cx="11155680" cy="1051560"/>
+          <p:cNvPr id="5" name="Text 3"/>
+          <p:cNvSpPr/>
+          <p:nvPr/>
+        </p:nvSpPr>
+        <p:spPr>
+          <a:xfrm>
+            <a:off x="502920" y="777240"/>
+            <a:ext cx="11155680" cy="914400"/>
           </a:xfrm>
           <a:prstGeom prst="rect">
             <a:avLst/>
@@ -2715,7 +3048,7 @@
               <a:buNone/>
             </a:pPr>
             <a:r>
-              <a:rPr lang="en-US" sz="3600" b="1" dirty="0">
+              <a:rPr lang="en-US" sz="3000" b="1" dirty="0">
                 <a:solidFill>
                   <a:srgbClr val="1B1C21"/>
                 </a:solidFill>
@@ -2723,22 +3056,131 @@
                 <a:ea typeface="Arial" pitchFamily="34" charset="-122"/>
                 <a:cs typeface="Arial" pitchFamily="34" charset="-120"/>
               </a:rPr>
-              <a:t>Место в списке можно разобрать</a:t>
-            </a:r>
-            <a:endParaRPr lang="en-US" sz="3600" dirty="0"/>
-          </a:p>
-        </p:txBody>
-      </p:sp>
-      <p:sp>
-        <p:nvSpPr>
-          <p:cNvPr id="5" name="Text 3"/>
-          <p:cNvSpPr/>
-          <p:nvPr/>
-        </p:nvSpPr>
-        <p:spPr>
-          <a:xfrm>
-            <a:off x="502920" y="1920240"/>
-            <a:ext cx="11155680" cy="1005840"/>
+              <a:t>Приглашение с вилкой, контакты после согласия</a:t>
+            </a:r>
+            <a:endParaRPr lang="en-US" sz="3000" dirty="0"/>
+          </a:p>
+        </p:txBody>
+      </p:sp>
+      <p:pic>
+        <p:nvPicPr>
+          <p:cNvPr id="6" name="Image 0" descr="/home/claude/fsp-talent/docs/assets/pitch-offers.png">    </p:cNvPr>
+          <p:cNvPicPr>
+            <a:picLocks noChangeAspect="1"/>
+          </p:cNvPicPr>
+          <p:nvPr/>
+        </p:nvPicPr>
+        <p:blipFill>
+          <a:blip r:embed="rId1"/>
+          <a:stretch>
+            <a:fillRect/>
+          </a:stretch>
+        </p:blipFill>
+        <p:spPr>
+          <a:xfrm>
+            <a:off x="502920" y="1600200"/>
+            <a:ext cx="6949440" cy="4343400"/>
+          </a:xfrm>
+          <a:prstGeom prst="rect">
+            <a:avLst/>
+          </a:prstGeom>
+        </p:spPr>
+      </p:pic>
+      <p:sp>
+        <p:nvSpPr>
+          <p:cNvPr id="7" name="Text 4"/>
+          <p:cNvSpPr/>
+          <p:nvPr/>
+        </p:nvSpPr>
+        <p:spPr>
+          <a:xfrm>
+            <a:off x="7726680" y="1600200"/>
+            <a:ext cx="4023360" cy="4343400"/>
+          </a:xfrm>
+          <a:prstGeom prst="rect">
+            <a:avLst/>
+          </a:prstGeom>
+          <a:noFill/>
+          <a:ln/>
+        </p:spPr>
+        <p:txBody>
+          <a:bodyPr wrap="square" lIns="0" tIns="0" rIns="0" bIns="0" rtlCol="0" anchor="t"/>
+          <a:lstStyle/>
+          <a:p>
+            <a:pPr marL="342900" indent="-342900">
+              <a:spcAft>
+                <a:spcPts val="1000"/>
+              </a:spcAft>
+              <a:buSzPct val="100000"/>
+              <a:buChar char="•"/>
+            </a:pPr>
+            <a:r>
+              <a:rPr lang="en-US" sz="1600" dirty="0">
+                <a:solidFill>
+                  <a:srgbClr val="1B1C21"/>
+                </a:solidFill>
+                <a:latin typeface="Arial" pitchFamily="34" charset="0"/>
+                <a:ea typeface="Arial" pitchFamily="34" charset="-122"/>
+                <a:cs typeface="Arial" pitchFamily="34" charset="-120"/>
+              </a:rPr>
+              <a:t>Карточки анонимны: имя и контакты открываются, только когда кандидат принял приглашение.</a:t>
+            </a:r>
+            <a:endParaRPr lang="en-US" sz="1600" dirty="0"/>
+          </a:p>
+          <a:p>
+            <a:pPr marL="342900" indent="-342900">
+              <a:spcAft>
+                <a:spcPts val="1000"/>
+              </a:spcAft>
+              <a:buSzPct val="100000"/>
+              <a:buChar char="•"/>
+            </a:pPr>
+            <a:r>
+              <a:rPr lang="en-US" sz="1600" dirty="0">
+                <a:solidFill>
+                  <a:srgbClr val="1B1C21"/>
+                </a:solidFill>
+                <a:latin typeface="Arial" pitchFamily="34" charset="0"/>
+                <a:ea typeface="Arial" pitchFamily="34" charset="-122"/>
+                <a:cs typeface="Arial" pitchFamily="34" charset="-120"/>
+              </a:rPr>
+              <a:t>Не больше 50 приглашений в день от компании, срок ответа 14 дней.</a:t>
+            </a:r>
+            <a:endParaRPr lang="en-US" sz="1600" dirty="0"/>
+          </a:p>
+          <a:p>
+            <a:pPr marL="342900" indent="-342900">
+              <a:spcAft>
+                <a:spcPts val="1000"/>
+              </a:spcAft>
+              <a:buSzPct val="100000"/>
+              <a:buChar char="•"/>
+            </a:pPr>
+            <a:r>
+              <a:rPr lang="en-US" sz="1600" dirty="0">
+                <a:solidFill>
+                  <a:srgbClr val="1B1C21"/>
+                </a:solidFill>
+                <a:latin typeface="Arial" pitchFamily="34" charset="0"/>
+                <a:ea typeface="Arial" pitchFamily="34" charset="-122"/>
+                <a:cs typeface="Arial" pitchFamily="34" charset="-120"/>
+              </a:rPr>
+              <a:t>После отказа та же компания ждёт 30 дней. Кандидат может закрыть контакты для одной компании.</a:t>
+            </a:r>
+            <a:endParaRPr lang="en-US" sz="1600" dirty="0"/>
+          </a:p>
+        </p:txBody>
+      </p:sp>
+      <p:sp>
+        <p:nvSpPr>
+          <p:cNvPr id="8" name="Text 5"/>
+          <p:cNvSpPr/>
+          <p:nvPr/>
+        </p:nvSpPr>
+        <p:spPr>
+          <a:xfrm>
+            <a:off x="10881360" y="6309360"/>
+            <a:ext cx="914400" cy="274320"/>
           </a:xfrm>
           <a:prstGeom prst="rect">
             <a:avLst/>
@@ -2750,250 +3192,11 @@
           <a:bodyPr wrap="square" lIns="0" tIns="0" rIns="0" bIns="0" rtlCol="0" anchor="ctr"/>
           <a:lstStyle/>
           <a:p>
-            <a:pPr indent="0" marL="0">
-              <a:buNone/>
-            </a:pPr>
-            <a:r>
-              <a:rPr lang="en-US" sz="1800" dirty="0">
-                <a:solidFill>
-                  <a:srgbClr val="1B1C21"/>
-                </a:solidFill>
-                <a:latin typeface="Arial" pitchFamily="34" charset="0"/>
-                <a:ea typeface="Arial" pitchFamily="34" charset="-122"/>
-                <a:cs typeface="Arial" pitchFamily="34" charset="-120"/>
-              </a:rPr>
-              <a:t>Навыки, грейд, специализация, текст и сфера складываются в одну оценку. У каждой строки объяснения свой код: совпадение, подтверждённый навык, тест, пробел, ось ФСП, смежная специализация.</a:t>
-            </a:r>
-            <a:endParaRPr lang="en-US" sz="1800" dirty="0"/>
-          </a:p>
-        </p:txBody>
-      </p:sp>
-      <p:sp>
-        <p:nvSpPr>
-          <p:cNvPr id="6" name="Shape 4"/>
-          <p:cNvSpPr/>
-          <p:nvPr/>
-        </p:nvSpPr>
-        <p:spPr>
-          <a:xfrm>
-            <a:off x="502920" y="3200400"/>
-            <a:ext cx="5486400" cy="2011680"/>
-          </a:xfrm>
-          <a:prstGeom prst="roundRect">
-            <a:avLst>
-              <a:gd name="adj" fmla="val 3636"/>
-            </a:avLst>
-          </a:prstGeom>
-          <a:solidFill>
-            <a:srgbClr val="FFFFFF"/>
-          </a:solidFill>
-          <a:ln/>
-        </p:spPr>
-      </p:sp>
-      <p:sp>
-        <p:nvSpPr>
-          <p:cNvPr id="7" name="Text 5"/>
-          <p:cNvSpPr/>
-          <p:nvPr/>
-        </p:nvSpPr>
-        <p:spPr>
-          <a:xfrm>
-            <a:off x="777240" y="3429000"/>
-            <a:ext cx="4937760" cy="731520"/>
-          </a:xfrm>
-          <a:prstGeom prst="rect">
-            <a:avLst/>
-          </a:prstGeom>
-          <a:noFill/>
-          <a:ln/>
-        </p:spPr>
-        <p:txBody>
-          <a:bodyPr wrap="square" lIns="0" tIns="0" rIns="0" bIns="0" rtlCol="0" anchor="ctr"/>
-          <a:lstStyle/>
-          <a:p>
-            <a:pPr indent="0" marL="0">
-              <a:buNone/>
-            </a:pPr>
-            <a:r>
-              <a:rPr lang="en-US" sz="3600" b="1" dirty="0">
-                <a:solidFill>
-                  <a:srgbClr val="402FFF"/>
-                </a:solidFill>
-                <a:latin typeface="Arial" pitchFamily="34" charset="0"/>
-                <a:ea typeface="Arial" pitchFamily="34" charset="-122"/>
-                <a:cs typeface="Arial" pitchFamily="34" charset="-120"/>
-              </a:rPr>
-              <a:t>+0,046</a:t>
-            </a:r>
-            <a:endParaRPr lang="en-US" sz="3600" dirty="0"/>
-          </a:p>
-        </p:txBody>
-      </p:sp>
-      <p:sp>
-        <p:nvSpPr>
-          <p:cNvPr id="8" name="Text 6"/>
-          <p:cNvSpPr/>
-          <p:nvPr/>
-        </p:nvSpPr>
-        <p:spPr>
-          <a:xfrm>
-            <a:off x="777240" y="4251960"/>
-            <a:ext cx="4937760" cy="640080"/>
-          </a:xfrm>
-          <a:prstGeom prst="rect">
-            <a:avLst/>
-          </a:prstGeom>
-          <a:noFill/>
-          <a:ln/>
-        </p:spPr>
-        <p:txBody>
-          <a:bodyPr wrap="square" lIns="0" tIns="0" rIns="0" bIns="0" rtlCol="0" anchor="ctr"/>
-          <a:lstStyle/>
-          <a:p>
-            <a:pPr indent="0" marL="0">
-              <a:buNone/>
-            </a:pPr>
-            <a:r>
-              <a:rPr lang="en-US" sz="1600" dirty="0">
-                <a:solidFill>
-                  <a:srgbClr val="1B1C21"/>
-                </a:solidFill>
-                <a:latin typeface="Arial" pitchFamily="34" charset="0"/>
-                <a:ea typeface="Arial" pitchFamily="34" charset="-122"/>
-                <a:cs typeface="Arial" pitchFamily="34" charset="-120"/>
-              </a:rPr>
-              <a:t>nDCG@10 к поиску по словам, зерно 2026</a:t>
-            </a:r>
-            <a:endParaRPr lang="en-US" sz="1600" dirty="0"/>
-          </a:p>
-        </p:txBody>
-      </p:sp>
-      <p:sp>
-        <p:nvSpPr>
-          <p:cNvPr id="9" name="Shape 7"/>
-          <p:cNvSpPr/>
-          <p:nvPr/>
-        </p:nvSpPr>
-        <p:spPr>
-          <a:xfrm>
-            <a:off x="6263640" y="3200400"/>
-            <a:ext cx="5486400" cy="2011680"/>
-          </a:xfrm>
-          <a:prstGeom prst="roundRect">
-            <a:avLst>
-              <a:gd name="adj" fmla="val 3636"/>
-            </a:avLst>
-          </a:prstGeom>
-          <a:solidFill>
-            <a:srgbClr val="FFFFFF"/>
-          </a:solidFill>
-          <a:ln/>
-        </p:spPr>
-      </p:sp>
-      <p:sp>
-        <p:nvSpPr>
-          <p:cNvPr id="10" name="Text 8"/>
-          <p:cNvSpPr/>
-          <p:nvPr/>
-        </p:nvSpPr>
-        <p:spPr>
-          <a:xfrm>
-            <a:off x="6537960" y="3429000"/>
-            <a:ext cx="4937760" cy="731520"/>
-          </a:xfrm>
-          <a:prstGeom prst="rect">
-            <a:avLst/>
-          </a:prstGeom>
-          <a:noFill/>
-          <a:ln/>
-        </p:spPr>
-        <p:txBody>
-          <a:bodyPr wrap="square" lIns="0" tIns="0" rIns="0" bIns="0" rtlCol="0" anchor="ctr"/>
-          <a:lstStyle/>
-          <a:p>
-            <a:pPr indent="0" marL="0">
-              <a:buNone/>
-            </a:pPr>
-            <a:r>
-              <a:rPr lang="en-US" sz="3600" b="1" dirty="0">
-                <a:solidFill>
-                  <a:srgbClr val="402FFF"/>
-                </a:solidFill>
-                <a:latin typeface="Arial" pitchFamily="34" charset="0"/>
-                <a:ea typeface="Arial" pitchFamily="34" charset="-122"/>
-                <a:cs typeface="Arial" pitchFamily="34" charset="-120"/>
-              </a:rPr>
-              <a:t>+0,087</a:t>
-            </a:r>
-            <a:endParaRPr lang="en-US" sz="3600" dirty="0"/>
-          </a:p>
-        </p:txBody>
-      </p:sp>
-      <p:sp>
-        <p:nvSpPr>
-          <p:cNvPr id="11" name="Text 9"/>
-          <p:cNvSpPr/>
-          <p:nvPr/>
-        </p:nvSpPr>
-        <p:spPr>
-          <a:xfrm>
-            <a:off x="6537960" y="4251960"/>
-            <a:ext cx="4937760" cy="640080"/>
-          </a:xfrm>
-          <a:prstGeom prst="rect">
-            <a:avLst/>
-          </a:prstGeom>
-          <a:noFill/>
-          <a:ln/>
-        </p:spPr>
-        <p:txBody>
-          <a:bodyPr wrap="square" lIns="0" tIns="0" rIns="0" bIns="0" rtlCol="0" anchor="ctr"/>
-          <a:lstStyle/>
-          <a:p>
-            <a:pPr indent="0" marL="0">
-              <a:buNone/>
-            </a:pPr>
-            <a:r>
-              <a:rPr lang="en-US" sz="1600" dirty="0">
-                <a:solidFill>
-                  <a:srgbClr val="1B1C21"/>
-                </a:solidFill>
-                <a:latin typeface="Arial" pitchFamily="34" charset="0"/>
-                <a:ea typeface="Arial" pitchFamily="34" charset="-122"/>
-                <a:cs typeface="Arial" pitchFamily="34" charset="-120"/>
-              </a:rPr>
-              <a:t>nDCG@10 к поиску по словам, зерно 7</a:t>
-            </a:r>
-            <a:endParaRPr lang="en-US" sz="1600" dirty="0"/>
-          </a:p>
-        </p:txBody>
-      </p:sp>
-      <p:sp>
-        <p:nvSpPr>
-          <p:cNvPr id="12" name="Text 10"/>
-          <p:cNvSpPr/>
-          <p:nvPr/>
-        </p:nvSpPr>
-        <p:spPr>
-          <a:xfrm>
-            <a:off x="502920" y="6172200"/>
-            <a:ext cx="10972800" cy="274320"/>
-          </a:xfrm>
-          <a:prstGeom prst="rect">
-            <a:avLst/>
-          </a:prstGeom>
-          <a:noFill/>
-          <a:ln/>
-        </p:spPr>
-        <p:txBody>
-          <a:bodyPr wrap="square" lIns="0" tIns="0" rIns="0" bIns="0" rtlCol="0" anchor="ctr"/>
-          <a:lstStyle/>
-          <a:p>
-            <a:pPr indent="0" marL="0">
-              <a:buNone/>
-            </a:pPr>
-            <a:r>
-              <a:rPr lang="en-US" sz="1200" dirty="0">
+            <a:pPr algn="r" indent="0" marL="0">
+              <a:buNone/>
+            </a:pPr>
+            <a:r>
+              <a:rPr lang="en-US" sz="1100" dirty="0">
                 <a:solidFill>
                   <a:srgbClr val="5C5E66"/>
                 </a:solidFill>
@@ -3001,9 +3204,9 @@
                 <a:ea typeface="Arial" pitchFamily="34" charset="-122"/>
                 <a:cs typeface="Arial" pitchFamily="34" charset="-120"/>
               </a:rPr>
-              <a:t>python -m app.validation.matching    и    python -m app.validation.matching --seed 7</a:t>
-            </a:r>
-            <a:endParaRPr lang="en-US" sz="1200" dirty="0"/>
+              <a:t>4 / 10</a:t>
+            </a:r>
+            <a:endParaRPr lang="en-US" sz="1100" dirty="0"/>
           </a:p>
         </p:txBody>
       </p:sp>
@@ -3061,14 +3264,34 @@
       </p:sp>
       <p:sp>
         <p:nvSpPr>
-          <p:cNvPr id="3" name="Text 1"/>
-          <p:cNvSpPr/>
-          <p:nvPr/>
-        </p:nvSpPr>
-        <p:spPr>
-          <a:xfrm>
-            <a:off x="502920" y="292608"/>
-            <a:ext cx="10972800" cy="292608"/>
+          <p:cNvPr id="3" name="Shape 1"/>
+          <p:cNvSpPr/>
+          <p:nvPr/>
+        </p:nvSpPr>
+        <p:spPr>
+          <a:xfrm>
+            <a:off x="109728" y="0"/>
+            <a:ext cx="54864" cy="6858000"/>
+          </a:xfrm>
+          <a:prstGeom prst="rect">
+            <a:avLst/>
+          </a:prstGeom>
+          <a:solidFill>
+            <a:srgbClr val="EC1D35"/>
+          </a:solidFill>
+          <a:ln/>
+        </p:spPr>
+      </p:sp>
+      <p:sp>
+        <p:nvSpPr>
+          <p:cNvPr id="4" name="Text 2"/>
+          <p:cNvSpPr/>
+          <p:nvPr/>
+        </p:nvSpPr>
+        <p:spPr>
+          <a:xfrm>
+            <a:off x="502920" y="457200"/>
+            <a:ext cx="10972800" cy="274320"/>
           </a:xfrm>
           <a:prstGeom prst="rect">
             <a:avLst/>
@@ -3084,7 +3307,7 @@
               <a:buNone/>
             </a:pPr>
             <a:r>
-              <a:rPr lang="en-US" sz="1200" spc="120" kern="0" dirty="0">
+              <a:rPr lang="en-US" sz="1200" spc="200" kern="0" dirty="0">
                 <a:solidFill>
                   <a:srgbClr val="402FFF"/>
                 </a:solidFill>
@@ -3092,7 +3315,7 @@
                 <a:ea typeface="Arial" pitchFamily="34" charset="-122"/>
                 <a:cs typeface="Arial" pitchFamily="34" charset="-120"/>
               </a:rPr>
-              <a:t>ОСЬ ФСП</a:t>
+              <a:t>ТЕСТ</a:t>
             </a:r>
             <a:endParaRPr lang="en-US" sz="1200" dirty="0"/>
           </a:p>
@@ -3100,14 +3323,14 @@
       </p:sp>
       <p:sp>
         <p:nvSpPr>
-          <p:cNvPr id="4" name="Text 2"/>
-          <p:cNvSpPr/>
-          <p:nvPr/>
-        </p:nvSpPr>
-        <p:spPr>
-          <a:xfrm>
-            <a:off x="502920" y="640080"/>
-            <a:ext cx="11155680" cy="1051560"/>
+          <p:cNvPr id="5" name="Text 3"/>
+          <p:cNvSpPr/>
+          <p:nvPr/>
+        </p:nvSpPr>
+        <p:spPr>
+          <a:xfrm>
+            <a:off x="502920" y="777240"/>
+            <a:ext cx="11155680" cy="914400"/>
           </a:xfrm>
           <a:prstGeom prst="rect">
             <a:avLst/>
@@ -3123,7 +3346,7 @@
               <a:buNone/>
             </a:pPr>
             <a:r>
-              <a:rPr lang="en-US" sz="3600" b="1" dirty="0">
+              <a:rPr lang="en-US" sz="3000" b="1" dirty="0">
                 <a:solidFill>
                   <a:srgbClr val="1B1C21"/>
                 </a:solidFill>
@@ -3131,48 +3354,9 @@
                 <a:ea typeface="Arial" pitchFamily="34" charset="-122"/>
                 <a:cs typeface="Arial" pitchFamily="34" charset="-120"/>
               </a:rPr>
-              <a:t>Соревнования не поднимают грейд</a:t>
-            </a:r>
-            <a:endParaRPr lang="en-US" sz="3600" dirty="0"/>
-          </a:p>
-        </p:txBody>
-      </p:sp>
-      <p:sp>
-        <p:nvSpPr>
-          <p:cNvPr id="5" name="Text 3"/>
-          <p:cNvSpPr/>
-          <p:nvPr/>
-        </p:nvSpPr>
-        <p:spPr>
-          <a:xfrm>
-            <a:off x="502920" y="1965960"/>
-            <a:ext cx="11155680" cy="1097280"/>
-          </a:xfrm>
-          <a:prstGeom prst="rect">
-            <a:avLst/>
-          </a:prstGeom>
-          <a:noFill/>
-          <a:ln/>
-        </p:spPr>
-        <p:txBody>
-          <a:bodyPr wrap="square" lIns="0" tIns="0" rIns="0" bIns="0" rtlCol="0" anchor="ctr"/>
-          <a:lstStyle/>
-          <a:p>
-            <a:pPr indent="0" marL="0">
-              <a:buNone/>
-            </a:pPr>
-            <a:r>
-              <a:rPr lang="en-US" sz="1800" dirty="0">
-                <a:solidFill>
-                  <a:srgbClr val="1B1C21"/>
-                </a:solidFill>
-                <a:latin typeface="Arial" pitchFamily="34" charset="0"/>
-                <a:ea typeface="Arial" pitchFamily="34" charset="-122"/>
-                <a:cs typeface="Arial" pitchFamily="34" charset="-120"/>
-              </a:rPr>
-              <a:t>Грейд подтверждает только тест. Протокол ФСП — вторая ось: место, давность, командный зачёт. Статус соревнования на балл не влияет. Нет истории — ось выпадает из оценки, штрафа нет.</a:t>
-            </a:r>
-            <a:endParaRPr lang="en-US" sz="1800" dirty="0"/>
+              <a:t>Выученный ответ не подходит</a:t>
+            </a:r>
+            <a:endParaRPr lang="en-US" sz="3000" dirty="0"/>
           </a:p>
         </p:txBody>
       </p:sp>
@@ -3184,18 +3368,23 @@
         </p:nvSpPr>
         <p:spPr>
           <a:xfrm>
-            <a:off x="502920" y="3291840"/>
-            <a:ext cx="11155680" cy="1143000"/>
+            <a:off x="502920" y="1920240"/>
+            <a:ext cx="3593592" cy="2926080"/>
           </a:xfrm>
           <a:prstGeom prst="roundRect">
             <a:avLst>
-              <a:gd name="adj" fmla="val 6400"/>
+              <a:gd name="adj" fmla="val 2500"/>
             </a:avLst>
           </a:prstGeom>
           <a:solidFill>
             <a:srgbClr val="FFFFFF"/>
           </a:solidFill>
-          <a:ln/>
+          <a:ln w="12700">
+            <a:solidFill>
+              <a:srgbClr val="FFFFFF"/>
+            </a:solidFill>
+            <a:prstDash val="solid"/>
+          </a:ln>
         </p:spPr>
       </p:sp>
       <p:sp>
@@ -3206,8 +3395,8 @@
         </p:nvSpPr>
         <p:spPr>
           <a:xfrm>
-            <a:off x="777240" y="3566160"/>
-            <a:ext cx="3840480" cy="594360"/>
+            <a:off x="731520" y="2148840"/>
+            <a:ext cx="3154680" cy="822960"/>
           </a:xfrm>
           <a:prstGeom prst="rect">
             <a:avLst/>
@@ -3223,7 +3412,7 @@
               <a:buNone/>
             </a:pPr>
             <a:r>
-              <a:rPr lang="en-US" sz="2600" b="1" dirty="0">
+              <a:rPr lang="en-US" sz="3000" b="1" dirty="0">
                 <a:solidFill>
                   <a:srgbClr val="402FFF"/>
                 </a:solidFill>
@@ -3231,9 +3420,9 @@
                 <a:ea typeface="Arial" pitchFamily="34" charset="-122"/>
                 <a:cs typeface="Arial" pitchFamily="34" charset="-120"/>
               </a:rPr>
-              <a:t>0,661 и 0,661</a:t>
-            </a:r>
-            <a:endParaRPr lang="en-US" sz="2600" dirty="0"/>
+              <a:t>0 %</a:t>
+            </a:r>
+            <a:endParaRPr lang="en-US" sz="3000" dirty="0"/>
           </a:p>
         </p:txBody>
       </p:sp>
@@ -3245,24 +3434,24 @@
         </p:nvSpPr>
         <p:spPr>
           <a:xfrm>
-            <a:off x="4754880" y="3611880"/>
-            <a:ext cx="6400800" cy="502920"/>
-          </a:xfrm>
-          <a:prstGeom prst="rect">
-            <a:avLst/>
-          </a:prstGeom>
-          <a:noFill/>
-          <a:ln/>
-        </p:spPr>
-        <p:txBody>
-          <a:bodyPr wrap="square" lIns="0" tIns="0" rIns="0" bIns="0" rtlCol="0" anchor="ctr"/>
+            <a:off x="731520" y="3063240"/>
+            <a:ext cx="3154680" cy="1554480"/>
+          </a:xfrm>
+          <a:prstGeom prst="rect">
+            <a:avLst/>
+          </a:prstGeom>
+          <a:noFill/>
+          <a:ln/>
+        </p:spPr>
+        <p:txBody>
+          <a:bodyPr wrap="square" lIns="0" tIns="0" rIns="0" bIns="0" rtlCol="0" anchor="t"/>
           <a:lstStyle/>
           <a:p>
             <a:pPr indent="0" marL="0">
               <a:buNone/>
             </a:pPr>
             <a:r>
-              <a:rPr lang="en-US" sz="1800" dirty="0">
+              <a:rPr lang="en-US" sz="1600" dirty="0">
                 <a:solidFill>
                   <a:srgbClr val="1B1C21"/>
                 </a:solidFill>
@@ -3270,9 +3459,9 @@
                 <a:ea typeface="Arial" pitchFamily="34" charset="-122"/>
                 <a:cs typeface="Arial" pitchFamily="34" charset="-120"/>
               </a:rPr>
-              <a:t>nDCG@10 с осью и без неё, зерно 2026</a:t>
-            </a:r>
-            <a:endParaRPr lang="en-US" sz="1800" dirty="0"/>
+              <a:t>сдают с ключом от другого экземпляра того же семейства</a:t>
+            </a:r>
+            <a:endParaRPr lang="en-US" sz="1600" dirty="0"/>
           </a:p>
         </p:txBody>
       </p:sp>
@@ -3284,18 +3473,23 @@
         </p:nvSpPr>
         <p:spPr>
           <a:xfrm>
-            <a:off x="502920" y="4572000"/>
-            <a:ext cx="11155680" cy="1143000"/>
+            <a:off x="4279392" y="1920240"/>
+            <a:ext cx="3593592" cy="2926080"/>
           </a:xfrm>
           <a:prstGeom prst="roundRect">
             <a:avLst>
-              <a:gd name="adj" fmla="val 6400"/>
+              <a:gd name="adj" fmla="val 2500"/>
             </a:avLst>
           </a:prstGeom>
           <a:solidFill>
             <a:srgbClr val="FFFFFF"/>
           </a:solidFill>
-          <a:ln/>
+          <a:ln w="12700">
+            <a:solidFill>
+              <a:srgbClr val="FFFFFF"/>
+            </a:solidFill>
+            <a:prstDash val="solid"/>
+          </a:ln>
         </p:spPr>
       </p:sp>
       <p:sp>
@@ -3306,8 +3500,8 @@
         </p:nvSpPr>
         <p:spPr>
           <a:xfrm>
-            <a:off x="777240" y="4846320"/>
-            <a:ext cx="3840480" cy="594360"/>
+            <a:off x="4507992" y="2148840"/>
+            <a:ext cx="3154680" cy="822960"/>
           </a:xfrm>
           <a:prstGeom prst="rect">
             <a:avLst/>
@@ -3323,7 +3517,7 @@
               <a:buNone/>
             </a:pPr>
             <a:r>
-              <a:rPr lang="en-US" sz="2600" b="1" dirty="0">
+              <a:rPr lang="en-US" sz="3000" b="1" dirty="0">
                 <a:solidFill>
                   <a:srgbClr val="402FFF"/>
                 </a:solidFill>
@@ -3331,9 +3525,9 @@
                 <a:ea typeface="Arial" pitchFamily="34" charset="-122"/>
                 <a:cs typeface="Arial" pitchFamily="34" charset="-120"/>
               </a:rPr>
-              <a:t>0,713 и 0,713</a:t>
-            </a:r>
-            <a:endParaRPr lang="en-US" sz="2600" dirty="0"/>
+              <a:t>100 %</a:t>
+            </a:r>
+            <a:endParaRPr lang="en-US" sz="3000" dirty="0"/>
           </a:p>
         </p:txBody>
       </p:sp>
@@ -3345,8 +3539,74 @@
         </p:nvSpPr>
         <p:spPr>
           <a:xfrm>
-            <a:off x="4754880" y="4892040"/>
-            <a:ext cx="6400800" cy="502920"/>
+            <a:off x="4507992" y="3063240"/>
+            <a:ext cx="3154680" cy="1554480"/>
+          </a:xfrm>
+          <a:prstGeom prst="rect">
+            <a:avLst/>
+          </a:prstGeom>
+          <a:noFill/>
+          <a:ln/>
+        </p:spPr>
+        <p:txBody>
+          <a:bodyPr wrap="square" lIns="0" tIns="0" rIns="0" bIns="0" rtlCol="0" anchor="t"/>
+          <a:lstStyle/>
+          <a:p>
+            <a:pPr indent="0" marL="0">
+              <a:buNone/>
+            </a:pPr>
+            <a:r>
+              <a:rPr lang="en-US" sz="1600" dirty="0">
+                <a:solidFill>
+                  <a:srgbClr val="1B1C21"/>
+                </a:solidFill>
+                <a:latin typeface="Arial" pitchFamily="34" charset="0"/>
+                <a:ea typeface="Arial" pitchFamily="34" charset="-122"/>
+                <a:cs typeface="Arial" pitchFamily="34" charset="-120"/>
+              </a:rPr>
+              <a:t>сдали бы с ключом фиксированного банка вопросов</a:t>
+            </a:r>
+            <a:endParaRPr lang="en-US" sz="1600" dirty="0"/>
+          </a:p>
+        </p:txBody>
+      </p:sp>
+      <p:sp>
+        <p:nvSpPr>
+          <p:cNvPr id="12" name="Shape 10"/>
+          <p:cNvSpPr/>
+          <p:nvPr/>
+        </p:nvSpPr>
+        <p:spPr>
+          <a:xfrm>
+            <a:off x="8055864" y="1920240"/>
+            <a:ext cx="3593592" cy="2926080"/>
+          </a:xfrm>
+          <a:prstGeom prst="roundRect">
+            <a:avLst>
+              <a:gd name="adj" fmla="val 2500"/>
+            </a:avLst>
+          </a:prstGeom>
+          <a:solidFill>
+            <a:srgbClr val="FFFFFF"/>
+          </a:solidFill>
+          <a:ln w="12700">
+            <a:solidFill>
+              <a:srgbClr val="FFFFFF"/>
+            </a:solidFill>
+            <a:prstDash val="solid"/>
+          </a:ln>
+        </p:spPr>
+      </p:sp>
+      <p:sp>
+        <p:nvSpPr>
+          <p:cNvPr id="13" name="Text 11"/>
+          <p:cNvSpPr/>
+          <p:nvPr/>
+        </p:nvSpPr>
+        <p:spPr>
+          <a:xfrm>
+            <a:off x="8284464" y="2148840"/>
+            <a:ext cx="3154680" cy="822960"/>
           </a:xfrm>
           <a:prstGeom prst="rect">
             <a:avLst/>
@@ -3362,7 +3622,46 @@
               <a:buNone/>
             </a:pPr>
             <a:r>
-              <a:rPr lang="en-US" sz="1800" dirty="0">
+              <a:rPr lang="en-US" sz="3000" b="1" dirty="0">
+                <a:solidFill>
+                  <a:srgbClr val="402FFF"/>
+                </a:solidFill>
+                <a:latin typeface="Arial" pitchFamily="34" charset="0"/>
+                <a:ea typeface="Arial" pitchFamily="34" charset="-122"/>
+                <a:cs typeface="Arial" pitchFamily="34" charset="-120"/>
+              </a:rPr>
+              <a:t>18,2 → 13,2 %</a:t>
+            </a:r>
+            <a:endParaRPr lang="en-US" sz="3000" dirty="0"/>
+          </a:p>
+        </p:txBody>
+      </p:sp>
+      <p:sp>
+        <p:nvSpPr>
+          <p:cNvPr id="14" name="Text 12"/>
+          <p:cNvSpPr/>
+          <p:nvPr/>
+        </p:nvSpPr>
+        <p:spPr>
+          <a:xfrm>
+            <a:off x="8284464" y="3063240"/>
+            <a:ext cx="3154680" cy="1554480"/>
+          </a:xfrm>
+          <a:prstGeom prst="rect">
+            <a:avLst/>
+          </a:prstGeom>
+          <a:noFill/>
+          <a:ln/>
+        </p:spPr>
+        <p:txBody>
+          <a:bodyPr wrap="square" lIns="0" tIns="0" rIns="0" bIns="0" rtlCol="0" anchor="t"/>
+          <a:lstStyle/>
+          <a:p>
+            <a:pPr indent="0" marL="0">
+              <a:buNone/>
+            </a:pPr>
+            <a:r>
+              <a:rPr lang="en-US" sz="1600" dirty="0">
                 <a:solidFill>
                   <a:srgbClr val="1B1C21"/>
                 </a:solidFill>
@@ -3370,9 +3669,87 @@
                 <a:ea typeface="Arial" pitchFamily="34" charset="-122"/>
                 <a:cs typeface="Arial" pitchFamily="34" charset="-120"/>
               </a:rPr>
-              <a:t>nDCG@10 с осью и без неё, зерно 7</a:t>
-            </a:r>
-            <a:endParaRPr lang="en-US" sz="1800" dirty="0"/>
+              <a:t>ложные сдачи при утечке у 30 %: карантин ключей на тех же людях</a:t>
+            </a:r>
+            <a:endParaRPr lang="en-US" sz="1600" dirty="0"/>
+          </a:p>
+        </p:txBody>
+      </p:sp>
+      <p:sp>
+        <p:nvSpPr>
+          <p:cNvPr id="15" name="Text 13"/>
+          <p:cNvSpPr/>
+          <p:nvPr/>
+        </p:nvSpPr>
+        <p:spPr>
+          <a:xfrm>
+            <a:off x="502920" y="6263640"/>
+            <a:ext cx="10058400" cy="274320"/>
+          </a:xfrm>
+          <a:prstGeom prst="rect">
+            <a:avLst/>
+          </a:prstGeom>
+          <a:noFill/>
+          <a:ln/>
+        </p:spPr>
+        <p:txBody>
+          <a:bodyPr wrap="square" lIns="0" tIns="0" rIns="0" bIns="0" rtlCol="0" anchor="ctr"/>
+          <a:lstStyle/>
+          <a:p>
+            <a:pPr indent="0" marL="0">
+              <a:buNone/>
+            </a:pPr>
+            <a:r>
+              <a:rPr lang="en-US" sz="1100" dirty="0">
+                <a:solidFill>
+                  <a:srgbClr val="5C5E66"/>
+                </a:solidFill>
+                <a:latin typeface="Courier New" pitchFamily="34" charset="0"/>
+                <a:ea typeface="Courier New" pitchFamily="34" charset="-122"/>
+                <a:cs typeface="Courier New" pitchFamily="34" charset="-120"/>
+              </a:rPr>
+              <a:t>cd backend &amp;&amp; python -m app.validation.assessment --n 2000 --seed 7</a:t>
+            </a:r>
+            <a:endParaRPr lang="en-US" sz="1100" dirty="0"/>
+          </a:p>
+        </p:txBody>
+      </p:sp>
+      <p:sp>
+        <p:nvSpPr>
+          <p:cNvPr id="16" name="Text 14"/>
+          <p:cNvSpPr/>
+          <p:nvPr/>
+        </p:nvSpPr>
+        <p:spPr>
+          <a:xfrm>
+            <a:off x="10881360" y="6309360"/>
+            <a:ext cx="914400" cy="274320"/>
+          </a:xfrm>
+          <a:prstGeom prst="rect">
+            <a:avLst/>
+          </a:prstGeom>
+          <a:noFill/>
+          <a:ln/>
+        </p:spPr>
+        <p:txBody>
+          <a:bodyPr wrap="square" lIns="0" tIns="0" rIns="0" bIns="0" rtlCol="0" anchor="ctr"/>
+          <a:lstStyle/>
+          <a:p>
+            <a:pPr algn="r" indent="0" marL="0">
+              <a:buNone/>
+            </a:pPr>
+            <a:r>
+              <a:rPr lang="en-US" sz="1100" dirty="0">
+                <a:solidFill>
+                  <a:srgbClr val="5C5E66"/>
+                </a:solidFill>
+                <a:latin typeface="Arial" pitchFamily="34" charset="0"/>
+                <a:ea typeface="Arial" pitchFamily="34" charset="-122"/>
+                <a:cs typeface="Arial" pitchFamily="34" charset="-120"/>
+              </a:rPr>
+              <a:t>5 / 10</a:t>
+            </a:r>
+            <a:endParaRPr lang="en-US" sz="1100" dirty="0"/>
           </a:p>
         </p:txBody>
       </p:sp>
@@ -3430,14 +3807,34 @@
       </p:sp>
       <p:sp>
         <p:nvSpPr>
-          <p:cNvPr id="3" name="Text 1"/>
-          <p:cNvSpPr/>
-          <p:nvPr/>
-        </p:nvSpPr>
-        <p:spPr>
-          <a:xfrm>
-            <a:off x="502920" y="292608"/>
-            <a:ext cx="10972800" cy="292608"/>
+          <p:cNvPr id="3" name="Shape 1"/>
+          <p:cNvSpPr/>
+          <p:nvPr/>
+        </p:nvSpPr>
+        <p:spPr>
+          <a:xfrm>
+            <a:off x="109728" y="0"/>
+            <a:ext cx="54864" cy="6858000"/>
+          </a:xfrm>
+          <a:prstGeom prst="rect">
+            <a:avLst/>
+          </a:prstGeom>
+          <a:solidFill>
+            <a:srgbClr val="EC1D35"/>
+          </a:solidFill>
+          <a:ln/>
+        </p:spPr>
+      </p:sp>
+      <p:sp>
+        <p:nvSpPr>
+          <p:cNvPr id="4" name="Text 2"/>
+          <p:cNvSpPr/>
+          <p:nvPr/>
+        </p:nvSpPr>
+        <p:spPr>
+          <a:xfrm>
+            <a:off x="502920" y="457200"/>
+            <a:ext cx="10972800" cy="274320"/>
           </a:xfrm>
           <a:prstGeom prst="rect">
             <a:avLst/>
@@ -3453,7 +3850,7 @@
               <a:buNone/>
             </a:pPr>
             <a:r>
-              <a:rPr lang="en-US" sz="1200" spc="120" kern="0" dirty="0">
+              <a:rPr lang="en-US" sz="1200" spc="200" kern="0" dirty="0">
                 <a:solidFill>
                   <a:srgbClr val="402FFF"/>
                 </a:solidFill>
@@ -3461,7 +3858,7 @@
                 <a:ea typeface="Arial" pitchFamily="34" charset="-122"/>
                 <a:cs typeface="Arial" pitchFamily="34" charset="-120"/>
               </a:rPr>
-              <a:t>ПРОВЕРКА</a:t>
+              <a:t>ТОЧНОСТЬ И УСТОЙЧИВОСТЬ</a:t>
             </a:r>
             <a:endParaRPr lang="en-US" sz="1200" dirty="0"/>
           </a:p>
@@ -3469,14 +3866,14 @@
       </p:sp>
       <p:sp>
         <p:nvSpPr>
-          <p:cNvPr id="4" name="Text 2"/>
-          <p:cNvSpPr/>
-          <p:nvPr/>
-        </p:nvSpPr>
-        <p:spPr>
-          <a:xfrm>
-            <a:off x="502920" y="640080"/>
-            <a:ext cx="11155680" cy="1051560"/>
+          <p:cNvPr id="5" name="Text 3"/>
+          <p:cNvSpPr/>
+          <p:nvPr/>
+        </p:nvSpPr>
+        <p:spPr>
+          <a:xfrm>
+            <a:off x="502920" y="777240"/>
+            <a:ext cx="11155680" cy="914400"/>
           </a:xfrm>
           <a:prstGeom prst="rect">
             <a:avLst/>
@@ -3492,7 +3889,7 @@
               <a:buNone/>
             </a:pPr>
             <a:r>
-              <a:rPr lang="en-US" sz="3600" b="1" dirty="0">
+              <a:rPr lang="en-US" sz="3000" b="1" dirty="0">
                 <a:solidFill>
                   <a:srgbClr val="1B1C21"/>
                 </a:solidFill>
@@ -3500,179 +3897,49 @@
                 <a:ea typeface="Arial" pitchFamily="34" charset="-122"/>
                 <a:cs typeface="Arial" pitchFamily="34" charset="-120"/>
               </a:rPr>
-              <a:t>Те же команды, что в документации</a:t>
-            </a:r>
-            <a:endParaRPr lang="en-US" sz="3600" dirty="0"/>
-          </a:p>
-        </p:txBody>
-      </p:sp>
-      <p:sp>
-        <p:nvSpPr>
-          <p:cNvPr id="5" name="Shape 3"/>
-          <p:cNvSpPr/>
-          <p:nvPr/>
-        </p:nvSpPr>
-        <p:spPr>
-          <a:xfrm>
-            <a:off x="502920" y="1965960"/>
-            <a:ext cx="11155680" cy="685800"/>
-          </a:xfrm>
-          <a:prstGeom prst="rect">
-            <a:avLst/>
-          </a:prstGeom>
-          <a:solidFill>
-            <a:srgbClr val="EFEFF1"/>
-          </a:solidFill>
-          <a:ln/>
-        </p:spPr>
-      </p:sp>
-      <p:sp>
-        <p:nvSpPr>
-          <p:cNvPr id="6" name="Text 4"/>
-          <p:cNvSpPr/>
-          <p:nvPr/>
-        </p:nvSpPr>
-        <p:spPr>
-          <a:xfrm>
-            <a:off x="685800" y="2130552"/>
-            <a:ext cx="5669280" cy="365760"/>
-          </a:xfrm>
-          <a:prstGeom prst="rect">
-            <a:avLst/>
-          </a:prstGeom>
-          <a:noFill/>
-          <a:ln/>
-        </p:spPr>
-        <p:txBody>
-          <a:bodyPr wrap="square" lIns="0" tIns="0" rIns="0" bIns="0" rtlCol="0" anchor="ctr"/>
-          <a:lstStyle/>
-          <a:p>
-            <a:pPr indent="0" marL="0">
-              <a:buNone/>
-            </a:pPr>
-            <a:r>
-              <a:rPr lang="en-US" sz="1600" dirty="0">
-                <a:solidFill>
-                  <a:srgbClr val="1B1C21"/>
-                </a:solidFill>
-                <a:latin typeface="Arial" pitchFamily="34" charset="0"/>
-                <a:ea typeface="Arial" pitchFamily="34" charset="-122"/>
-                <a:cs typeface="Arial" pitchFamily="34" charset="-120"/>
-              </a:rPr>
-              <a:t>Точность вдали от границы грейда</a:t>
-            </a:r>
-            <a:endParaRPr lang="en-US" sz="1600" dirty="0"/>
-          </a:p>
-        </p:txBody>
-      </p:sp>
-      <p:sp>
-        <p:nvSpPr>
-          <p:cNvPr id="7" name="Text 5"/>
-          <p:cNvSpPr/>
-          <p:nvPr/>
-        </p:nvSpPr>
-        <p:spPr>
-          <a:xfrm>
-            <a:off x="6400800" y="2103120"/>
-            <a:ext cx="2194560" cy="411480"/>
-          </a:xfrm>
-          <a:prstGeom prst="rect">
-            <a:avLst/>
-          </a:prstGeom>
-          <a:noFill/>
-          <a:ln/>
-        </p:spPr>
-        <p:txBody>
-          <a:bodyPr wrap="square" lIns="0" tIns="0" rIns="0" bIns="0" rtlCol="0" anchor="ctr"/>
-          <a:lstStyle/>
-          <a:p>
-            <a:pPr indent="0" marL="0">
-              <a:buNone/>
-            </a:pPr>
-            <a:r>
-              <a:rPr lang="en-US" sz="1800" b="1" dirty="0">
-                <a:solidFill>
-                  <a:srgbClr val="402FFF"/>
-                </a:solidFill>
-                <a:latin typeface="Arial" pitchFamily="34" charset="0"/>
-                <a:ea typeface="Arial" pitchFamily="34" charset="-122"/>
-                <a:cs typeface="Arial" pitchFamily="34" charset="-120"/>
-              </a:rPr>
-              <a:t>91,5 %</a:t>
-            </a:r>
-            <a:endParaRPr lang="en-US" sz="1800" dirty="0"/>
-          </a:p>
-        </p:txBody>
-      </p:sp>
-      <p:sp>
-        <p:nvSpPr>
-          <p:cNvPr id="8" name="Text 6"/>
-          <p:cNvSpPr/>
-          <p:nvPr/>
-        </p:nvSpPr>
-        <p:spPr>
-          <a:xfrm>
-            <a:off x="8595360" y="2130552"/>
-            <a:ext cx="2834640" cy="365760"/>
-          </a:xfrm>
-          <a:prstGeom prst="rect">
-            <a:avLst/>
-          </a:prstGeom>
-          <a:noFill/>
-          <a:ln/>
-        </p:spPr>
-        <p:txBody>
-          <a:bodyPr wrap="square" lIns="0" tIns="0" rIns="0" bIns="0" rtlCol="0" anchor="ctr"/>
-          <a:lstStyle/>
-          <a:p>
-            <a:pPr indent="0" marL="0">
-              <a:buNone/>
-            </a:pPr>
-            <a:r>
-              <a:rPr lang="en-US" sz="1200" dirty="0">
-                <a:solidFill>
-                  <a:srgbClr val="5C5E66"/>
-                </a:solidFill>
-                <a:latin typeface="Arial" pitchFamily="34" charset="0"/>
-                <a:ea typeface="Arial" pitchFamily="34" charset="-122"/>
-                <a:cs typeface="Arial" pitchFamily="34" charset="-120"/>
-              </a:rPr>
-              <a:t>assessment --n 2000 --seed 7</a:t>
-            </a:r>
-            <a:endParaRPr lang="en-US" sz="1200" dirty="0"/>
-          </a:p>
-        </p:txBody>
-      </p:sp>
-      <p:sp>
-        <p:nvSpPr>
-          <p:cNvPr id="9" name="Shape 7"/>
-          <p:cNvSpPr/>
-          <p:nvPr/>
-        </p:nvSpPr>
-        <p:spPr>
-          <a:xfrm>
-            <a:off x="502920" y="2743200"/>
-            <a:ext cx="11155680" cy="685800"/>
-          </a:xfrm>
-          <a:prstGeom prst="rect">
-            <a:avLst/>
+              <a:t>Решение о грейде держится</a:t>
+            </a:r>
+            <a:endParaRPr lang="en-US" sz="3000" dirty="0"/>
+          </a:p>
+        </p:txBody>
+      </p:sp>
+      <p:sp>
+        <p:nvSpPr>
+          <p:cNvPr id="6" name="Shape 4"/>
+          <p:cNvSpPr/>
+          <p:nvPr/>
+        </p:nvSpPr>
+        <p:spPr>
+          <a:xfrm>
+            <a:off x="502920" y="1920240"/>
+            <a:ext cx="3593592" cy="2926080"/>
+          </a:xfrm>
+          <a:prstGeom prst="roundRect">
+            <a:avLst>
+              <a:gd name="adj" fmla="val 2500"/>
+            </a:avLst>
           </a:prstGeom>
           <a:solidFill>
             <a:srgbClr val="FFFFFF"/>
           </a:solidFill>
-          <a:ln/>
-        </p:spPr>
-      </p:sp>
-      <p:sp>
-        <p:nvSpPr>
-          <p:cNvPr id="10" name="Text 8"/>
-          <p:cNvSpPr/>
-          <p:nvPr/>
-        </p:nvSpPr>
-        <p:spPr>
-          <a:xfrm>
-            <a:off x="685800" y="2907792"/>
-            <a:ext cx="5669280" cy="365760"/>
+          <a:ln w="12700">
+            <a:solidFill>
+              <a:srgbClr val="FFFFFF"/>
+            </a:solidFill>
+            <a:prstDash val="solid"/>
+          </a:ln>
+        </p:spPr>
+      </p:sp>
+      <p:sp>
+        <p:nvSpPr>
+          <p:cNvPr id="7" name="Text 5"/>
+          <p:cNvSpPr/>
+          <p:nvPr/>
+        </p:nvSpPr>
+        <p:spPr>
+          <a:xfrm>
+            <a:off x="731520" y="2148840"/>
+            <a:ext cx="3154680" cy="822960"/>
           </a:xfrm>
           <a:prstGeom prst="rect">
             <a:avLst/>
@@ -3688,6 +3955,45 @@
               <a:buNone/>
             </a:pPr>
             <a:r>
+              <a:rPr lang="en-US" sz="3000" b="1" dirty="0">
+                <a:solidFill>
+                  <a:srgbClr val="402FFF"/>
+                </a:solidFill>
+                <a:latin typeface="Arial" pitchFamily="34" charset="0"/>
+                <a:ea typeface="Arial" pitchFamily="34" charset="-122"/>
+                <a:cs typeface="Arial" pitchFamily="34" charset="-120"/>
+              </a:rPr>
+              <a:t>91,5 %</a:t>
+            </a:r>
+            <a:endParaRPr lang="en-US" sz="3000" dirty="0"/>
+          </a:p>
+        </p:txBody>
+      </p:sp>
+      <p:sp>
+        <p:nvSpPr>
+          <p:cNvPr id="8" name="Text 6"/>
+          <p:cNvSpPr/>
+          <p:nvPr/>
+        </p:nvSpPr>
+        <p:spPr>
+          <a:xfrm>
+            <a:off x="731520" y="3063240"/>
+            <a:ext cx="3154680" cy="1554480"/>
+          </a:xfrm>
+          <a:prstGeom prst="rect">
+            <a:avLst/>
+          </a:prstGeom>
+          <a:noFill/>
+          <a:ln/>
+        </p:spPr>
+        <p:txBody>
+          <a:bodyPr wrap="square" lIns="0" tIns="0" rIns="0" bIns="0" rtlCol="0" anchor="t"/>
+          <a:lstStyle/>
+          <a:p>
+            <a:pPr indent="0" marL="0">
+              <a:buNone/>
+            </a:pPr>
+            <a:r>
               <a:rPr lang="en-US" sz="1600" dirty="0">
                 <a:solidFill>
                   <a:srgbClr val="1B1C21"/>
@@ -3696,7 +4002,7 @@
                 <a:ea typeface="Arial" pitchFamily="34" charset="-122"/>
                 <a:cs typeface="Arial" pitchFamily="34" charset="-120"/>
               </a:rPr>
-              <a:t>Повторная сдача, каппа Коэна</a:t>
+              <a:t>верных решений вдали от границы грейда, 2000 кандидатов</a:t>
             </a:r>
             <a:endParaRPr lang="en-US" sz="1600" dirty="0"/>
           </a:p>
@@ -3704,249 +4010,41 @@
       </p:sp>
       <p:sp>
         <p:nvSpPr>
-          <p:cNvPr id="11" name="Text 9"/>
-          <p:cNvSpPr/>
-          <p:nvPr/>
-        </p:nvSpPr>
-        <p:spPr>
-          <a:xfrm>
-            <a:off x="6400800" y="2880360"/>
-            <a:ext cx="2194560" cy="411480"/>
-          </a:xfrm>
-          <a:prstGeom prst="rect">
-            <a:avLst/>
-          </a:prstGeom>
-          <a:noFill/>
-          <a:ln/>
-        </p:spPr>
-        <p:txBody>
-          <a:bodyPr wrap="square" lIns="0" tIns="0" rIns="0" bIns="0" rtlCol="0" anchor="ctr"/>
-          <a:lstStyle/>
-          <a:p>
-            <a:pPr indent="0" marL="0">
-              <a:buNone/>
-            </a:pPr>
-            <a:r>
-              <a:rPr lang="en-US" sz="1800" b="1" dirty="0">
-                <a:solidFill>
-                  <a:srgbClr val="402FFF"/>
-                </a:solidFill>
-                <a:latin typeface="Arial" pitchFamily="34" charset="0"/>
-                <a:ea typeface="Arial" pitchFamily="34" charset="-122"/>
-                <a:cs typeface="Arial" pitchFamily="34" charset="-120"/>
-              </a:rPr>
-              <a:t>0,51</a:t>
-            </a:r>
-            <a:endParaRPr lang="en-US" sz="1800" dirty="0"/>
-          </a:p>
-        </p:txBody>
-      </p:sp>
-      <p:sp>
-        <p:nvSpPr>
-          <p:cNvPr id="12" name="Text 10"/>
-          <p:cNvSpPr/>
-          <p:nvPr/>
-        </p:nvSpPr>
-        <p:spPr>
-          <a:xfrm>
-            <a:off x="8595360" y="2907792"/>
-            <a:ext cx="2834640" cy="365760"/>
-          </a:xfrm>
-          <a:prstGeom prst="rect">
-            <a:avLst/>
-          </a:prstGeom>
-          <a:noFill/>
-          <a:ln/>
-        </p:spPr>
-        <p:txBody>
-          <a:bodyPr wrap="square" lIns="0" tIns="0" rIns="0" bIns="0" rtlCol="0" anchor="ctr"/>
-          <a:lstStyle/>
-          <a:p>
-            <a:pPr indent="0" marL="0">
-              <a:buNone/>
-            </a:pPr>
-            <a:r>
-              <a:rPr lang="en-US" sz="1200" dirty="0">
-                <a:solidFill>
-                  <a:srgbClr val="5C5E66"/>
-                </a:solidFill>
-                <a:latin typeface="Arial" pitchFamily="34" charset="0"/>
-                <a:ea typeface="Arial" pitchFamily="34" charset="-122"/>
-                <a:cs typeface="Arial" pitchFamily="34" charset="-120"/>
-              </a:rPr>
-              <a:t>та же команда</a:t>
-            </a:r>
-            <a:endParaRPr lang="en-US" sz="1200" dirty="0"/>
-          </a:p>
-        </p:txBody>
-      </p:sp>
-      <p:sp>
-        <p:nvSpPr>
-          <p:cNvPr id="13" name="Shape 11"/>
-          <p:cNvSpPr/>
-          <p:nvPr/>
-        </p:nvSpPr>
-        <p:spPr>
-          <a:xfrm>
-            <a:off x="502920" y="3520440"/>
-            <a:ext cx="11155680" cy="685800"/>
-          </a:xfrm>
-          <a:prstGeom prst="rect">
-            <a:avLst/>
-          </a:prstGeom>
-          <a:solidFill>
-            <a:srgbClr val="EFEFF1"/>
-          </a:solidFill>
-          <a:ln/>
-        </p:spPr>
-      </p:sp>
-      <p:sp>
-        <p:nvSpPr>
-          <p:cNvPr id="14" name="Text 12"/>
-          <p:cNvSpPr/>
-          <p:nvPr/>
-        </p:nvSpPr>
-        <p:spPr>
-          <a:xfrm>
-            <a:off x="685800" y="3685032"/>
-            <a:ext cx="5669280" cy="365760"/>
-          </a:xfrm>
-          <a:prstGeom prst="rect">
-            <a:avLst/>
-          </a:prstGeom>
-          <a:noFill/>
-          <a:ln/>
-        </p:spPr>
-        <p:txBody>
-          <a:bodyPr wrap="square" lIns="0" tIns="0" rIns="0" bIns="0" rtlCol="0" anchor="ctr"/>
-          <a:lstStyle/>
-          <a:p>
-            <a:pPr indent="0" marL="0">
-              <a:buNone/>
-            </a:pPr>
-            <a:r>
-              <a:rPr lang="en-US" sz="1600" dirty="0">
-                <a:solidFill>
-                  <a:srgbClr val="1B1C21"/>
-                </a:solidFill>
-                <a:latin typeface="Arial" pitchFamily="34" charset="0"/>
-                <a:ea typeface="Arial" pitchFamily="34" charset="-122"/>
-                <a:cs typeface="Arial" pitchFamily="34" charset="-120"/>
-              </a:rPr>
-              <a:t>Завышение грейда</a:t>
-            </a:r>
-            <a:endParaRPr lang="en-US" sz="1600" dirty="0"/>
-          </a:p>
-        </p:txBody>
-      </p:sp>
-      <p:sp>
-        <p:nvSpPr>
-          <p:cNvPr id="15" name="Text 13"/>
-          <p:cNvSpPr/>
-          <p:nvPr/>
-        </p:nvSpPr>
-        <p:spPr>
-          <a:xfrm>
-            <a:off x="6400800" y="3657600"/>
-            <a:ext cx="2194560" cy="411480"/>
-          </a:xfrm>
-          <a:prstGeom prst="rect">
-            <a:avLst/>
-          </a:prstGeom>
-          <a:noFill/>
-          <a:ln/>
-        </p:spPr>
-        <p:txBody>
-          <a:bodyPr wrap="square" lIns="0" tIns="0" rIns="0" bIns="0" rtlCol="0" anchor="ctr"/>
-          <a:lstStyle/>
-          <a:p>
-            <a:pPr indent="0" marL="0">
-              <a:buNone/>
-            </a:pPr>
-            <a:r>
-              <a:rPr lang="en-US" sz="1800" b="1" dirty="0">
-                <a:solidFill>
-                  <a:srgbClr val="402FFF"/>
-                </a:solidFill>
-                <a:latin typeface="Arial" pitchFamily="34" charset="0"/>
-                <a:ea typeface="Arial" pitchFamily="34" charset="-122"/>
-                <a:cs typeface="Arial" pitchFamily="34" charset="-120"/>
-              </a:rPr>
-              <a:t>2,2 %</a:t>
-            </a:r>
-            <a:endParaRPr lang="en-US" sz="1800" dirty="0"/>
-          </a:p>
-        </p:txBody>
-      </p:sp>
-      <p:sp>
-        <p:nvSpPr>
-          <p:cNvPr id="16" name="Text 14"/>
-          <p:cNvSpPr/>
-          <p:nvPr/>
-        </p:nvSpPr>
-        <p:spPr>
-          <a:xfrm>
-            <a:off x="8595360" y="3685032"/>
-            <a:ext cx="2834640" cy="365760"/>
-          </a:xfrm>
-          <a:prstGeom prst="rect">
-            <a:avLst/>
-          </a:prstGeom>
-          <a:noFill/>
-          <a:ln/>
-        </p:spPr>
-        <p:txBody>
-          <a:bodyPr wrap="square" lIns="0" tIns="0" rIns="0" bIns="0" rtlCol="0" anchor="ctr"/>
-          <a:lstStyle/>
-          <a:p>
-            <a:pPr indent="0" marL="0">
-              <a:buNone/>
-            </a:pPr>
-            <a:r>
-              <a:rPr lang="en-US" sz="1200" dirty="0">
-                <a:solidFill>
-                  <a:srgbClr val="5C5E66"/>
-                </a:solidFill>
-                <a:latin typeface="Arial" pitchFamily="34" charset="0"/>
-                <a:ea typeface="Arial" pitchFamily="34" charset="-122"/>
-                <a:cs typeface="Arial" pitchFamily="34" charset="-120"/>
-              </a:rPr>
-              <a:t>та же команда</a:t>
-            </a:r>
-            <a:endParaRPr lang="en-US" sz="1200" dirty="0"/>
-          </a:p>
-        </p:txBody>
-      </p:sp>
-      <p:sp>
-        <p:nvSpPr>
-          <p:cNvPr id="17" name="Shape 15"/>
-          <p:cNvSpPr/>
-          <p:nvPr/>
-        </p:nvSpPr>
-        <p:spPr>
-          <a:xfrm>
-            <a:off x="502920" y="4297680"/>
-            <a:ext cx="11155680" cy="685800"/>
-          </a:xfrm>
-          <a:prstGeom prst="rect">
-            <a:avLst/>
+          <p:cNvPr id="9" name="Shape 7"/>
+          <p:cNvSpPr/>
+          <p:nvPr/>
+        </p:nvSpPr>
+        <p:spPr>
+          <a:xfrm>
+            <a:off x="4279392" y="1920240"/>
+            <a:ext cx="3593592" cy="2926080"/>
+          </a:xfrm>
+          <a:prstGeom prst="roundRect">
+            <a:avLst>
+              <a:gd name="adj" fmla="val 2500"/>
+            </a:avLst>
           </a:prstGeom>
           <a:solidFill>
             <a:srgbClr val="FFFFFF"/>
           </a:solidFill>
-          <a:ln/>
-        </p:spPr>
-      </p:sp>
-      <p:sp>
-        <p:nvSpPr>
-          <p:cNvPr id="18" name="Text 16"/>
-          <p:cNvSpPr/>
-          <p:nvPr/>
-        </p:nvSpPr>
-        <p:spPr>
-          <a:xfrm>
-            <a:off x="685800" y="4462272"/>
-            <a:ext cx="5669280" cy="365760"/>
+          <a:ln w="12700">
+            <a:solidFill>
+              <a:srgbClr val="FFFFFF"/>
+            </a:solidFill>
+            <a:prstDash val="solid"/>
+          </a:ln>
+        </p:spPr>
+      </p:sp>
+      <p:sp>
+        <p:nvSpPr>
+          <p:cNvPr id="10" name="Text 8"/>
+          <p:cNvSpPr/>
+          <p:nvPr/>
+        </p:nvSpPr>
+        <p:spPr>
+          <a:xfrm>
+            <a:off x="4507992" y="2148840"/>
+            <a:ext cx="3154680" cy="822960"/>
           </a:xfrm>
           <a:prstGeom prst="rect">
             <a:avLst/>
@@ -3962,6 +4060,45 @@
               <a:buNone/>
             </a:pPr>
             <a:r>
+              <a:rPr lang="en-US" sz="3000" b="1" dirty="0">
+                <a:solidFill>
+                  <a:srgbClr val="402FFF"/>
+                </a:solidFill>
+                <a:latin typeface="Arial" pitchFamily="34" charset="0"/>
+                <a:ea typeface="Arial" pitchFamily="34" charset="-122"/>
+                <a:cs typeface="Arial" pitchFamily="34" charset="-120"/>
+              </a:rPr>
+              <a:t>0,47</a:t>
+            </a:r>
+            <a:endParaRPr lang="en-US" sz="3000" dirty="0"/>
+          </a:p>
+        </p:txBody>
+      </p:sp>
+      <p:sp>
+        <p:nvSpPr>
+          <p:cNvPr id="11" name="Text 9"/>
+          <p:cNvSpPr/>
+          <p:nvPr/>
+        </p:nvSpPr>
+        <p:spPr>
+          <a:xfrm>
+            <a:off x="4507992" y="3063240"/>
+            <a:ext cx="3154680" cy="1554480"/>
+          </a:xfrm>
+          <a:prstGeom prst="rect">
+            <a:avLst/>
+          </a:prstGeom>
+          <a:noFill/>
+          <a:ln/>
+        </p:spPr>
+        <p:txBody>
+          <a:bodyPr wrap="square" lIns="0" tIns="0" rIns="0" bIns="0" rtlCol="0" anchor="t"/>
+          <a:lstStyle/>
+          <a:p>
+            <a:pPr indent="0" marL="0">
+              <a:buNone/>
+            </a:pPr>
+            <a:r>
               <a:rPr lang="en-US" sz="1600" dirty="0">
                 <a:solidFill>
                   <a:srgbClr val="1B1C21"/>
@@ -3970,7 +4107,7 @@
                 <a:ea typeface="Arial" pitchFamily="34" charset="-122"/>
                 <a:cs typeface="Arial" pitchFamily="34" charset="-120"/>
               </a:rPr>
-              <a:t>Случайное угадывание</a:t>
+              <a:t>каппа Коэна повторной сдачи с новыми заданиями</a:t>
             </a:r>
             <a:endParaRPr lang="en-US" sz="1600" dirty="0"/>
           </a:p>
@@ -3978,14 +4115,41 @@
       </p:sp>
       <p:sp>
         <p:nvSpPr>
-          <p:cNvPr id="19" name="Text 17"/>
-          <p:cNvSpPr/>
-          <p:nvPr/>
-        </p:nvSpPr>
-        <p:spPr>
-          <a:xfrm>
-            <a:off x="6400800" y="4434840"/>
-            <a:ext cx="2194560" cy="411480"/>
+          <p:cNvPr id="12" name="Shape 10"/>
+          <p:cNvSpPr/>
+          <p:nvPr/>
+        </p:nvSpPr>
+        <p:spPr>
+          <a:xfrm>
+            <a:off x="8055864" y="1920240"/>
+            <a:ext cx="3593592" cy="2926080"/>
+          </a:xfrm>
+          <a:prstGeom prst="roundRect">
+            <a:avLst>
+              <a:gd name="adj" fmla="val 2500"/>
+            </a:avLst>
+          </a:prstGeom>
+          <a:solidFill>
+            <a:srgbClr val="FFFFFF"/>
+          </a:solidFill>
+          <a:ln w="12700">
+            <a:solidFill>
+              <a:srgbClr val="FFFFFF"/>
+            </a:solidFill>
+            <a:prstDash val="solid"/>
+          </a:ln>
+        </p:spPr>
+      </p:sp>
+      <p:sp>
+        <p:nvSpPr>
+          <p:cNvPr id="13" name="Text 11"/>
+          <p:cNvSpPr/>
+          <p:nvPr/>
+        </p:nvSpPr>
+        <p:spPr>
+          <a:xfrm>
+            <a:off x="8284464" y="2148840"/>
+            <a:ext cx="3154680" cy="822960"/>
           </a:xfrm>
           <a:prstGeom prst="rect">
             <a:avLst/>
@@ -4001,7 +4165,7 @@
               <a:buNone/>
             </a:pPr>
             <a:r>
-              <a:rPr lang="en-US" sz="1800" b="1" dirty="0">
+              <a:rPr lang="en-US" sz="3000" b="1" dirty="0">
                 <a:solidFill>
                   <a:srgbClr val="402FFF"/>
                 </a:solidFill>
@@ -4009,22 +4173,61 @@
                 <a:ea typeface="Arial" pitchFamily="34" charset="-122"/>
                 <a:cs typeface="Arial" pitchFamily="34" charset="-120"/>
               </a:rPr>
-              <a:t>0 %</a:t>
-            </a:r>
-            <a:endParaRPr lang="en-US" sz="1800" dirty="0"/>
-          </a:p>
-        </p:txBody>
-      </p:sp>
-      <p:sp>
-        <p:nvSpPr>
-          <p:cNvPr id="20" name="Text 18"/>
-          <p:cNvSpPr/>
-          <p:nvPr/>
-        </p:nvSpPr>
-        <p:spPr>
-          <a:xfrm>
-            <a:off x="8595360" y="4462272"/>
-            <a:ext cx="2834640" cy="365760"/>
+              <a:t>6,4 · 70,5 · 99,2 %</a:t>
+            </a:r>
+            <a:endParaRPr lang="en-US" sz="3000" dirty="0"/>
+          </a:p>
+        </p:txBody>
+      </p:sp>
+      <p:sp>
+        <p:nvSpPr>
+          <p:cNvPr id="14" name="Text 12"/>
+          <p:cNvSpPr/>
+          <p:nvPr/>
+        </p:nvSpPr>
+        <p:spPr>
+          <a:xfrm>
+            <a:off x="8284464" y="3063240"/>
+            <a:ext cx="3154680" cy="1554480"/>
+          </a:xfrm>
+          <a:prstGeom prst="rect">
+            <a:avLst/>
+          </a:prstGeom>
+          <a:noFill/>
+          <a:ln/>
+        </p:spPr>
+        <p:txBody>
+          <a:bodyPr wrap="square" lIns="0" tIns="0" rIns="0" bIns="0" rtlCol="0" anchor="t"/>
+          <a:lstStyle/>
+          <a:p>
+            <a:pPr indent="0" marL="0">
+              <a:buNone/>
+            </a:pPr>
+            <a:r>
+              <a:rPr lang="en-US" sz="1600" dirty="0">
+                <a:solidFill>
+                  <a:srgbClr val="1B1C21"/>
+                </a:solidFill>
+                <a:latin typeface="Arial" pitchFamily="34" charset="0"/>
+                <a:ea typeface="Arial" pitchFamily="34" charset="-122"/>
+                <a:cs typeface="Arial" pitchFamily="34" charset="-120"/>
+              </a:rPr>
+              <a:t>сдают тест на middle настоящие junior, middle и senior</a:t>
+            </a:r>
+            <a:endParaRPr lang="en-US" sz="1600" dirty="0"/>
+          </a:p>
+        </p:txBody>
+      </p:sp>
+      <p:sp>
+        <p:nvSpPr>
+          <p:cNvPr id="15" name="Text 13"/>
+          <p:cNvSpPr/>
+          <p:nvPr/>
+        </p:nvSpPr>
+        <p:spPr>
+          <a:xfrm>
+            <a:off x="502920" y="6263640"/>
+            <a:ext cx="10058400" cy="274320"/>
           </a:xfrm>
           <a:prstGeom prst="rect">
             <a:avLst/>
@@ -4040,50 +4243,30 @@
               <a:buNone/>
             </a:pPr>
             <a:r>
-              <a:rPr lang="en-US" sz="1200" dirty="0">
+              <a:rPr lang="en-US" sz="1100" dirty="0">
                 <a:solidFill>
                   <a:srgbClr val="5C5E66"/>
                 </a:solidFill>
-                <a:latin typeface="Arial" pitchFamily="34" charset="0"/>
-                <a:ea typeface="Arial" pitchFamily="34" charset="-122"/>
-                <a:cs typeface="Arial" pitchFamily="34" charset="-120"/>
-              </a:rPr>
-              <a:t>та же команда</a:t>
-            </a:r>
-            <a:endParaRPr lang="en-US" sz="1200" dirty="0"/>
-          </a:p>
-        </p:txBody>
-      </p:sp>
-      <p:sp>
-        <p:nvSpPr>
-          <p:cNvPr id="21" name="Shape 19"/>
-          <p:cNvSpPr/>
-          <p:nvPr/>
-        </p:nvSpPr>
-        <p:spPr>
-          <a:xfrm>
-            <a:off x="502920" y="5074920"/>
-            <a:ext cx="11155680" cy="685800"/>
-          </a:xfrm>
-          <a:prstGeom prst="rect">
-            <a:avLst/>
-          </a:prstGeom>
-          <a:solidFill>
-            <a:srgbClr val="EFEFF1"/>
-          </a:solidFill>
-          <a:ln/>
-        </p:spPr>
-      </p:sp>
-      <p:sp>
-        <p:nvSpPr>
-          <p:cNvPr id="22" name="Text 20"/>
-          <p:cNvSpPr/>
-          <p:nvPr/>
-        </p:nvSpPr>
-        <p:spPr>
-          <a:xfrm>
-            <a:off x="685800" y="5239512"/>
-            <a:ext cx="5669280" cy="365760"/>
+                <a:latin typeface="Courier New" pitchFamily="34" charset="0"/>
+                <a:ea typeface="Courier New" pitchFamily="34" charset="-122"/>
+                <a:cs typeface="Courier New" pitchFamily="34" charset="-120"/>
+              </a:rPr>
+              <a:t>cd backend &amp;&amp; python -m app.validation.assessment --n 2000 --seed 7</a:t>
+            </a:r>
+            <a:endParaRPr lang="en-US" sz="1100" dirty="0"/>
+          </a:p>
+        </p:txBody>
+      </p:sp>
+      <p:sp>
+        <p:nvSpPr>
+          <p:cNvPr id="16" name="Text 14"/>
+          <p:cNvSpPr/>
+          <p:nvPr/>
+        </p:nvSpPr>
+        <p:spPr>
+          <a:xfrm>
+            <a:off x="10881360" y="6309360"/>
+            <a:ext cx="914400" cy="274320"/>
           </a:xfrm>
           <a:prstGeom prst="rect">
             <a:avLst/>
@@ -4095,89 +4278,11 @@
           <a:bodyPr wrap="square" lIns="0" tIns="0" rIns="0" bIns="0" rtlCol="0" anchor="ctr"/>
           <a:lstStyle/>
           <a:p>
-            <a:pPr indent="0" marL="0">
-              <a:buNone/>
-            </a:pPr>
-            <a:r>
-              <a:rPr lang="en-US" sz="1600" dirty="0">
-                <a:solidFill>
-                  <a:srgbClr val="1B1C21"/>
-                </a:solidFill>
-                <a:latin typeface="Arial" pitchFamily="34" charset="0"/>
-                <a:ea typeface="Arial" pitchFamily="34" charset="-122"/>
-                <a:cs typeface="Arial" pitchFamily="34" charset="-120"/>
-              </a:rPr>
-              <a:t>Подбор против ключевых слов</a:t>
-            </a:r>
-            <a:endParaRPr lang="en-US" sz="1600" dirty="0"/>
-          </a:p>
-        </p:txBody>
-      </p:sp>
-      <p:sp>
-        <p:nvSpPr>
-          <p:cNvPr id="23" name="Text 21"/>
-          <p:cNvSpPr/>
-          <p:nvPr/>
-        </p:nvSpPr>
-        <p:spPr>
-          <a:xfrm>
-            <a:off x="6400800" y="5212080"/>
-            <a:ext cx="2194560" cy="411480"/>
-          </a:xfrm>
-          <a:prstGeom prst="rect">
-            <a:avLst/>
-          </a:prstGeom>
-          <a:noFill/>
-          <a:ln/>
-        </p:spPr>
-        <p:txBody>
-          <a:bodyPr wrap="square" lIns="0" tIns="0" rIns="0" bIns="0" rtlCol="0" anchor="ctr"/>
-          <a:lstStyle/>
-          <a:p>
-            <a:pPr indent="0" marL="0">
-              <a:buNone/>
-            </a:pPr>
-            <a:r>
-              <a:rPr lang="en-US" sz="1800" b="1" dirty="0">
-                <a:solidFill>
-                  <a:srgbClr val="402FFF"/>
-                </a:solidFill>
-                <a:latin typeface="Arial" pitchFamily="34" charset="0"/>
-                <a:ea typeface="Arial" pitchFamily="34" charset="-122"/>
-                <a:cs typeface="Arial" pitchFamily="34" charset="-120"/>
-              </a:rPr>
-              <a:t>+0,046 и +0,087</a:t>
-            </a:r>
-            <a:endParaRPr lang="en-US" sz="1800" dirty="0"/>
-          </a:p>
-        </p:txBody>
-      </p:sp>
-      <p:sp>
-        <p:nvSpPr>
-          <p:cNvPr id="24" name="Text 22"/>
-          <p:cNvSpPr/>
-          <p:nvPr/>
-        </p:nvSpPr>
-        <p:spPr>
-          <a:xfrm>
-            <a:off x="8595360" y="5239512"/>
-            <a:ext cx="2834640" cy="365760"/>
-          </a:xfrm>
-          <a:prstGeom prst="rect">
-            <a:avLst/>
-          </a:prstGeom>
-          <a:noFill/>
-          <a:ln/>
-        </p:spPr>
-        <p:txBody>
-          <a:bodyPr wrap="square" lIns="0" tIns="0" rIns="0" bIns="0" rtlCol="0" anchor="ctr"/>
-          <a:lstStyle/>
-          <a:p>
-            <a:pPr indent="0" marL="0">
-              <a:buNone/>
-            </a:pPr>
-            <a:r>
-              <a:rPr lang="en-US" sz="1200" dirty="0">
+            <a:pPr algn="r" indent="0" marL="0">
+              <a:buNone/>
+            </a:pPr>
+            <a:r>
+              <a:rPr lang="en-US" sz="1100" dirty="0">
                 <a:solidFill>
                   <a:srgbClr val="5C5E66"/>
                 </a:solidFill>
@@ -4185,9 +4290,9 @@
                 <a:ea typeface="Arial" pitchFamily="34" charset="-122"/>
                 <a:cs typeface="Arial" pitchFamily="34" charset="-120"/>
               </a:rPr>
-              <a:t>matching и --seed 7</a:t>
-            </a:r>
-            <a:endParaRPr lang="en-US" sz="1200" dirty="0"/>
+              <a:t>6 / 10</a:t>
+            </a:r>
+            <a:endParaRPr lang="en-US" sz="1100" dirty="0"/>
           </a:p>
         </p:txBody>
       </p:sp>
@@ -4205,7 +4310,7 @@
     <p:bg>
       <p:bgPr>
         <a:solidFill>
-          <a:srgbClr val="1B1C21"/>
+          <a:srgbClr val="F7F7F8"/>
         </a:solidFill>
       </p:bgPr>
     </p:bg>
@@ -4271,7 +4376,7 @@
         </p:nvSpPr>
         <p:spPr>
           <a:xfrm>
-            <a:off x="502920" y="411480"/>
+            <a:off x="502920" y="457200"/>
             <a:ext cx="10972800" cy="274320"/>
           </a:xfrm>
           <a:prstGeom prst="rect">
@@ -4288,7 +4393,7 @@
               <a:buNone/>
             </a:pPr>
             <a:r>
-              <a:rPr lang="en-US" sz="1200" dirty="0">
+              <a:rPr lang="en-US" sz="1200" spc="200" kern="0" dirty="0">
                 <a:solidFill>
                   <a:srgbClr val="402FFF"/>
                 </a:solidFill>
@@ -4296,7 +4401,7 @@
                 <a:ea typeface="Arial" pitchFamily="34" charset="-122"/>
                 <a:cs typeface="Arial" pitchFamily="34" charset="-120"/>
               </a:rPr>
-              <a:t>ДАЛЬШЕ</a:t>
+              <a:t>ПОДБОР</a:t>
             </a:r>
             <a:endParaRPr lang="en-US" sz="1200" dirty="0"/>
           </a:p>
@@ -4311,7 +4416,7 @@
         <p:spPr>
           <a:xfrm>
             <a:off x="502920" y="777240"/>
-            <a:ext cx="11155680" cy="1051560"/>
+            <a:ext cx="11155680" cy="914400"/>
           </a:xfrm>
           <a:prstGeom prst="rect">
             <a:avLst/>
@@ -4327,30 +4432,139 @@
               <a:buNone/>
             </a:pPr>
             <a:r>
-              <a:rPr lang="en-US" sz="3600" b="1" dirty="0">
-                <a:solidFill>
-                  <a:srgbClr val="FFFFFF"/>
-                </a:solidFill>
-                <a:latin typeface="Arial" pitchFamily="34" charset="0"/>
-                <a:ea typeface="Arial" pitchFamily="34" charset="-122"/>
-                <a:cs typeface="Arial" pitchFamily="34" charset="-120"/>
-              </a:rPr>
-              <a:t>Что остаётся за этим стендом</a:t>
-            </a:r>
-            <a:endParaRPr lang="en-US" sz="3600" dirty="0"/>
-          </a:p>
-        </p:txBody>
-      </p:sp>
-      <p:sp>
-        <p:nvSpPr>
-          <p:cNvPr id="6" name="Text 4"/>
-          <p:cNvSpPr/>
-          <p:nvPr/>
-        </p:nvSpPr>
-        <p:spPr>
-          <a:xfrm>
-            <a:off x="502920" y="2194560"/>
-            <a:ext cx="10972800" cy="822960"/>
+              <a:rPr lang="en-US" sz="3000" b="1" dirty="0">
+                <a:solidFill>
+                  <a:srgbClr val="1B1C21"/>
+                </a:solidFill>
+                <a:latin typeface="Arial" pitchFamily="34" charset="0"/>
+                <a:ea typeface="Arial" pitchFamily="34" charset="-122"/>
+                <a:cs typeface="Arial" pitchFamily="34" charset="-120"/>
+              </a:rPr>
+              <a:t>Место в списке можно разобрать</a:t>
+            </a:r>
+            <a:endParaRPr lang="en-US" sz="3000" dirty="0"/>
+          </a:p>
+        </p:txBody>
+      </p:sp>
+      <p:pic>
+        <p:nvPicPr>
+          <p:cNvPr id="6" name="Image 0" descr="/home/claude/fsp-talent/docs/assets/pitch-card.png">    </p:cNvPr>
+          <p:cNvPicPr>
+            <a:picLocks noChangeAspect="1"/>
+          </p:cNvPicPr>
+          <p:nvPr/>
+        </p:nvPicPr>
+        <p:blipFill>
+          <a:blip r:embed="rId1"/>
+          <a:stretch>
+            <a:fillRect/>
+          </a:stretch>
+        </p:blipFill>
+        <p:spPr>
+          <a:xfrm>
+            <a:off x="502920" y="1600200"/>
+            <a:ext cx="6949440" cy="4343400"/>
+          </a:xfrm>
+          <a:prstGeom prst="rect">
+            <a:avLst/>
+          </a:prstGeom>
+        </p:spPr>
+      </p:pic>
+      <p:sp>
+        <p:nvSpPr>
+          <p:cNvPr id="7" name="Text 4"/>
+          <p:cNvSpPr/>
+          <p:nvPr/>
+        </p:nvSpPr>
+        <p:spPr>
+          <a:xfrm>
+            <a:off x="7726680" y="1600200"/>
+            <a:ext cx="4023360" cy="4343400"/>
+          </a:xfrm>
+          <a:prstGeom prst="rect">
+            <a:avLst/>
+          </a:prstGeom>
+          <a:noFill/>
+          <a:ln/>
+        </p:spPr>
+        <p:txBody>
+          <a:bodyPr wrap="square" lIns="0" tIns="0" rIns="0" bIns="0" rtlCol="0" anchor="t"/>
+          <a:lstStyle/>
+          <a:p>
+            <a:pPr marL="342900" indent="-342900">
+              <a:spcAft>
+                <a:spcPts val="1000"/>
+              </a:spcAft>
+              <a:buSzPct val="100000"/>
+              <a:buChar char="•"/>
+            </a:pPr>
+            <a:r>
+              <a:rPr lang="en-US" sz="1600" dirty="0">
+                <a:solidFill>
+                  <a:srgbClr val="1B1C21"/>
+                </a:solidFill>
+                <a:latin typeface="Arial" pitchFamily="34" charset="0"/>
+                <a:ea typeface="Arial" pitchFamily="34" charset="-122"/>
+                <a:cs typeface="Arial" pitchFamily="34" charset="-120"/>
+              </a:rPr>
+              <a:t>Внутри категории выше тот, у кого сильнее тест и ФСП: вклад виден в баллах.</a:t>
+            </a:r>
+            <a:endParaRPr lang="en-US" sz="1600" dirty="0"/>
+          </a:p>
+          <a:p>
+            <a:pPr marL="342900" indent="-342900">
+              <a:spcAft>
+                <a:spcPts val="1000"/>
+              </a:spcAft>
+              <a:buSzPct val="100000"/>
+              <a:buChar char="•"/>
+            </a:pPr>
+            <a:r>
+              <a:rPr lang="en-US" sz="1600" dirty="0">
+                <a:solidFill>
+                  <a:srgbClr val="1B1C21"/>
+                </a:solidFill>
+                <a:latin typeface="Arial" pitchFamily="34" charset="0"/>
+                <a:ea typeface="Arial" pitchFamily="34" charset="-122"/>
+                <a:cs typeface="Arial" pitchFamily="34" charset="-120"/>
+              </a:rPr>
+              <a:t>Спирмен порядка со скрытой силой: 0,240 против 0,011 у сортировки по резюме.</a:t>
+            </a:r>
+            <a:endParaRPr lang="en-US" sz="1600" dirty="0"/>
+          </a:p>
+          <a:p>
+            <a:pPr marL="342900" indent="-342900">
+              <a:spcAft>
+                <a:spcPts val="1000"/>
+              </a:spcAft>
+              <a:buSzPct val="100000"/>
+              <a:buChar char="•"/>
+            </a:pPr>
+            <a:r>
+              <a:rPr lang="en-US" sz="1600" dirty="0">
+                <a:solidFill>
+                  <a:srgbClr val="1B1C21"/>
+                </a:solidFill>
+                <a:latin typeface="Arial" pitchFamily="34" charset="0"/>
+                <a:ea typeface="Arial" pitchFamily="34" charset="-122"/>
+                <a:cs typeface="Arial" pitchFamily="34" charset="-120"/>
+              </a:rPr>
+              <a:t>Завышенный грейд в первой десятке: 19,9 % против 28,1 %.</a:t>
+            </a:r>
+            <a:endParaRPr lang="en-US" sz="1600" dirty="0"/>
+          </a:p>
+        </p:txBody>
+      </p:sp>
+      <p:sp>
+        <p:nvSpPr>
+          <p:cNvPr id="8" name="Text 5"/>
+          <p:cNvSpPr/>
+          <p:nvPr/>
+        </p:nvSpPr>
+        <p:spPr>
+          <a:xfrm>
+            <a:off x="502920" y="6263640"/>
+            <a:ext cx="10058400" cy="274320"/>
           </a:xfrm>
           <a:prstGeom prst="rect">
             <a:avLst/>
@@ -4366,19 +4580,235 @@
               <a:buNone/>
             </a:pPr>
             <a:r>
-              <a:rPr lang="en-US" sz="1800" dirty="0">
-                <a:solidFill>
-                  <a:srgbClr val="EDEDED"/>
-                </a:solidFill>
-                <a:latin typeface="Arial" pitchFamily="34" charset="0"/>
-                <a:ea typeface="Arial" pitchFamily="34" charset="-122"/>
-                <a:cs typeface="Arial" pitchFamily="34" charset="-120"/>
-              </a:rPr>
-              <a:t>Настоящий ФСП ID и реестр по уже описанному контракту. Дельта протоколов забирается по расписанию.</a:t>
-            </a:r>
-            <a:endParaRPr lang="en-US" sz="1800" dirty="0"/>
-          </a:p>
-        </p:txBody>
+              <a:rPr lang="en-US" sz="1100" dirty="0">
+                <a:solidFill>
+                  <a:srgbClr val="5C5E66"/>
+                </a:solidFill>
+                <a:latin typeface="Courier New" pitchFamily="34" charset="0"/>
+                <a:ea typeface="Courier New" pitchFamily="34" charset="-122"/>
+                <a:cs typeface="Courier New" pitchFamily="34" charset="-120"/>
+              </a:rPr>
+              <a:t>cd backend &amp;&amp; python -m app.validation.matching</a:t>
+            </a:r>
+            <a:endParaRPr lang="en-US" sz="1100" dirty="0"/>
+          </a:p>
+        </p:txBody>
+      </p:sp>
+      <p:sp>
+        <p:nvSpPr>
+          <p:cNvPr id="9" name="Text 6"/>
+          <p:cNvSpPr/>
+          <p:nvPr/>
+        </p:nvSpPr>
+        <p:spPr>
+          <a:xfrm>
+            <a:off x="10881360" y="6309360"/>
+            <a:ext cx="914400" cy="274320"/>
+          </a:xfrm>
+          <a:prstGeom prst="rect">
+            <a:avLst/>
+          </a:prstGeom>
+          <a:noFill/>
+          <a:ln/>
+        </p:spPr>
+        <p:txBody>
+          <a:bodyPr wrap="square" lIns="0" tIns="0" rIns="0" bIns="0" rtlCol="0" anchor="ctr"/>
+          <a:lstStyle/>
+          <a:p>
+            <a:pPr algn="r" indent="0" marL="0">
+              <a:buNone/>
+            </a:pPr>
+            <a:r>
+              <a:rPr lang="en-US" sz="1100" dirty="0">
+                <a:solidFill>
+                  <a:srgbClr val="5C5E66"/>
+                </a:solidFill>
+                <a:latin typeface="Arial" pitchFamily="34" charset="0"/>
+                <a:ea typeface="Arial" pitchFamily="34" charset="-122"/>
+                <a:cs typeface="Arial" pitchFamily="34" charset="-120"/>
+              </a:rPr>
+              <a:t>7 / 10</a:t>
+            </a:r>
+            <a:endParaRPr lang="en-US" sz="1100" dirty="0"/>
+          </a:p>
+        </p:txBody>
+      </p:sp>
+    </p:spTree>
+  </p:cSld>
+  <p:clrMapOvr>
+    <a:masterClrMapping/>
+  </p:clrMapOvr>
+</p:sld>
+</file>
+
+<file path=ppt/slides/slide8.xml><?xml version="1.0" encoding="utf-8"?>
+<p:sld xmlns:a="http://schemas.openxmlformats.org/drawingml/2006/main" xmlns:r="http://schemas.openxmlformats.org/officeDocument/2006/relationships" xmlns:p="http://schemas.openxmlformats.org/presentationml/2006/main">
+  <p:cSld name="Slide 8">
+    <p:bg>
+      <p:bgPr>
+        <a:solidFill>
+          <a:srgbClr val="F7F7F8"/>
+        </a:solidFill>
+      </p:bgPr>
+    </p:bg>
+    <p:spTree>
+      <p:nvGrpSpPr>
+        <p:cNvPr id="1" name=""/>
+        <p:cNvGrpSpPr/>
+        <p:nvPr/>
+      </p:nvGrpSpPr>
+      <p:grpSpPr>
+        <a:xfrm>
+          <a:off x="0" y="0"/>
+          <a:ext cx="0" cy="0"/>
+          <a:chOff x="0" y="0"/>
+          <a:chExt cx="0" cy="0"/>
+        </a:xfrm>
+      </p:grpSpPr>
+      <p:sp>
+        <p:nvSpPr>
+          <p:cNvPr id="2" name="Shape 0"/>
+          <p:cNvSpPr/>
+          <p:nvPr/>
+        </p:nvSpPr>
+        <p:spPr>
+          <a:xfrm>
+            <a:off x="0" y="0"/>
+            <a:ext cx="109728" cy="6858000"/>
+          </a:xfrm>
+          <a:prstGeom prst="rect">
+            <a:avLst/>
+          </a:prstGeom>
+          <a:solidFill>
+            <a:srgbClr val="402FFF"/>
+          </a:solidFill>
+          <a:ln/>
+        </p:spPr>
+      </p:sp>
+      <p:sp>
+        <p:nvSpPr>
+          <p:cNvPr id="3" name="Shape 1"/>
+          <p:cNvSpPr/>
+          <p:nvPr/>
+        </p:nvSpPr>
+        <p:spPr>
+          <a:xfrm>
+            <a:off x="109728" y="0"/>
+            <a:ext cx="54864" cy="6858000"/>
+          </a:xfrm>
+          <a:prstGeom prst="rect">
+            <a:avLst/>
+          </a:prstGeom>
+          <a:solidFill>
+            <a:srgbClr val="EC1D35"/>
+          </a:solidFill>
+          <a:ln/>
+        </p:spPr>
+      </p:sp>
+      <p:sp>
+        <p:nvSpPr>
+          <p:cNvPr id="4" name="Text 2"/>
+          <p:cNvSpPr/>
+          <p:nvPr/>
+        </p:nvSpPr>
+        <p:spPr>
+          <a:xfrm>
+            <a:off x="502920" y="457200"/>
+            <a:ext cx="10972800" cy="274320"/>
+          </a:xfrm>
+          <a:prstGeom prst="rect">
+            <a:avLst/>
+          </a:prstGeom>
+          <a:noFill/>
+          <a:ln/>
+        </p:spPr>
+        <p:txBody>
+          <a:bodyPr wrap="square" lIns="0" tIns="0" rIns="0" bIns="0" rtlCol="0" anchor="ctr"/>
+          <a:lstStyle/>
+          <a:p>
+            <a:pPr indent="0" marL="0">
+              <a:buNone/>
+            </a:pPr>
+            <a:r>
+              <a:rPr lang="en-US" sz="1200" spc="200" kern="0" dirty="0">
+                <a:solidFill>
+                  <a:srgbClr val="402FFF"/>
+                </a:solidFill>
+                <a:latin typeface="Arial" pitchFamily="34" charset="0"/>
+                <a:ea typeface="Arial" pitchFamily="34" charset="-122"/>
+                <a:cs typeface="Arial" pitchFamily="34" charset="-120"/>
+              </a:rPr>
+              <a:t>ОСЬ ФСП</a:t>
+            </a:r>
+            <a:endParaRPr lang="en-US" sz="1200" dirty="0"/>
+          </a:p>
+        </p:txBody>
+      </p:sp>
+      <p:sp>
+        <p:nvSpPr>
+          <p:cNvPr id="5" name="Text 3"/>
+          <p:cNvSpPr/>
+          <p:nvPr/>
+        </p:nvSpPr>
+        <p:spPr>
+          <a:xfrm>
+            <a:off x="502920" y="777240"/>
+            <a:ext cx="11155680" cy="914400"/>
+          </a:xfrm>
+          <a:prstGeom prst="rect">
+            <a:avLst/>
+          </a:prstGeom>
+          <a:noFill/>
+          <a:ln/>
+        </p:spPr>
+        <p:txBody>
+          <a:bodyPr wrap="square" lIns="0" tIns="0" rIns="0" bIns="0" rtlCol="0" anchor="ctr"/>
+          <a:lstStyle/>
+          <a:p>
+            <a:pPr indent="0" marL="0">
+              <a:buNone/>
+            </a:pPr>
+            <a:r>
+              <a:rPr lang="en-US" sz="3000" b="1" dirty="0">
+                <a:solidFill>
+                  <a:srgbClr val="1B1C21"/>
+                </a:solidFill>
+                <a:latin typeface="Arial" pitchFamily="34" charset="0"/>
+                <a:ea typeface="Arial" pitchFamily="34" charset="-122"/>
+                <a:cs typeface="Arial" pitchFamily="34" charset="-120"/>
+              </a:rPr>
+              <a:t>Соревнования не поднимают грейд, а уточняют порядок</a:t>
+            </a:r>
+            <a:endParaRPr lang="en-US" sz="3000" dirty="0"/>
+          </a:p>
+        </p:txBody>
+      </p:sp>
+      <p:sp>
+        <p:nvSpPr>
+          <p:cNvPr id="6" name="Shape 4"/>
+          <p:cNvSpPr/>
+          <p:nvPr/>
+        </p:nvSpPr>
+        <p:spPr>
+          <a:xfrm>
+            <a:off x="502920" y="1920240"/>
+            <a:ext cx="3593592" cy="2926080"/>
+          </a:xfrm>
+          <a:prstGeom prst="roundRect">
+            <a:avLst>
+              <a:gd name="adj" fmla="val 2500"/>
+            </a:avLst>
+          </a:prstGeom>
+          <a:solidFill>
+            <a:srgbClr val="FFFFFF"/>
+          </a:solidFill>
+          <a:ln w="12700">
+            <a:solidFill>
+              <a:srgbClr val="FFFFFF"/>
+            </a:solidFill>
+            <a:prstDash val="solid"/>
+          </a:ln>
+        </p:spPr>
       </p:sp>
       <p:sp>
         <p:nvSpPr>
@@ -4388,8 +4818,8 @@
         </p:nvSpPr>
         <p:spPr>
           <a:xfrm>
-            <a:off x="502920" y="3154680"/>
-            <a:ext cx="10972800" cy="822960"/>
+            <a:off x="731520" y="2148840"/>
+            <a:ext cx="3154680" cy="822960"/>
           </a:xfrm>
           <a:prstGeom prst="rect">
             <a:avLst/>
@@ -4405,17 +4835,17 @@
               <a:buNone/>
             </a:pPr>
             <a:r>
-              <a:rPr lang="en-US" sz="1800" dirty="0">
-                <a:solidFill>
-                  <a:srgbClr val="EDEDED"/>
-                </a:solidFill>
-                <a:latin typeface="Arial" pitchFamily="34" charset="0"/>
-                <a:ea typeface="Arial" pitchFamily="34" charset="-122"/>
-                <a:cs typeface="Arial" pitchFamily="34" charset="-120"/>
-              </a:rPr>
-              <a:t>Порог по слабой теме не включён: точность падает с 78,5 % до 55,4 %, ложные сдачи — с 7,7 % до 3,0 %.</a:t>
-            </a:r>
-            <a:endParaRPr lang="en-US" sz="1800" dirty="0"/>
+              <a:rPr lang="en-US" sz="3000" b="1" dirty="0">
+                <a:solidFill>
+                  <a:srgbClr val="402FFF"/>
+                </a:solidFill>
+                <a:latin typeface="Arial" pitchFamily="34" charset="0"/>
+                <a:ea typeface="Arial" pitchFamily="34" charset="-122"/>
+                <a:cs typeface="Arial" pitchFamily="34" charset="-120"/>
+              </a:rPr>
+              <a:t>0,02</a:t>
+            </a:r>
+            <a:endParaRPr lang="en-US" sz="3000" dirty="0"/>
           </a:p>
         </p:txBody>
       </p:sp>
@@ -4427,8 +4857,74 @@
         </p:nvSpPr>
         <p:spPr>
           <a:xfrm>
-            <a:off x="502920" y="4114800"/>
-            <a:ext cx="10972800" cy="822960"/>
+            <a:off x="731520" y="3063240"/>
+            <a:ext cx="3154680" cy="1554480"/>
+          </a:xfrm>
+          <a:prstGeom prst="rect">
+            <a:avLst/>
+          </a:prstGeom>
+          <a:noFill/>
+          <a:ln/>
+        </p:spPr>
+        <p:txBody>
+          <a:bodyPr wrap="square" lIns="0" tIns="0" rIns="0" bIns="0" rtlCol="0" anchor="t"/>
+          <a:lstStyle/>
+          <a:p>
+            <a:pPr indent="0" marL="0">
+              <a:buNone/>
+            </a:pPr>
+            <a:r>
+              <a:rPr lang="en-US" sz="1600" dirty="0">
+                <a:solidFill>
+                  <a:srgbClr val="1B1C21"/>
+                </a:solidFill>
+                <a:latin typeface="Arial" pitchFamily="34" charset="0"/>
+                <a:ea typeface="Arial" pitchFamily="34" charset="-122"/>
+                <a:cs typeface="Arial" pitchFamily="34" charset="-120"/>
+              </a:rPr>
+              <a:t>нижняя граница оси после 20 участий в нижней половине протокола</a:t>
+            </a:r>
+            <a:endParaRPr lang="en-US" sz="1600" dirty="0"/>
+          </a:p>
+        </p:txBody>
+      </p:sp>
+      <p:sp>
+        <p:nvSpPr>
+          <p:cNvPr id="9" name="Shape 7"/>
+          <p:cNvSpPr/>
+          <p:nvPr/>
+        </p:nvSpPr>
+        <p:spPr>
+          <a:xfrm>
+            <a:off x="4279392" y="1920240"/>
+            <a:ext cx="3593592" cy="2926080"/>
+          </a:xfrm>
+          <a:prstGeom prst="roundRect">
+            <a:avLst>
+              <a:gd name="adj" fmla="val 2500"/>
+            </a:avLst>
+          </a:prstGeom>
+          <a:solidFill>
+            <a:srgbClr val="FFFFFF"/>
+          </a:solidFill>
+          <a:ln w="12700">
+            <a:solidFill>
+              <a:srgbClr val="FFFFFF"/>
+            </a:solidFill>
+            <a:prstDash val="solid"/>
+          </a:ln>
+        </p:spPr>
+      </p:sp>
+      <p:sp>
+        <p:nvSpPr>
+          <p:cNvPr id="10" name="Text 8"/>
+          <p:cNvSpPr/>
+          <p:nvPr/>
+        </p:nvSpPr>
+        <p:spPr>
+          <a:xfrm>
+            <a:off x="4507992" y="2148840"/>
+            <a:ext cx="3154680" cy="822960"/>
           </a:xfrm>
           <a:prstGeom prst="rect">
             <a:avLst/>
@@ -4444,19 +4940,498 @@
               <a:buNone/>
             </a:pPr>
             <a:r>
-              <a:rPr lang="en-US" sz="1800" dirty="0">
-                <a:solidFill>
-                  <a:srgbClr val="EDEDED"/>
-                </a:solidFill>
-                <a:latin typeface="Arial" pitchFamily="34" charset="0"/>
-                <a:ea typeface="Arial" pitchFamily="34" charset="-122"/>
-                <a:cs typeface="Arial" pitchFamily="34" charset="-120"/>
-              </a:rPr>
-              <a:t>Оценку различимости заданий в банк не пишем: ошибка растёт с 0,146 до 0,283.</a:t>
-            </a:r>
-            <a:endParaRPr lang="en-US" sz="1800" dirty="0"/>
-          </a:p>
-        </p:txBody>
+              <a:rPr lang="en-US" sz="3000" b="1" dirty="0">
+                <a:solidFill>
+                  <a:srgbClr val="402FFF"/>
+                </a:solidFill>
+                <a:latin typeface="Arial" pitchFamily="34" charset="0"/>
+                <a:ea typeface="Arial" pitchFamily="34" charset="-122"/>
+                <a:cs typeface="Arial" pitchFamily="34" charset="-120"/>
+              </a:rPr>
+              <a:t>0,52</a:t>
+            </a:r>
+            <a:endParaRPr lang="en-US" sz="3000" dirty="0"/>
+          </a:p>
+        </p:txBody>
+      </p:sp>
+      <p:sp>
+        <p:nvSpPr>
+          <p:cNvPr id="11" name="Text 9"/>
+          <p:cNvSpPr/>
+          <p:nvPr/>
+        </p:nvSpPr>
+        <p:spPr>
+          <a:xfrm>
+            <a:off x="4507992" y="3063240"/>
+            <a:ext cx="3154680" cy="1554480"/>
+          </a:xfrm>
+          <a:prstGeom prst="rect">
+            <a:avLst/>
+          </a:prstGeom>
+          <a:noFill/>
+          <a:ln/>
+        </p:spPr>
+        <p:txBody>
+          <a:bodyPr wrap="square" lIns="0" tIns="0" rIns="0" bIns="0" rtlCol="0" anchor="t"/>
+          <a:lstStyle/>
+          <a:p>
+            <a:pPr indent="0" marL="0">
+              <a:buNone/>
+            </a:pPr>
+            <a:r>
+              <a:rPr lang="en-US" sz="1600" dirty="0">
+                <a:solidFill>
+                  <a:srgbClr val="1B1C21"/>
+                </a:solidFill>
+                <a:latin typeface="Arial" pitchFamily="34" charset="0"/>
+                <a:ea typeface="Arial" pitchFamily="34" charset="-122"/>
+                <a:cs typeface="Arial" pitchFamily="34" charset="-120"/>
+              </a:rPr>
+              <a:t>нижняя граница после двух побед</a:t>
+            </a:r>
+            <a:endParaRPr lang="en-US" sz="1600" dirty="0"/>
+          </a:p>
+        </p:txBody>
+      </p:sp>
+      <p:sp>
+        <p:nvSpPr>
+          <p:cNvPr id="12" name="Shape 10"/>
+          <p:cNvSpPr/>
+          <p:nvPr/>
+        </p:nvSpPr>
+        <p:spPr>
+          <a:xfrm>
+            <a:off x="8055864" y="1920240"/>
+            <a:ext cx="3593592" cy="2926080"/>
+          </a:xfrm>
+          <a:prstGeom prst="roundRect">
+            <a:avLst>
+              <a:gd name="adj" fmla="val 2500"/>
+            </a:avLst>
+          </a:prstGeom>
+          <a:solidFill>
+            <a:srgbClr val="FFFFFF"/>
+          </a:solidFill>
+          <a:ln w="12700">
+            <a:solidFill>
+              <a:srgbClr val="FFFFFF"/>
+            </a:solidFill>
+            <a:prstDash val="solid"/>
+          </a:ln>
+        </p:spPr>
+      </p:sp>
+      <p:sp>
+        <p:nvSpPr>
+          <p:cNvPr id="13" name="Text 11"/>
+          <p:cNvSpPr/>
+          <p:nvPr/>
+        </p:nvSpPr>
+        <p:spPr>
+          <a:xfrm>
+            <a:off x="8284464" y="2148840"/>
+            <a:ext cx="3154680" cy="822960"/>
+          </a:xfrm>
+          <a:prstGeom prst="rect">
+            <a:avLst/>
+          </a:prstGeom>
+          <a:noFill/>
+          <a:ln/>
+        </p:spPr>
+        <p:txBody>
+          <a:bodyPr wrap="square" lIns="0" tIns="0" rIns="0" bIns="0" rtlCol="0" anchor="ctr"/>
+          <a:lstStyle/>
+          <a:p>
+            <a:pPr indent="0" marL="0">
+              <a:buNone/>
+            </a:pPr>
+            <a:r>
+              <a:rPr lang="en-US" sz="3000" b="1" dirty="0">
+                <a:solidFill>
+                  <a:srgbClr val="402FFF"/>
+                </a:solidFill>
+                <a:latin typeface="Arial" pitchFamily="34" charset="0"/>
+                <a:ea typeface="Arial" pitchFamily="34" charset="-122"/>
+                <a:cs typeface="Arial" pitchFamily="34" charset="-120"/>
+              </a:rPr>
+              <a:t>0</a:t>
+            </a:r>
+            <a:endParaRPr lang="en-US" sz="3000" dirty="0"/>
+          </a:p>
+        </p:txBody>
+      </p:sp>
+      <p:sp>
+        <p:nvSpPr>
+          <p:cNvPr id="14" name="Text 12"/>
+          <p:cNvSpPr/>
+          <p:nvPr/>
+        </p:nvSpPr>
+        <p:spPr>
+          <a:xfrm>
+            <a:off x="8284464" y="3063240"/>
+            <a:ext cx="3154680" cy="1554480"/>
+          </a:xfrm>
+          <a:prstGeom prst="rect">
+            <a:avLst/>
+          </a:prstGeom>
+          <a:noFill/>
+          <a:ln/>
+        </p:spPr>
+        <p:txBody>
+          <a:bodyPr wrap="square" lIns="0" tIns="0" rIns="0" bIns="0" rtlCol="0" anchor="t"/>
+          <a:lstStyle/>
+          <a:p>
+            <a:pPr indent="0" marL="0">
+              <a:buNone/>
+            </a:pPr>
+            <a:r>
+              <a:rPr lang="en-US" sz="1600" dirty="0">
+                <a:solidFill>
+                  <a:srgbClr val="1B1C21"/>
+                </a:solidFill>
+                <a:latin typeface="Arial" pitchFamily="34" charset="0"/>
+                <a:ea typeface="Arial" pitchFamily="34" charset="-122"/>
+                <a:cs typeface="Arial" pitchFamily="34" charset="-120"/>
+              </a:rPr>
+              <a:t>штрафа без истории ФСП: ось выпадает из оценки</a:t>
+            </a:r>
+            <a:endParaRPr lang="en-US" sz="1600" dirty="0"/>
+          </a:p>
+        </p:txBody>
+      </p:sp>
+      <p:sp>
+        <p:nvSpPr>
+          <p:cNvPr id="15" name="Text 13"/>
+          <p:cNvSpPr/>
+          <p:nvPr/>
+        </p:nvSpPr>
+        <p:spPr>
+          <a:xfrm>
+            <a:off x="502920" y="6263640"/>
+            <a:ext cx="10058400" cy="274320"/>
+          </a:xfrm>
+          <a:prstGeom prst="rect">
+            <a:avLst/>
+          </a:prstGeom>
+          <a:noFill/>
+          <a:ln/>
+        </p:spPr>
+        <p:txBody>
+          <a:bodyPr wrap="square" lIns="0" tIns="0" rIns="0" bIns="0" rtlCol="0" anchor="ctr"/>
+          <a:lstStyle/>
+          <a:p>
+            <a:pPr indent="0" marL="0">
+              <a:buNone/>
+            </a:pPr>
+            <a:r>
+              <a:rPr lang="en-US" sz="1100" dirty="0">
+                <a:solidFill>
+                  <a:srgbClr val="5C5E66"/>
+                </a:solidFill>
+                <a:latin typeface="Courier New" pitchFamily="34" charset="0"/>
+                <a:ea typeface="Courier New" pitchFamily="34" charset="-122"/>
+                <a:cs typeface="Courier New" pitchFamily="34" charset="-120"/>
+              </a:rPr>
+              <a:t>cd backend &amp;&amp; python -m pytest tests/unit/test_fsp_axis_example.py</a:t>
+            </a:r>
+            <a:endParaRPr lang="en-US" sz="1100" dirty="0"/>
+          </a:p>
+        </p:txBody>
+      </p:sp>
+      <p:sp>
+        <p:nvSpPr>
+          <p:cNvPr id="16" name="Text 14"/>
+          <p:cNvSpPr/>
+          <p:nvPr/>
+        </p:nvSpPr>
+        <p:spPr>
+          <a:xfrm>
+            <a:off x="10881360" y="6309360"/>
+            <a:ext cx="914400" cy="274320"/>
+          </a:xfrm>
+          <a:prstGeom prst="rect">
+            <a:avLst/>
+          </a:prstGeom>
+          <a:noFill/>
+          <a:ln/>
+        </p:spPr>
+        <p:txBody>
+          <a:bodyPr wrap="square" lIns="0" tIns="0" rIns="0" bIns="0" rtlCol="0" anchor="ctr"/>
+          <a:lstStyle/>
+          <a:p>
+            <a:pPr algn="r" indent="0" marL="0">
+              <a:buNone/>
+            </a:pPr>
+            <a:r>
+              <a:rPr lang="en-US" sz="1100" dirty="0">
+                <a:solidFill>
+                  <a:srgbClr val="5C5E66"/>
+                </a:solidFill>
+                <a:latin typeface="Arial" pitchFamily="34" charset="0"/>
+                <a:ea typeface="Arial" pitchFamily="34" charset="-122"/>
+                <a:cs typeface="Arial" pitchFamily="34" charset="-120"/>
+              </a:rPr>
+              <a:t>8 / 10</a:t>
+            </a:r>
+            <a:endParaRPr lang="en-US" sz="1100" dirty="0"/>
+          </a:p>
+        </p:txBody>
+      </p:sp>
+    </p:spTree>
+  </p:cSld>
+  <p:clrMapOvr>
+    <a:masterClrMapping/>
+  </p:clrMapOvr>
+</p:sld>
+</file>
+
+<file path=ppt/slides/slide9.xml><?xml version="1.0" encoding="utf-8"?>
+<p:sld xmlns:a="http://schemas.openxmlformats.org/drawingml/2006/main" xmlns:r="http://schemas.openxmlformats.org/officeDocument/2006/relationships" xmlns:p="http://schemas.openxmlformats.org/presentationml/2006/main">
+  <p:cSld name="Slide 9">
+    <p:bg>
+      <p:bgPr>
+        <a:solidFill>
+          <a:srgbClr val="F7F7F8"/>
+        </a:solidFill>
+      </p:bgPr>
+    </p:bg>
+    <p:spTree>
+      <p:nvGrpSpPr>
+        <p:cNvPr id="1" name=""/>
+        <p:cNvGrpSpPr/>
+        <p:nvPr/>
+      </p:nvGrpSpPr>
+      <p:grpSpPr>
+        <a:xfrm>
+          <a:off x="0" y="0"/>
+          <a:ext cx="0" cy="0"/>
+          <a:chOff x="0" y="0"/>
+          <a:chExt cx="0" cy="0"/>
+        </a:xfrm>
+      </p:grpSpPr>
+      <p:sp>
+        <p:nvSpPr>
+          <p:cNvPr id="2" name="Shape 0"/>
+          <p:cNvSpPr/>
+          <p:nvPr/>
+        </p:nvSpPr>
+        <p:spPr>
+          <a:xfrm>
+            <a:off x="0" y="0"/>
+            <a:ext cx="109728" cy="6858000"/>
+          </a:xfrm>
+          <a:prstGeom prst="rect">
+            <a:avLst/>
+          </a:prstGeom>
+          <a:solidFill>
+            <a:srgbClr val="402FFF"/>
+          </a:solidFill>
+          <a:ln/>
+        </p:spPr>
+      </p:sp>
+      <p:sp>
+        <p:nvSpPr>
+          <p:cNvPr id="3" name="Shape 1"/>
+          <p:cNvSpPr/>
+          <p:nvPr/>
+        </p:nvSpPr>
+        <p:spPr>
+          <a:xfrm>
+            <a:off x="109728" y="0"/>
+            <a:ext cx="54864" cy="6858000"/>
+          </a:xfrm>
+          <a:prstGeom prst="rect">
+            <a:avLst/>
+          </a:prstGeom>
+          <a:solidFill>
+            <a:srgbClr val="EC1D35"/>
+          </a:solidFill>
+          <a:ln/>
+        </p:spPr>
+      </p:sp>
+      <p:sp>
+        <p:nvSpPr>
+          <p:cNvPr id="4" name="Text 2"/>
+          <p:cNvSpPr/>
+          <p:nvPr/>
+        </p:nvSpPr>
+        <p:spPr>
+          <a:xfrm>
+            <a:off x="502920" y="457200"/>
+            <a:ext cx="10972800" cy="274320"/>
+          </a:xfrm>
+          <a:prstGeom prst="rect">
+            <a:avLst/>
+          </a:prstGeom>
+          <a:noFill/>
+          <a:ln/>
+        </p:spPr>
+        <p:txBody>
+          <a:bodyPr wrap="square" lIns="0" tIns="0" rIns="0" bIns="0" rtlCol="0" anchor="ctr"/>
+          <a:lstStyle/>
+          <a:p>
+            <a:pPr indent="0" marL="0">
+              <a:buNone/>
+            </a:pPr>
+            <a:r>
+              <a:rPr lang="en-US" sz="1200" spc="200" kern="0" dirty="0">
+                <a:solidFill>
+                  <a:srgbClr val="402FFF"/>
+                </a:solidFill>
+                <a:latin typeface="Arial" pitchFamily="34" charset="0"/>
+                <a:ea typeface="Arial" pitchFamily="34" charset="-122"/>
+                <a:cs typeface="Arial" pitchFamily="34" charset="-120"/>
+              </a:rPr>
+              <a:t>НАДЁЖНОСТЬ И ЗАКОН</a:t>
+            </a:r>
+            <a:endParaRPr lang="en-US" sz="1200" dirty="0"/>
+          </a:p>
+        </p:txBody>
+      </p:sp>
+      <p:sp>
+        <p:nvSpPr>
+          <p:cNvPr id="5" name="Text 3"/>
+          <p:cNvSpPr/>
+          <p:nvPr/>
+        </p:nvSpPr>
+        <p:spPr>
+          <a:xfrm>
+            <a:off x="502920" y="777240"/>
+            <a:ext cx="11155680" cy="914400"/>
+          </a:xfrm>
+          <a:prstGeom prst="rect">
+            <a:avLst/>
+          </a:prstGeom>
+          <a:noFill/>
+          <a:ln/>
+        </p:spPr>
+        <p:txBody>
+          <a:bodyPr wrap="square" lIns="0" tIns="0" rIns="0" bIns="0" rtlCol="0" anchor="ctr"/>
+          <a:lstStyle/>
+          <a:p>
+            <a:pPr indent="0" marL="0">
+              <a:buNone/>
+            </a:pPr>
+            <a:r>
+              <a:rPr lang="en-US" sz="3000" b="1" dirty="0">
+                <a:solidFill>
+                  <a:srgbClr val="1B1C21"/>
+                </a:solidFill>
+                <a:latin typeface="Arial" pitchFamily="34" charset="0"/>
+                <a:ea typeface="Arial" pitchFamily="34" charset="-122"/>
+                <a:cs typeface="Arial" pitchFamily="34" charset="-120"/>
+              </a:rPr>
+              <a:t>Проверяется в CI и на стенде</a:t>
+            </a:r>
+            <a:endParaRPr lang="en-US" sz="3000" dirty="0"/>
+          </a:p>
+        </p:txBody>
+      </p:sp>
+      <p:sp>
+        <p:nvSpPr>
+          <p:cNvPr id="6" name="Shape 4"/>
+          <p:cNvSpPr/>
+          <p:nvPr/>
+        </p:nvSpPr>
+        <p:spPr>
+          <a:xfrm>
+            <a:off x="502920" y="1737360"/>
+            <a:ext cx="11155680" cy="1234440"/>
+          </a:xfrm>
+          <a:prstGeom prst="roundRect">
+            <a:avLst>
+              <a:gd name="adj" fmla="val 5926"/>
+            </a:avLst>
+          </a:prstGeom>
+          <a:solidFill>
+            <a:srgbClr val="FFFFFF"/>
+          </a:solidFill>
+          <a:ln w="12700">
+            <a:solidFill>
+              <a:srgbClr val="FFFFFF"/>
+            </a:solidFill>
+            <a:prstDash val="solid"/>
+          </a:ln>
+        </p:spPr>
+      </p:sp>
+      <p:sp>
+        <p:nvSpPr>
+          <p:cNvPr id="7" name="Text 5"/>
+          <p:cNvSpPr/>
+          <p:nvPr/>
+        </p:nvSpPr>
+        <p:spPr>
+          <a:xfrm>
+            <a:off x="731520" y="1874520"/>
+            <a:ext cx="10698480" cy="960120"/>
+          </a:xfrm>
+          <a:prstGeom prst="rect">
+            <a:avLst/>
+          </a:prstGeom>
+          <a:noFill/>
+          <a:ln/>
+        </p:spPr>
+        <p:txBody>
+          <a:bodyPr wrap="square" lIns="0" tIns="0" rIns="0" bIns="0" rtlCol="0" anchor="ctr"/>
+          <a:lstStyle/>
+          <a:p>
+            <a:pPr indent="0" marL="0">
+              <a:buNone/>
+            </a:pPr>
+            <a:r>
+              <a:rPr lang="en-US" sz="1700" b="1" dirty="0">
+                <a:solidFill>
+                  <a:srgbClr val="1B1C21"/>
+                </a:solidFill>
+                <a:latin typeface="Arial" pitchFamily="34" charset="0"/>
+                <a:ea typeface="Arial" pitchFamily="34" charset="-122"/>
+                <a:cs typeface="Arial" pitchFamily="34" charset="-120"/>
+              </a:rPr>
+              <a:t>Данные. </a:t>
+            </a:r>
+            <a:pPr indent="0" marL="0">
+              <a:buNone/>
+            </a:pPr>
+            <a:r>
+              <a:rPr lang="en-US" sz="1700" dirty="0">
+                <a:solidFill>
+                  <a:srgbClr val="1B1C21"/>
+                </a:solidFill>
+                <a:latin typeface="Arial" pitchFamily="34" charset="0"/>
+                <a:ea typeface="Arial" pitchFamily="34" charset="-122"/>
+                <a:cs typeface="Arial" pitchFamily="34" charset="-120"/>
+              </a:rPr>
+              <a:t>Политики строк в PostgreSQL, обход всех маршрутов с чужим идентификатором: 0 ответов 2xx из 124 запросов (tests/smoke_api.py).</a:t>
+            </a:r>
+            <a:endParaRPr lang="en-US" sz="1700" dirty="0"/>
+          </a:p>
+        </p:txBody>
+      </p:sp>
+      <p:sp>
+        <p:nvSpPr>
+          <p:cNvPr id="8" name="Shape 6"/>
+          <p:cNvSpPr/>
+          <p:nvPr/>
+        </p:nvSpPr>
+        <p:spPr>
+          <a:xfrm>
+            <a:off x="502920" y="3200400"/>
+            <a:ext cx="11155680" cy="1234440"/>
+          </a:xfrm>
+          <a:prstGeom prst="roundRect">
+            <a:avLst>
+              <a:gd name="adj" fmla="val 5926"/>
+            </a:avLst>
+          </a:prstGeom>
+          <a:solidFill>
+            <a:srgbClr val="FFFFFF"/>
+          </a:solidFill>
+          <a:ln w="12700">
+            <a:solidFill>
+              <a:srgbClr val="FFFFFF"/>
+            </a:solidFill>
+            <a:prstDash val="solid"/>
+          </a:ln>
+        </p:spPr>
       </p:sp>
       <p:sp>
         <p:nvSpPr>
@@ -4466,8 +5441,8 @@
         </p:nvSpPr>
         <p:spPr>
           <a:xfrm>
-            <a:off x="502920" y="5074920"/>
-            <a:ext cx="10972800" cy="822960"/>
+            <a:off x="731520" y="3337560"/>
+            <a:ext cx="10698480" cy="960120"/>
           </a:xfrm>
           <a:prstGeom prst="rect">
             <a:avLst/>
@@ -4483,17 +5458,150 @@
               <a:buNone/>
             </a:pPr>
             <a:r>
-              <a:rPr lang="en-US" sz="1800" dirty="0">
-                <a:solidFill>
-                  <a:srgbClr val="EDEDED"/>
-                </a:solidFill>
-                <a:latin typeface="Arial" pitchFamily="34" charset="0"/>
-                <a:ea typeface="Arial" pitchFamily="34" charset="-122"/>
-                <a:cs typeface="Arial" pitchFamily="34" charset="-120"/>
-              </a:rPr>
-              <a:t>Исходы найма из ATS, чтобы калибровать подбор на реальных решениях людей.</a:t>
-            </a:r>
-            <a:endParaRPr lang="en-US" sz="1800" dirty="0"/>
+              <a:rPr lang="en-US" sz="1700" b="1" dirty="0">
+                <a:solidFill>
+                  <a:srgbClr val="1B1C21"/>
+                </a:solidFill>
+                <a:latin typeface="Arial" pitchFamily="34" charset="0"/>
+                <a:ea typeface="Arial" pitchFamily="34" charset="-122"/>
+                <a:cs typeface="Arial" pitchFamily="34" charset="-120"/>
+              </a:rPr>
+              <a:t>152-ФЗ. </a:t>
+            </a:r>
+            <a:pPr indent="0" marL="0">
+              <a:buNone/>
+            </a:pPr>
+            <a:r>
+              <a:rPr lang="en-US" sz="1700" dirty="0">
+                <a:solidFill>
+                  <a:srgbClr val="1B1C21"/>
+                </a:solidFill>
+                <a:latin typeface="Arial" pitchFamily="34" charset="0"/>
+                <a:ea typeface="Arial" pitchFamily="34" charset="-122"/>
+                <a:cs typeface="Arial" pitchFamily="34" charset="-120"/>
+              </a:rPr>
+              <a:t>Отдельные согласия с версией текста. Регистрация с 15 лет, для 15–17 — согласие представителя по ссылке. В GigaChat — только обезличенный текст и только по флагу.</a:t>
+            </a:r>
+            <a:endParaRPr lang="en-US" sz="1700" dirty="0"/>
+          </a:p>
+        </p:txBody>
+      </p:sp>
+      <p:sp>
+        <p:nvSpPr>
+          <p:cNvPr id="10" name="Shape 8"/>
+          <p:cNvSpPr/>
+          <p:nvPr/>
+        </p:nvSpPr>
+        <p:spPr>
+          <a:xfrm>
+            <a:off x="502920" y="4663440"/>
+            <a:ext cx="11155680" cy="1234440"/>
+          </a:xfrm>
+          <a:prstGeom prst="roundRect">
+            <a:avLst>
+              <a:gd name="adj" fmla="val 5926"/>
+            </a:avLst>
+          </a:prstGeom>
+          <a:solidFill>
+            <a:srgbClr val="FFFFFF"/>
+          </a:solidFill>
+          <a:ln w="12700">
+            <a:solidFill>
+              <a:srgbClr val="FFFFFF"/>
+            </a:solidFill>
+            <a:prstDash val="solid"/>
+          </a:ln>
+        </p:spPr>
+      </p:sp>
+      <p:sp>
+        <p:nvSpPr>
+          <p:cNvPr id="11" name="Text 9"/>
+          <p:cNvSpPr/>
+          <p:nvPr/>
+        </p:nvSpPr>
+        <p:spPr>
+          <a:xfrm>
+            <a:off x="731520" y="4800600"/>
+            <a:ext cx="10698480" cy="960120"/>
+          </a:xfrm>
+          <a:prstGeom prst="rect">
+            <a:avLst/>
+          </a:prstGeom>
+          <a:noFill/>
+          <a:ln/>
+        </p:spPr>
+        <p:txBody>
+          <a:bodyPr wrap="square" lIns="0" tIns="0" rIns="0" bIns="0" rtlCol="0" anchor="ctr"/>
+          <a:lstStyle/>
+          <a:p>
+            <a:pPr indent="0" marL="0">
+              <a:buNone/>
+            </a:pPr>
+            <a:r>
+              <a:rPr lang="en-US" sz="1700" b="1" dirty="0">
+                <a:solidFill>
+                  <a:srgbClr val="1B1C21"/>
+                </a:solidFill>
+                <a:latin typeface="Arial" pitchFamily="34" charset="0"/>
+                <a:ea typeface="Arial" pitchFamily="34" charset="-122"/>
+                <a:cs typeface="Arial" pitchFamily="34" charset="-120"/>
+              </a:rPr>
+              <a:t>Сборка. </a:t>
+            </a:r>
+            <a:pPr indent="0" marL="0">
+              <a:buNone/>
+            </a:pPr>
+            <a:r>
+              <a:rPr lang="en-US" sz="1700" dirty="0">
+                <a:solidFill>
+                  <a:srgbClr val="1B1C21"/>
+                </a:solidFill>
+                <a:latin typeface="Arial" pitchFamily="34" charset="0"/>
+                <a:ea typeface="Arial" pitchFamily="34" charset="-122"/>
+                <a:cs typeface="Arial" pitchFamily="34" charset="-120"/>
+              </a:rPr>
+              <a:t>633 юнит-теста, проверка теста и подбора с порогами, сквозной сценарий в браузере на чистом стенде.</a:t>
+            </a:r>
+            <a:endParaRPr lang="en-US" sz="1700" dirty="0"/>
+          </a:p>
+        </p:txBody>
+      </p:sp>
+      <p:sp>
+        <p:nvSpPr>
+          <p:cNvPr id="12" name="Text 10"/>
+          <p:cNvSpPr/>
+          <p:nvPr/>
+        </p:nvSpPr>
+        <p:spPr>
+          <a:xfrm>
+            <a:off x="10881360" y="6309360"/>
+            <a:ext cx="914400" cy="274320"/>
+          </a:xfrm>
+          <a:prstGeom prst="rect">
+            <a:avLst/>
+          </a:prstGeom>
+          <a:noFill/>
+          <a:ln/>
+        </p:spPr>
+        <p:txBody>
+          <a:bodyPr wrap="square" lIns="0" tIns="0" rIns="0" bIns="0" rtlCol="0" anchor="ctr"/>
+          <a:lstStyle/>
+          <a:p>
+            <a:pPr algn="r" indent="0" marL="0">
+              <a:buNone/>
+            </a:pPr>
+            <a:r>
+              <a:rPr lang="en-US" sz="1100" dirty="0">
+                <a:solidFill>
+                  <a:srgbClr val="5C5E66"/>
+                </a:solidFill>
+                <a:latin typeface="Arial" pitchFamily="34" charset="0"/>
+                <a:ea typeface="Arial" pitchFamily="34" charset="-122"/>
+                <a:cs typeface="Arial" pitchFamily="34" charset="-120"/>
+              </a:rPr>
+              <a:t>9 / 10</a:t>
+            </a:r>
+            <a:endParaRPr lang="en-US" sz="1100" dirty="0"/>
           </a:p>
         </p:txBody>
       </p:sp>

--- a/docs/pitch.pptx
+++ b/docs/pitch.pptx
@@ -2766,7 +2766,7 @@
       </p:sp>
       <p:pic>
         <p:nvPicPr>
-          <p:cNvPr id="6" name="Image 0" descr="/home/claude/fsp-talent/docs/assets/pitch-trial.png">    </p:cNvPr>
+          <p:cNvPr id="6" name="Image 0" descr="C:\Talent\docs\assets\pitch-trial.png">    </p:cNvPr>
           <p:cNvPicPr>
             <a:picLocks noChangeAspect="1"/>
           </p:cNvPicPr>
@@ -3064,7 +3064,7 @@
       </p:sp>
       <p:pic>
         <p:nvPicPr>
-          <p:cNvPr id="6" name="Image 0" descr="/home/claude/fsp-talent/docs/assets/pitch-offers.png">    </p:cNvPr>
+          <p:cNvPr id="6" name="Image 0" descr="C:\Talent\docs\assets\pitch-offers.png">    </p:cNvPr>
           <p:cNvPicPr>
             <a:picLocks noChangeAspect="1"/>
           </p:cNvPicPr>
@@ -4448,7 +4448,7 @@
       </p:sp>
       <p:pic>
         <p:nvPicPr>
-          <p:cNvPr id="6" name="Image 0" descr="/home/claude/fsp-talent/docs/assets/pitch-card.png">    </p:cNvPr>
+          <p:cNvPr id="6" name="Image 0" descr="C:\Talent\docs\assets\pitch-card.png">    </p:cNvPr>
           <p:cNvPicPr>
             <a:picLocks noChangeAspect="1"/>
           </p:cNvPicPr>
@@ -5560,7 +5560,7 @@
                 <a:ea typeface="Arial" pitchFamily="34" charset="-122"/>
                 <a:cs typeface="Arial" pitchFamily="34" charset="-120"/>
               </a:rPr>
-              <a:t>633 юнит-теста, проверка теста и подбора с порогами, сквозной сценарий в браузере на чистом стенде.</a:t>
+              <a:t>634 юнит-теста, проверка теста и подбора с порогами, сквозной сценарий в браузере на чистом стенде.</a:t>
             </a:r>
             <a:endParaRPr lang="en-US" sz="1700" dirty="0"/>
           </a:p>

--- a/docs/pitch.pptx
+++ b/docs/pitch.pptx
@@ -2766,7 +2766,7 @@
       </p:sp>
       <p:pic>
         <p:nvPicPr>
-          <p:cNvPr id="6" name="Image 0" descr="C:\Talent\docs\assets\pitch-trial.png">    </p:cNvPr>
+          <p:cNvPr id="6" name="Image 0" descr="Пробный тест: шкала уверенности и нейтральный итог">    </p:cNvPr>
           <p:cNvPicPr>
             <a:picLocks noChangeAspect="1"/>
           </p:cNvPicPr>
@@ -3064,7 +3064,7 @@
       </p:sp>
       <p:pic>
         <p:nvPicPr>
-          <p:cNvPr id="6" name="Image 0" descr="C:\Talent\docs\assets\pitch-offers.png">    </p:cNvPr>
+          <p:cNvPr id="6" name="Image 0" descr="Приглашение с вилкой: имя и контакты открываются после согласия">    </p:cNvPr>
           <p:cNvPicPr>
             <a:picLocks noChangeAspect="1"/>
           </p:cNvPicPr>
@@ -4448,7 +4448,7 @@
       </p:sp>
       <p:pic>
         <p:nvPicPr>
-          <p:cNvPr id="6" name="Image 0" descr="C:\Talent\docs\assets\pitch-card.png">    </p:cNvPr>
+          <p:cNvPr id="6" name="Image 0" descr="Карточка подборки: вклад теста и результатов ФСП в баллах">    </p:cNvPr>
           <p:cNvPicPr>
             <a:picLocks noChangeAspect="1"/>
           </p:cNvPicPr>

--- a/docs/pitch.pptx
+++ b/docs/pitch.pptx
@@ -4549,7 +4549,7 @@
                 <a:ea typeface="Arial" pitchFamily="34" charset="-122"/>
                 <a:cs typeface="Arial" pitchFamily="34" charset="-120"/>
               </a:rPr>
-              <a:t>Завышенный грейд в первой десятке: 19,9 % против 28,1 %.</a:t>
+              <a:t>Завышенный грейд в первой десятке: 19,8 % против 28,1 %.</a:t>
             </a:r>
             <a:endParaRPr lang="en-US" sz="1600" dirty="0"/>
           </a:p>
@@ -5560,7 +5560,7 @@
                 <a:ea typeface="Arial" pitchFamily="34" charset="-122"/>
                 <a:cs typeface="Arial" pitchFamily="34" charset="-120"/>
               </a:rPr>
-              <a:t>634 юнит-теста, проверка теста и подбора с порогами, сквозной сценарий в браузере на чистом стенде.</a:t>
+              <a:t>655 юнит-тестов, проверка теста и подбора с порогами, сквозной сценарий в браузере на чистом стенде.</a:t>
             </a:r>
             <a:endParaRPr lang="en-US" sz="1700" dirty="0"/>
           </a:p>

--- a/docs/pitch.pptx
+++ b/docs/pitch.pptx
@@ -4173,7 +4173,7 @@
                 <a:ea typeface="Arial" pitchFamily="34" charset="-122"/>
                 <a:cs typeface="Arial" pitchFamily="34" charset="-120"/>
               </a:rPr>
-              <a:t>6,4 · 70,5 · 99,2 %</a:t>
+              <a:t>65,1 %</a:t>
             </a:r>
             <a:endParaRPr lang="en-US" sz="3000" dirty="0"/>
           </a:p>
@@ -4212,7 +4212,7 @@
                 <a:ea typeface="Arial" pitchFamily="34" charset="-122"/>
                 <a:cs typeface="Arial" pitchFamily="34" charset="-120"/>
               </a:rPr>
-              <a:t>сдают тест на middle настоящие junior, middle и senior</a:t>
+              <a:t>точный итоговый грейд после пути по правилам продукта; в пределах ступени 98,6 %</a:t>
             </a:r>
             <a:endParaRPr lang="en-US" sz="1600" dirty="0"/>
           </a:p>
@@ -5560,7 +5560,7 @@
                 <a:ea typeface="Arial" pitchFamily="34" charset="-122"/>
                 <a:cs typeface="Arial" pitchFamily="34" charset="-120"/>
               </a:rPr>
-              <a:t>655 юнит-тестов, проверка теста и подбора с порогами, сквозной сценарий в браузере на чистом стенде.</a:t>
+              <a:t>657 юнит-тестов, проверка теста и подбора с порогами, сквозной сценарий в браузере на чистом стенде.</a:t>
             </a:r>
             <a:endParaRPr lang="en-US" sz="1700" dirty="0"/>
           </a:p>

--- a/docs/pitch.pptx
+++ b/docs/pitch.pptx
@@ -2867,7 +2867,28 @@
                 <a:ea typeface="Arial" pitchFamily="34" charset="-122"/>
                 <a:cs typeface="Arial" pitchFamily="34" charset="-120"/>
               </a:rPr>
-              <a:t>Аккаунты jury1…jury10 проходят полный тест без пауз.</a:t>
+              <a:t>Проверить самим: jury1…jury10, пароль demo12345.</a:t>
+            </a:r>
+            <a:endParaRPr lang="en-US" sz="1600" dirty="0"/>
+          </a:p>
+          <a:p>
+            <a:pPr marL="342900" indent="-342900">
+              <a:spcAft>
+                <a:spcPts val="1000"/>
+              </a:spcAft>
+              <a:buSzPct val="100000"/>
+              <a:buChar char="•"/>
+            </a:pPr>
+            <a:r>
+              <a:rPr lang="en-US" sz="1600" dirty="0">
+                <a:solidFill>
+                  <a:srgbClr val="1B1C21"/>
+                </a:solidFill>
+                <a:latin typeface="Arial" pitchFamily="34" charset="0"/>
+                <a:ea typeface="Arial" pitchFamily="34" charset="-122"/>
+                <a:cs typeface="Arial" pitchFamily="34" charset="-120"/>
+              </a:rPr>
+              <a:t>Репозиторий: github.com/KonkovDV/fsp-talent</a:t>
             </a:r>
             <a:endParaRPr lang="en-US" sz="1600" dirty="0"/>
           </a:p>
@@ -3630,7 +3651,7 @@
                 <a:ea typeface="Arial" pitchFamily="34" charset="-122"/>
                 <a:cs typeface="Arial" pitchFamily="34" charset="-120"/>
               </a:rPr>
-              <a:t>18,2 → 13,2 %</a:t>
+              <a:t>0,0 %</a:t>
             </a:r>
             <a:endParaRPr lang="en-US" sz="3000" dirty="0"/>
           </a:p>
@@ -3669,7 +3690,7 @@
                 <a:ea typeface="Arial" pitchFamily="34" charset="-122"/>
                 <a:cs typeface="Arial" pitchFamily="34" charset="-120"/>
               </a:rPr>
-              <a:t>ложные сдачи при утечке у 30 %: карантин ключей на тех же людях</a:t>
+              <a:t>сдают middle после 20 чужих сессий; честная сдача тех же людей 6,2 %</a:t>
             </a:r>
             <a:endParaRPr lang="en-US" sz="1600" dirty="0"/>
           </a:p>
@@ -4068,7 +4089,7 @@
                 <a:ea typeface="Arial" pitchFamily="34" charset="-122"/>
                 <a:cs typeface="Arial" pitchFamily="34" charset="-120"/>
               </a:rPr>
-              <a:t>0,47</a:t>
+              <a:t>84 %</a:t>
             </a:r>
             <a:endParaRPr lang="en-US" sz="3000" dirty="0"/>
           </a:p>
@@ -4107,7 +4128,7 @@
                 <a:ea typeface="Arial" pitchFamily="34" charset="-122"/>
                 <a:cs typeface="Arial" pitchFamily="34" charset="-120"/>
               </a:rPr>
-              <a:t>каппа Коэна повторной сдачи с новыми заданиями</a:t>
+              <a:t>то же решение повторного теста вдали от порога; корреляция θ 0,86, взвешенная каппа 0,58. Руднер 83,5 % и 79,0 %</a:t>
             </a:r>
             <a:endParaRPr lang="en-US" sz="1600" dirty="0"/>
           </a:p>
@@ -4507,7 +4528,7 @@
                 <a:ea typeface="Arial" pitchFamily="34" charset="-122"/>
                 <a:cs typeface="Arial" pitchFamily="34" charset="-120"/>
               </a:rPr>
-              <a:t>Внутри категории выше тот, у кого сильнее тест и ФСП: вклад виден в баллах.</a:t>
+              <a:t>В первой десятке людей с завышенным грейдом: 19,8 % против 28,1 % у сортировки по резюме.</a:t>
             </a:r>
             <a:endParaRPr lang="en-US" sz="1600" dirty="0"/>
           </a:p>
@@ -4528,7 +4549,7 @@
                 <a:ea typeface="Arial" pitchFamily="34" charset="-122"/>
                 <a:cs typeface="Arial" pitchFamily="34" charset="-120"/>
               </a:rPr>
-              <a:t>Спирмен порядка со скрытой силой: 0,240 против 0,011 у сортировки по резюме.</a:t>
+              <a:t>Спирмен 0,240 против 0,011: насколько порядок совпадает с настоящей силой.</a:t>
             </a:r>
             <a:endParaRPr lang="en-US" sz="1600" dirty="0"/>
           </a:p>
@@ -4549,7 +4570,7 @@
                 <a:ea typeface="Arial" pitchFamily="34" charset="-122"/>
                 <a:cs typeface="Arial" pitchFamily="34" charset="-120"/>
               </a:rPr>
-              <a:t>Завышенный грейд в первой десятке: 19,8 % против 28,1 %.</a:t>
+              <a:t>nDCG@10 0,652 против 0,620. Ярус в порядок не вошёл: он теряет это совпадение.</a:t>
             </a:r>
             <a:endParaRPr lang="en-US" sz="1600" dirty="0"/>
           </a:p>
@@ -4843,7 +4864,7 @@
                 <a:ea typeface="Arial" pitchFamily="34" charset="-122"/>
                 <a:cs typeface="Arial" pitchFamily="34" charset="-120"/>
               </a:rPr>
-              <a:t>0,02</a:t>
+              <a:t>0,707</a:t>
             </a:r>
             <a:endParaRPr lang="en-US" sz="3000" dirty="0"/>
           </a:p>
@@ -4882,7 +4903,7 @@
                 <a:ea typeface="Arial" pitchFamily="34" charset="-122"/>
                 <a:cs typeface="Arial" pitchFamily="34" charset="-120"/>
               </a:rPr>
-              <a:t>нижняя граница оси после 20 участий в нижней половине протокола</a:t>
+              <a:t>Спирмен нижней границы оси со скрытой силой</a:t>
             </a:r>
             <a:endParaRPr lang="en-US" sz="1600" dirty="0"/>
           </a:p>
@@ -4948,7 +4969,7 @@
                 <a:ea typeface="Arial" pitchFamily="34" charset="-122"/>
                 <a:cs typeface="Arial" pitchFamily="34" charset="-120"/>
               </a:rPr>
-              <a:t>0,52</a:t>
+              <a:t>0,127</a:t>
             </a:r>
             <a:endParaRPr lang="en-US" sz="3000" dirty="0"/>
           </a:p>
@@ -4987,7 +5008,7 @@
                 <a:ea typeface="Arial" pitchFamily="34" charset="-122"/>
                 <a:cs typeface="Arial" pitchFamily="34" charset="-120"/>
               </a:rPr>
-              <a:t>нижняя граница после двух побед</a:t>
+              <a:t>Спирмен числа участий: нижняя граница угадывает силу лучше</a:t>
             </a:r>
             <a:endParaRPr lang="en-US" sz="1600" dirty="0"/>
           </a:p>
@@ -5053,7 +5074,7 @@
                 <a:ea typeface="Arial" pitchFamily="34" charset="-122"/>
                 <a:cs typeface="Arial" pitchFamily="34" charset="-120"/>
               </a:rPr>
-              <a:t>0</a:t>
+              <a:t>0,01 → 0,54</a:t>
             </a:r>
             <a:endParaRPr lang="en-US" sz="3000" dirty="0"/>
           </a:p>
@@ -5092,7 +5113,7 @@
                 <a:ea typeface="Arial" pitchFamily="34" charset="-122"/>
                 <a:cs typeface="Arial" pitchFamily="34" charset="-120"/>
               </a:rPr>
-              <a:t>штрафа без истории ФСП: ось выпадает из оценки</a:t>
+              <a:t>нижняя граница фермы из 40 онлайн-участий и двух побед</a:t>
             </a:r>
             <a:endParaRPr lang="en-US" sz="1600" dirty="0"/>
           </a:p>
@@ -5131,7 +5152,7 @@
                 <a:ea typeface="Courier New" pitchFamily="34" charset="-122"/>
                 <a:cs typeface="Courier New" pitchFamily="34" charset="-120"/>
               </a:rPr>
-              <a:t>cd backend &amp;&amp; python -m pytest tests/unit/test_fsp_axis_example.py</a:t>
+              <a:t>cd backend &amp;&amp; python -m app.validation.fsp_axis --seeds 3</a:t>
             </a:r>
             <a:endParaRPr lang="en-US" sz="1100" dirty="0"/>
           </a:p>
@@ -5560,7 +5581,7 @@
                 <a:ea typeface="Arial" pitchFamily="34" charset="-122"/>
                 <a:cs typeface="Arial" pitchFamily="34" charset="-120"/>
               </a:rPr>
-              <a:t>657 юнит-тестов, проверка теста и подбора с порогами, сквозной сценарий в браузере на чистом стенде.</a:t>
+              <a:t>671 юнит-тест, покрытие приложения 66,69 %, сервисы 71 % и API 41 %, четыре сквозных сценария в браузере.</a:t>
             </a:r>
             <a:endParaRPr lang="en-US" sz="1700" dirty="0"/>
           </a:p>

--- a/docs/pitch.pptx
+++ b/docs/pitch.pptx
@@ -5581,7 +5581,7 @@
                 <a:ea typeface="Arial" pitchFamily="34" charset="-122"/>
                 <a:cs typeface="Arial" pitchFamily="34" charset="-120"/>
               </a:rPr>
-              <a:t>671 юнит-тест, покрытие приложения 66,69 %, сервисы 71 % и API 41 %, четыре сквозных сценария в браузере.</a:t>
+              <a:t>679 юнит-тестов, покрытие приложения 66,40 %, сервисы 71 % и API 40 %, четыре сквозных сценария в браузере.</a:t>
             </a:r>
             <a:endParaRPr lang="en-US" sz="1700" dirty="0"/>
           </a:p>

--- a/docs/pitch.pptx
+++ b/docs/pitch.pptx
@@ -2059,7 +2059,7 @@
                 <a:ea typeface="Arial" pitchFamily="34" charset="-122"/>
                 <a:cs typeface="Arial" pitchFamily="34" charset="-120"/>
               </a:rPr>
-              <a:t>Подключить ФСП ID и реестр протоколов по готовому контракту OIDC.</a:t>
+              <a:t>Проверьте сами: jury1…jury10, пароль demo12345.</a:t>
             </a:r>
             <a:endParaRPr lang="en-US" sz="2000" dirty="0"/>
           </a:p>
@@ -2080,7 +2080,7 @@
                 <a:ea typeface="Arial" pitchFamily="34" charset="-122"/>
                 <a:cs typeface="Arial" pitchFamily="34" charset="-120"/>
               </a:rPr>
-              <a:t>Откалибровать веса подбора на исходах приглашений и найма.</a:t>
+              <a:t>Подключить ФСП ID и реестр протоколов по готовому контракту OIDC.</a:t>
             </a:r>
             <a:endParaRPr lang="en-US" sz="2000" dirty="0"/>
           </a:p>
@@ -2101,7 +2101,7 @@
                 <a:ea typeface="Arial" pitchFamily="34" charset="-122"/>
                 <a:cs typeface="Arial" pitchFamily="34" charset="-120"/>
               </a:rPr>
-              <a:t>Открыть стенд для команд-участников ФСП и работодателей-партнёров.</a:t>
+              <a:t>Откалибровать веса подбора на исходах приглашений и найма.</a:t>
             </a:r>
             <a:endParaRPr lang="en-US" sz="2000" dirty="0"/>
           </a:p>
@@ -4528,7 +4528,7 @@
                 <a:ea typeface="Arial" pitchFamily="34" charset="-122"/>
                 <a:cs typeface="Arial" pitchFamily="34" charset="-120"/>
               </a:rPr>
-              <a:t>В первой десятке людей с завышенным грейдом: 19,8 % против 28,1 % у сортировки по резюме.</a:t>
+              <a:t>P@10 зерна 2026: 0,653 против 0,565 у сортировки по резюме — доля подходящих в первой десятке.</a:t>
             </a:r>
             <a:endParaRPr lang="en-US" sz="1600" dirty="0"/>
           </a:p>
@@ -4549,7 +4549,7 @@
                 <a:ea typeface="Arial" pitchFamily="34" charset="-122"/>
                 <a:cs typeface="Arial" pitchFamily="34" charset="-120"/>
               </a:rPr>
-              <a:t>Спирмен 0,240 против 0,011: насколько порядок совпадает с настоящей силой.</a:t>
+              <a:t>Спирмен 0,240 против 0,011 по трём зёрнам: насколько порядок совпадает с настоящей силой.</a:t>
             </a:r>
             <a:endParaRPr lang="en-US" sz="1600" dirty="0"/>
           </a:p>
@@ -4570,7 +4570,7 @@
                 <a:ea typeface="Arial" pitchFamily="34" charset="-122"/>
                 <a:cs typeface="Arial" pitchFamily="34" charset="-120"/>
               </a:rPr>
-              <a:t>nDCG@10 0,652 против 0,620. Ярус в порядок не вошёл: он теряет это совпадение.</a:t>
+              <a:t>nDCG@10 0,652 против 0,620. В первой десятке завышенный грейд 19,8 % против 28,1 %. Ярус в порядок не вошёл.</a:t>
             </a:r>
             <a:endParaRPr lang="en-US" sz="1600" dirty="0"/>
           </a:p>
@@ -4798,7 +4798,7 @@
                 <a:ea typeface="Arial" pitchFamily="34" charset="-122"/>
                 <a:cs typeface="Arial" pitchFamily="34" charset="-120"/>
               </a:rPr>
-              <a:t>Соревнования не поднимают грейд, а уточняют порядок</a:t>
+              <a:t>Соревнования не поднимают грейд, статус не весит</a:t>
             </a:r>
             <a:endParaRPr lang="en-US" sz="3000" dirty="0"/>
           </a:p>
@@ -4903,7 +4903,7 @@
                 <a:ea typeface="Arial" pitchFamily="34" charset="-122"/>
                 <a:cs typeface="Arial" pitchFamily="34" charset="-120"/>
               </a:rPr>
-              <a:t>Спирмен нижней границы оси со скрытой силой</a:t>
+              <a:t>Спирмен нижней границы оси со скрытой силой. Разряд — справка из реестра (ЕВСК, приказ № 299 от 09.04.2026), не расчёт по месту.</a:t>
             </a:r>
             <a:endParaRPr lang="en-US" sz="1600" dirty="0"/>
           </a:p>
@@ -5581,7 +5581,7 @@
                 <a:ea typeface="Arial" pitchFamily="34" charset="-122"/>
                 <a:cs typeface="Arial" pitchFamily="34" charset="-120"/>
               </a:rPr>
-              <a:t>671 юнит-тест, покрытие приложения 66,69 %, сервисы 71 % и API 41 %, четыре сквозных сценария в браузере.</a:t>
+              <a:t>679 юнит-тестов, покрытие приложения 66,69 %, сервисы 71 % и API 41 %, четыре сквозных сценария в браузере. Демо-стенд сбрасывается каждую ночь.</a:t>
             </a:r>
             <a:endParaRPr lang="en-US" sz="1700" dirty="0"/>
           </a:p>

--- a/docs/pitch.pptx
+++ b/docs/pitch.pptx
@@ -5581,7 +5581,7 @@
                 <a:ea typeface="Arial" pitchFamily="34" charset="-122"/>
                 <a:cs typeface="Arial" pitchFamily="34" charset="-120"/>
               </a:rPr>
-              <a:t>671 юнит-тест, покрытие приложения 66,69 %, сервисы 71 % и API 41 %, четыре сквозных сценария в браузере.</a:t>
+              <a:t>679 юнит-тестов, покрытие приложения 66,41 %, сервисы 71 % и API 40 %, четыре сквозных сценария в браузере.</a:t>
             </a:r>
             <a:endParaRPr lang="en-US" sz="1700" dirty="0"/>
           </a:p>

--- a/docs/pitch.pptx
+++ b/docs/pitch.pptx
@@ -5581,7 +5581,7 @@
                 <a:ea typeface="Arial" pitchFamily="34" charset="-122"/>
                 <a:cs typeface="Arial" pitchFamily="34" charset="-120"/>
               </a:rPr>
-              <a:t>679 юнит-тестов, покрытие приложения 66,41 %, сервисы 71 % и API 40 %, четыре сквозных сценария в браузере.</a:t>
+              <a:t>679 юнит-тестов, покрытие приложения 66,4 %, сервисы 71 % и API 40 %, четыре сквозных сценария в браузере.</a:t>
             </a:r>
             <a:endParaRPr lang="en-US" sz="1700" dirty="0"/>
           </a:p>

--- a/docs/pitch.pptx
+++ b/docs/pitch.pptx
@@ -5581,7 +5581,7 @@
                 <a:ea typeface="Arial" pitchFamily="34" charset="-122"/>
                 <a:cs typeface="Arial" pitchFamily="34" charset="-120"/>
               </a:rPr>
-              <a:t>679 юнит-тестов, покрытие приложения 66,40 %, сервисы 71 % и API 40 %, четыре сквозных сценария в браузере.</a:t>
+              <a:t>679 юнит-тестов, покрытие приложения 66,4 %, сервисы 71 % и API 40 %, четыре сквозных сценария в браузере.</a:t>
             </a:r>
             <a:endParaRPr lang="en-US" sz="1700" dirty="0"/>
           </a:p>

--- a/docs/pitch.pptx
+++ b/docs/pitch.pptx
@@ -5581,7 +5581,7 @@
                 <a:ea typeface="Arial" pitchFamily="34" charset="-122"/>
                 <a:cs typeface="Arial" pitchFamily="34" charset="-120"/>
               </a:rPr>
-              <a:t>679 юнит-тестов, покрытие приложения 66,4 %, сервисы 71 % и API 40 %, четыре сквозных сценария в браузере.</a:t>
+              <a:t>690 юнит-тестов, покрытие приложения 66,1 %, сервисы 71 % и API 39 %, четыре сквозных сценария в браузере.</a:t>
             </a:r>
             <a:endParaRPr lang="en-US" sz="1700" dirty="0"/>
           </a:p>

--- a/docs/pitch.pptx
+++ b/docs/pitch.pptx
@@ -2059,7 +2059,7 @@
                 <a:ea typeface="Arial" pitchFamily="34" charset="-122"/>
                 <a:cs typeface="Arial" pitchFamily="34" charset="-120"/>
               </a:rPr>
-              <a:t>Подключить ФСП ID и реестр протоколов по готовому контракту OIDC.</a:t>
+              <a:t>Проверьте сами: jury1…jury10, пароль demo12345.</a:t>
             </a:r>
             <a:endParaRPr lang="en-US" sz="2000" dirty="0"/>
           </a:p>
@@ -2080,7 +2080,7 @@
                 <a:ea typeface="Arial" pitchFamily="34" charset="-122"/>
                 <a:cs typeface="Arial" pitchFamily="34" charset="-120"/>
               </a:rPr>
-              <a:t>Откалибровать веса подбора на исходах приглашений и найма.</a:t>
+              <a:t>Подключить ФСП ID и реестр протоколов по готовому контракту OIDC.</a:t>
             </a:r>
             <a:endParaRPr lang="en-US" sz="2000" dirty="0"/>
           </a:p>
@@ -2101,7 +2101,7 @@
                 <a:ea typeface="Arial" pitchFamily="34" charset="-122"/>
                 <a:cs typeface="Arial" pitchFamily="34" charset="-120"/>
               </a:rPr>
-              <a:t>Открыть стенд для команд-участников ФСП и работодателей-партнёров.</a:t>
+              <a:t>Откалибровать веса подбора на исходах приглашений и найма.</a:t>
             </a:r>
             <a:endParaRPr lang="en-US" sz="2000" dirty="0"/>
           </a:p>
@@ -4528,7 +4528,7 @@
                 <a:ea typeface="Arial" pitchFamily="34" charset="-122"/>
                 <a:cs typeface="Arial" pitchFamily="34" charset="-120"/>
               </a:rPr>
-              <a:t>В первой десятке людей с завышенным грейдом: 19,8 % против 28,1 % у сортировки по резюме.</a:t>
+              <a:t>P@10 0,632 против 0,559 у сортировки по резюме: доля подходящих в первой десятке.</a:t>
             </a:r>
             <a:endParaRPr lang="en-US" sz="1600" dirty="0"/>
           </a:p>
@@ -4570,7 +4570,7 @@
                 <a:ea typeface="Arial" pitchFamily="34" charset="-122"/>
                 <a:cs typeface="Arial" pitchFamily="34" charset="-120"/>
               </a:rPr>
-              <a:t>nDCG@10 0,652 против 0,620. Ярус в порядок не вошёл: он теряет это совпадение.</a:t>
+              <a:t>nDCG@10 0,652 против 0,620. Завышенный грейд 19,8 % против 28,1 %.</a:t>
             </a:r>
             <a:endParaRPr lang="en-US" sz="1600" dirty="0"/>
           </a:p>
@@ -4798,7 +4798,7 @@
                 <a:ea typeface="Arial" pitchFamily="34" charset="-122"/>
                 <a:cs typeface="Arial" pitchFamily="34" charset="-120"/>
               </a:rPr>
-              <a:t>Соревнования не поднимают грейд, а уточняют порядок</a:t>
+              <a:t>Соревнования не поднимают грейд, статус не весит</a:t>
             </a:r>
             <a:endParaRPr lang="en-US" sz="3000" dirty="0"/>
           </a:p>
@@ -4903,7 +4903,7 @@
                 <a:ea typeface="Arial" pitchFamily="34" charset="-122"/>
                 <a:cs typeface="Arial" pitchFamily="34" charset="-120"/>
               </a:rPr>
-              <a:t>Спирмен нижней границы оси со скрытой силой</a:t>
+              <a:t>Спирмен нижней границы оси со скрытой силой. Разряд — справка из реестра, не расчёт по месту.</a:t>
             </a:r>
             <a:endParaRPr lang="en-US" sz="1600" dirty="0"/>
           </a:p>
@@ -5581,7 +5581,7 @@
                 <a:ea typeface="Arial" pitchFamily="34" charset="-122"/>
                 <a:cs typeface="Arial" pitchFamily="34" charset="-120"/>
               </a:rPr>
-              <a:t>690 юнит-тестов, покрытие приложения 66,1 %, сервисы 71 % и API 39 %, четыре сквозных сценария в браузере.</a:t>
+              <a:t>690 юнит-тестов, покрытие приложения 66,1 %, сервисы 71 % и API 39 %, шесть сквозных сценариев в браузере. Демо-стенд сбрасывается каждую ночь.</a:t>
             </a:r>
             <a:endParaRPr lang="en-US" sz="1700" dirty="0"/>
           </a:p>

--- a/docs/pitch.pptx
+++ b/docs/pitch.pptx
@@ -5581,7 +5581,7 @@
                 <a:ea typeface="Arial" pitchFamily="34" charset="-122"/>
                 <a:cs typeface="Arial" pitchFamily="34" charset="-120"/>
               </a:rPr>
-              <a:t>690 юнит-тестов, покрытие приложения 66,1 %, сервисы 71 % и API 39 %, шесть сквозных сценариев в браузере. Демо-стенд сбрасывается каждую ночь.</a:t>
+              <a:t>692 юнит-теста, покрытие приложения 66,1 %, сервисы 71 % и API 39 %, шесть сквозных сценариев в браузере. Демо-стенд сбрасывается каждую ночь.</a:t>
             </a:r>
             <a:endParaRPr lang="en-US" sz="1700" dirty="0"/>
           </a:p>

--- a/docs/pitch.pptx
+++ b/docs/pitch.pptx
@@ -5581,7 +5581,7 @@
                 <a:ea typeface="Arial" pitchFamily="34" charset="-122"/>
                 <a:cs typeface="Arial" pitchFamily="34" charset="-120"/>
               </a:rPr>
-              <a:t>690 юнит-тестов, покрытие приложения 66,1 %, сервисы 71 % и API 39 %, шесть сквозных сценариев в браузере. Демо-стенд сбрасывается каждую ночь.</a:t>
+              <a:t>696 юнит-тестов, покрытие приложения 66,2 %, сервисы 71 % и API 39 %, шесть сквозных сценариев в браузере. Демо-стенд сбрасывается каждую ночь.</a:t>
             </a:r>
             <a:endParaRPr lang="en-US" sz="1700" dirty="0"/>
           </a:p>

--- a/docs/pitch.pptx
+++ b/docs/pitch.pptx
@@ -5581,7 +5581,7 @@
                 <a:ea typeface="Arial" pitchFamily="34" charset="-122"/>
                 <a:cs typeface="Arial" pitchFamily="34" charset="-120"/>
               </a:rPr>
-              <a:t>690 юнит-тестов, покрытие приложения 66,1 %, сервисы 71 % и API 39 %, шесть сквозных сценариев в браузере. Демо-стенд сбрасывается каждую ночь.</a:t>
+              <a:t>690 юнит-тестов, покрытие приложения 65,9 %, сервисы 71 % и API 39 %, шесть сквозных сценариев в браузере. Демо-стенд сбрасывается каждую ночь.</a:t>
             </a:r>
             <a:endParaRPr lang="en-US" sz="1700" dirty="0"/>
           </a:p>

--- a/docs/pitch.pptx
+++ b/docs/pitch.pptx
@@ -5581,7 +5581,7 @@
                 <a:ea typeface="Arial" pitchFamily="34" charset="-122"/>
                 <a:cs typeface="Arial" pitchFamily="34" charset="-120"/>
               </a:rPr>
-              <a:t>690 юнит-тестов, покрытие приложения 66,1 %, сервисы 71 % и API 39 %, шесть сквозных сценариев в браузере. Демо-стенд сбрасывается каждую ночь.</a:t>
+              <a:t>692 юнит-теста, покрытие приложения 66,0 %, сервисы 71 % и API 39 %, шесть сквозных сценариев в браузере. Демо-стенд сбрасывается каждую ночь.</a:t>
             </a:r>
             <a:endParaRPr lang="en-US" sz="1700" dirty="0"/>
           </a:p>
